--- a/Presentations/WulfingPoster_ICES.pptx
+++ b/Presentations/WulfingPoster_ICES.pptx
@@ -141,3480 +141,6 @@
 </p:cmAuthorLst>
 </file>
 
-<file path=ppt/diagrams/colors1.xml><?xml version="1.0" encoding="utf-8"?>
-<dgm:colorsDef xmlns:dgm="http://schemas.openxmlformats.org/drawingml/2006/diagram" xmlns:a="http://schemas.openxmlformats.org/drawingml/2006/main" uniqueId="urn:microsoft.com/office/officeart/2005/8/colors/colorful5">
-  <dgm:title val=""/>
-  <dgm:desc val=""/>
-  <dgm:catLst>
-    <dgm:cat type="colorful" pri="10500"/>
-  </dgm:catLst>
-  <dgm:styleLbl name="node0">
-    <dgm:fillClrLst meth="repeat">
-      <a:schemeClr val="accent4"/>
-    </dgm:fillClrLst>
-    <dgm:linClrLst meth="repeat">
-      <a:schemeClr val="lt1"/>
-    </dgm:linClrLst>
-    <dgm:effectClrLst/>
-    <dgm:txLinClrLst/>
-    <dgm:txFillClrLst/>
-    <dgm:txEffectClrLst/>
-  </dgm:styleLbl>
-  <dgm:styleLbl name="node1">
-    <dgm:fillClrLst>
-      <a:schemeClr val="accent5"/>
-      <a:schemeClr val="accent6"/>
-    </dgm:fillClrLst>
-    <dgm:linClrLst meth="repeat">
-      <a:schemeClr val="lt1"/>
-    </dgm:linClrLst>
-    <dgm:effectClrLst/>
-    <dgm:txLinClrLst/>
-    <dgm:txFillClrLst/>
-    <dgm:txEffectClrLst/>
-  </dgm:styleLbl>
-  <dgm:styleLbl name="alignNode1">
-    <dgm:fillClrLst>
-      <a:schemeClr val="accent5"/>
-      <a:schemeClr val="accent6"/>
-    </dgm:fillClrLst>
-    <dgm:linClrLst>
-      <a:schemeClr val="accent5"/>
-      <a:schemeClr val="accent6"/>
-    </dgm:linClrLst>
-    <dgm:effectClrLst/>
-    <dgm:txLinClrLst/>
-    <dgm:txFillClrLst/>
-    <dgm:txEffectClrLst/>
-  </dgm:styleLbl>
-  <dgm:styleLbl name="lnNode1">
-    <dgm:fillClrLst>
-      <a:schemeClr val="accent5"/>
-      <a:schemeClr val="accent6"/>
-    </dgm:fillClrLst>
-    <dgm:linClrLst meth="repeat">
-      <a:schemeClr val="lt1"/>
-    </dgm:linClrLst>
-    <dgm:effectClrLst/>
-    <dgm:txLinClrLst/>
-    <dgm:txFillClrLst/>
-    <dgm:txEffectClrLst/>
-  </dgm:styleLbl>
-  <dgm:styleLbl name="vennNode1">
-    <dgm:fillClrLst>
-      <a:schemeClr val="accent5">
-        <a:alpha val="50000"/>
-      </a:schemeClr>
-      <a:schemeClr val="accent6">
-        <a:alpha val="50000"/>
-      </a:schemeClr>
-    </dgm:fillClrLst>
-    <dgm:linClrLst meth="repeat">
-      <a:schemeClr val="lt1"/>
-    </dgm:linClrLst>
-    <dgm:effectClrLst/>
-    <dgm:txLinClrLst/>
-    <dgm:txFillClrLst/>
-    <dgm:txEffectClrLst/>
-  </dgm:styleLbl>
-  <dgm:styleLbl name="node2">
-    <dgm:fillClrLst>
-      <a:schemeClr val="accent6"/>
-    </dgm:fillClrLst>
-    <dgm:linClrLst meth="repeat">
-      <a:schemeClr val="lt1"/>
-    </dgm:linClrLst>
-    <dgm:effectClrLst/>
-    <dgm:txLinClrLst/>
-    <dgm:txFillClrLst/>
-    <dgm:txEffectClrLst/>
-  </dgm:styleLbl>
-  <dgm:styleLbl name="node3">
-    <dgm:fillClrLst>
-      <a:schemeClr val="accent1"/>
-    </dgm:fillClrLst>
-    <dgm:linClrLst meth="repeat">
-      <a:schemeClr val="lt1"/>
-    </dgm:linClrLst>
-    <dgm:effectClrLst/>
-    <dgm:txLinClrLst/>
-    <dgm:txFillClrLst/>
-    <dgm:txEffectClrLst/>
-  </dgm:styleLbl>
-  <dgm:styleLbl name="node4">
-    <dgm:fillClrLst>
-      <a:schemeClr val="accent2"/>
-    </dgm:fillClrLst>
-    <dgm:linClrLst meth="repeat">
-      <a:schemeClr val="lt1"/>
-    </dgm:linClrLst>
-    <dgm:effectClrLst/>
-    <dgm:txLinClrLst/>
-    <dgm:txFillClrLst/>
-    <dgm:txEffectClrLst/>
-  </dgm:styleLbl>
-  <dgm:styleLbl name="fgImgPlace1">
-    <dgm:fillClrLst>
-      <a:schemeClr val="accent5">
-        <a:tint val="50000"/>
-      </a:schemeClr>
-      <a:schemeClr val="accent6">
-        <a:tint val="50000"/>
-      </a:schemeClr>
-    </dgm:fillClrLst>
-    <dgm:linClrLst meth="repeat">
-      <a:schemeClr val="lt1"/>
-    </dgm:linClrLst>
-    <dgm:effectClrLst/>
-    <dgm:txLinClrLst/>
-    <dgm:txFillClrLst meth="repeat">
-      <a:schemeClr val="lt1"/>
-    </dgm:txFillClrLst>
-    <dgm:txEffectClrLst/>
-  </dgm:styleLbl>
-  <dgm:styleLbl name="alignImgPlace1">
-    <dgm:fillClrLst>
-      <a:schemeClr val="accent5">
-        <a:tint val="50000"/>
-      </a:schemeClr>
-      <a:schemeClr val="accent6">
-        <a:tint val="20000"/>
-      </a:schemeClr>
-    </dgm:fillClrLst>
-    <dgm:linClrLst meth="repeat">
-      <a:schemeClr val="lt1"/>
-    </dgm:linClrLst>
-    <dgm:effectClrLst/>
-    <dgm:txLinClrLst/>
-    <dgm:txFillClrLst meth="repeat">
-      <a:schemeClr val="lt1"/>
-    </dgm:txFillClrLst>
-    <dgm:txEffectClrLst/>
-  </dgm:styleLbl>
-  <dgm:styleLbl name="bgImgPlace1">
-    <dgm:fillClrLst>
-      <a:schemeClr val="accent5">
-        <a:tint val="50000"/>
-      </a:schemeClr>
-      <a:schemeClr val="accent6">
-        <a:tint val="20000"/>
-      </a:schemeClr>
-    </dgm:fillClrLst>
-    <dgm:linClrLst meth="repeat">
-      <a:schemeClr val="lt1"/>
-    </dgm:linClrLst>
-    <dgm:effectClrLst/>
-    <dgm:txLinClrLst/>
-    <dgm:txFillClrLst meth="repeat">
-      <a:schemeClr val="lt1"/>
-    </dgm:txFillClrLst>
-    <dgm:txEffectClrLst/>
-  </dgm:styleLbl>
-  <dgm:styleLbl name="sibTrans2D1">
-    <dgm:fillClrLst>
-      <a:schemeClr val="accent5"/>
-      <a:schemeClr val="accent6"/>
-    </dgm:fillClrLst>
-    <dgm:linClrLst meth="repeat">
-      <a:schemeClr val="lt1"/>
-    </dgm:linClrLst>
-    <dgm:effectClrLst/>
-    <dgm:txLinClrLst/>
-    <dgm:txFillClrLst/>
-    <dgm:txEffectClrLst/>
-  </dgm:styleLbl>
-  <dgm:styleLbl name="fgSibTrans2D1">
-    <dgm:fillClrLst>
-      <a:schemeClr val="accent5"/>
-      <a:schemeClr val="accent6"/>
-    </dgm:fillClrLst>
-    <dgm:linClrLst meth="repeat">
-      <a:schemeClr val="lt1"/>
-    </dgm:linClrLst>
-    <dgm:effectClrLst/>
-    <dgm:txLinClrLst/>
-    <dgm:txFillClrLst meth="repeat">
-      <a:schemeClr val="lt1"/>
-    </dgm:txFillClrLst>
-    <dgm:txEffectClrLst/>
-  </dgm:styleLbl>
-  <dgm:styleLbl name="bgSibTrans2D1">
-    <dgm:fillClrLst>
-      <a:schemeClr val="accent5"/>
-      <a:schemeClr val="accent6"/>
-    </dgm:fillClrLst>
-    <dgm:linClrLst meth="repeat">
-      <a:schemeClr val="lt1"/>
-    </dgm:linClrLst>
-    <dgm:effectClrLst/>
-    <dgm:txLinClrLst/>
-    <dgm:txFillClrLst meth="repeat">
-      <a:schemeClr val="lt1"/>
-    </dgm:txFillClrLst>
-    <dgm:txEffectClrLst/>
-  </dgm:styleLbl>
-  <dgm:styleLbl name="sibTrans1D1">
-    <dgm:fillClrLst/>
-    <dgm:linClrLst>
-      <a:schemeClr val="accent5"/>
-      <a:schemeClr val="accent6"/>
-    </dgm:linClrLst>
-    <dgm:effectClrLst/>
-    <dgm:txLinClrLst/>
-    <dgm:txFillClrLst meth="repeat">
-      <a:schemeClr val="tx1"/>
-    </dgm:txFillClrLst>
-    <dgm:txEffectClrLst/>
-  </dgm:styleLbl>
-  <dgm:styleLbl name="callout">
-    <dgm:fillClrLst meth="repeat">
-      <a:schemeClr val="accent5"/>
-    </dgm:fillClrLst>
-    <dgm:linClrLst meth="repeat">
-      <a:schemeClr val="accent5">
-        <a:tint val="50000"/>
-      </a:schemeClr>
-    </dgm:linClrLst>
-    <dgm:effectClrLst/>
-    <dgm:txLinClrLst/>
-    <dgm:txFillClrLst meth="repeat">
-      <a:schemeClr val="tx1"/>
-    </dgm:txFillClrLst>
-    <dgm:txEffectClrLst/>
-  </dgm:styleLbl>
-  <dgm:styleLbl name="asst0">
-    <dgm:fillClrLst meth="repeat">
-      <a:schemeClr val="accent5"/>
-    </dgm:fillClrLst>
-    <dgm:linClrLst meth="repeat">
-      <a:schemeClr val="lt1">
-        <a:shade val="80000"/>
-      </a:schemeClr>
-    </dgm:linClrLst>
-    <dgm:effectClrLst/>
-    <dgm:txLinClrLst/>
-    <dgm:txFillClrLst/>
-    <dgm:txEffectClrLst/>
-  </dgm:styleLbl>
-  <dgm:styleLbl name="asst1">
-    <dgm:fillClrLst meth="repeat">
-      <a:schemeClr val="accent6"/>
-    </dgm:fillClrLst>
-    <dgm:linClrLst meth="repeat">
-      <a:schemeClr val="lt1">
-        <a:shade val="80000"/>
-      </a:schemeClr>
-    </dgm:linClrLst>
-    <dgm:effectClrLst/>
-    <dgm:txLinClrLst/>
-    <dgm:txFillClrLst/>
-    <dgm:txEffectClrLst/>
-  </dgm:styleLbl>
-  <dgm:styleLbl name="asst2">
-    <dgm:fillClrLst>
-      <a:schemeClr val="accent1"/>
-    </dgm:fillClrLst>
-    <dgm:linClrLst meth="repeat">
-      <a:schemeClr val="lt1"/>
-    </dgm:linClrLst>
-    <dgm:effectClrLst/>
-    <dgm:txLinClrLst/>
-    <dgm:txFillClrLst/>
-    <dgm:txEffectClrLst/>
-  </dgm:styleLbl>
-  <dgm:styleLbl name="asst3">
-    <dgm:fillClrLst>
-      <a:schemeClr val="accent2"/>
-    </dgm:fillClrLst>
-    <dgm:linClrLst meth="repeat">
-      <a:schemeClr val="lt1"/>
-    </dgm:linClrLst>
-    <dgm:effectClrLst/>
-    <dgm:txLinClrLst/>
-    <dgm:txFillClrLst/>
-    <dgm:txEffectClrLst/>
-  </dgm:styleLbl>
-  <dgm:styleLbl name="asst4">
-    <dgm:fillClrLst>
-      <a:schemeClr val="accent3"/>
-    </dgm:fillClrLst>
-    <dgm:linClrLst meth="repeat">
-      <a:schemeClr val="lt1"/>
-    </dgm:linClrLst>
-    <dgm:effectClrLst/>
-    <dgm:txLinClrLst/>
-    <dgm:txFillClrLst/>
-    <dgm:txEffectClrLst/>
-  </dgm:styleLbl>
-  <dgm:styleLbl name="parChTrans2D1">
-    <dgm:fillClrLst meth="repeat">
-      <a:schemeClr val="accent5"/>
-    </dgm:fillClrLst>
-    <dgm:linClrLst meth="repeat">
-      <a:schemeClr val="lt1"/>
-    </dgm:linClrLst>
-    <dgm:effectClrLst/>
-    <dgm:txLinClrLst/>
-    <dgm:txFillClrLst meth="repeat">
-      <a:schemeClr val="lt1"/>
-    </dgm:txFillClrLst>
-    <dgm:txEffectClrLst/>
-  </dgm:styleLbl>
-  <dgm:styleLbl name="parChTrans2D2">
-    <dgm:fillClrLst meth="repeat">
-      <a:schemeClr val="accent6"/>
-    </dgm:fillClrLst>
-    <dgm:linClrLst meth="repeat">
-      <a:schemeClr val="lt1"/>
-    </dgm:linClrLst>
-    <dgm:effectClrLst/>
-    <dgm:txLinClrLst/>
-    <dgm:txFillClrLst/>
-    <dgm:txEffectClrLst/>
-  </dgm:styleLbl>
-  <dgm:styleLbl name="parChTrans2D3">
-    <dgm:fillClrLst meth="repeat">
-      <a:schemeClr val="accent6"/>
-    </dgm:fillClrLst>
-    <dgm:linClrLst meth="repeat">
-      <a:schemeClr val="lt1"/>
-    </dgm:linClrLst>
-    <dgm:effectClrLst/>
-    <dgm:txLinClrLst/>
-    <dgm:txFillClrLst/>
-    <dgm:txEffectClrLst/>
-  </dgm:styleLbl>
-  <dgm:styleLbl name="parChTrans2D4">
-    <dgm:fillClrLst meth="repeat">
-      <a:schemeClr val="accent1"/>
-    </dgm:fillClrLst>
-    <dgm:linClrLst meth="repeat">
-      <a:schemeClr val="lt1"/>
-    </dgm:linClrLst>
-    <dgm:effectClrLst/>
-    <dgm:txLinClrLst/>
-    <dgm:txFillClrLst meth="repeat">
-      <a:schemeClr val="lt1"/>
-    </dgm:txFillClrLst>
-    <dgm:txEffectClrLst/>
-  </dgm:styleLbl>
-  <dgm:styleLbl name="parChTrans1D1">
-    <dgm:fillClrLst meth="repeat">
-      <a:schemeClr val="accent5"/>
-    </dgm:fillClrLst>
-    <dgm:linClrLst meth="repeat">
-      <a:schemeClr val="accent5"/>
-    </dgm:linClrLst>
-    <dgm:effectClrLst/>
-    <dgm:txLinClrLst/>
-    <dgm:txFillClrLst meth="repeat">
-      <a:schemeClr val="tx1"/>
-    </dgm:txFillClrLst>
-    <dgm:txEffectClrLst/>
-  </dgm:styleLbl>
-  <dgm:styleLbl name="parChTrans1D2">
-    <dgm:fillClrLst meth="repeat">
-      <a:schemeClr val="accent6">
-        <a:tint val="90000"/>
-      </a:schemeClr>
-    </dgm:fillClrLst>
-    <dgm:linClrLst meth="repeat">
-      <a:schemeClr val="accent6"/>
-    </dgm:linClrLst>
-    <dgm:effectClrLst/>
-    <dgm:txLinClrLst/>
-    <dgm:txFillClrLst meth="repeat">
-      <a:schemeClr val="tx1"/>
-    </dgm:txFillClrLst>
-    <dgm:txEffectClrLst/>
-  </dgm:styleLbl>
-  <dgm:styleLbl name="parChTrans1D3">
-    <dgm:fillClrLst meth="repeat">
-      <a:schemeClr val="accent6">
-        <a:tint val="70000"/>
-      </a:schemeClr>
-    </dgm:fillClrLst>
-    <dgm:linClrLst meth="repeat">
-      <a:schemeClr val="accent1"/>
-    </dgm:linClrLst>
-    <dgm:effectClrLst/>
-    <dgm:txLinClrLst/>
-    <dgm:txFillClrLst meth="repeat">
-      <a:schemeClr val="tx1"/>
-    </dgm:txFillClrLst>
-    <dgm:txEffectClrLst/>
-  </dgm:styleLbl>
-  <dgm:styleLbl name="parChTrans1D4">
-    <dgm:fillClrLst meth="repeat">
-      <a:schemeClr val="accent6">
-        <a:tint val="50000"/>
-      </a:schemeClr>
-    </dgm:fillClrLst>
-    <dgm:linClrLst meth="repeat">
-      <a:schemeClr val="accent2"/>
-    </dgm:linClrLst>
-    <dgm:effectClrLst/>
-    <dgm:txLinClrLst/>
-    <dgm:txFillClrLst meth="repeat">
-      <a:schemeClr val="tx1"/>
-    </dgm:txFillClrLst>
-    <dgm:txEffectClrLst/>
-  </dgm:styleLbl>
-  <dgm:styleLbl name="fgAcc1">
-    <dgm:fillClrLst meth="repeat">
-      <a:schemeClr val="lt1">
-        <a:alpha val="90000"/>
-      </a:schemeClr>
-    </dgm:fillClrLst>
-    <dgm:linClrLst>
-      <a:schemeClr val="accent5"/>
-      <a:schemeClr val="accent6"/>
-    </dgm:linClrLst>
-    <dgm:effectClrLst/>
-    <dgm:txLinClrLst/>
-    <dgm:txFillClrLst meth="repeat">
-      <a:schemeClr val="dk1"/>
-    </dgm:txFillClrLst>
-    <dgm:txEffectClrLst/>
-  </dgm:styleLbl>
-  <dgm:styleLbl name="conFgAcc1">
-    <dgm:fillClrLst meth="repeat">
-      <a:schemeClr val="lt1">
-        <a:alpha val="90000"/>
-      </a:schemeClr>
-    </dgm:fillClrLst>
-    <dgm:linClrLst>
-      <a:schemeClr val="accent5"/>
-      <a:schemeClr val="accent6"/>
-    </dgm:linClrLst>
-    <dgm:effectClrLst/>
-    <dgm:txLinClrLst/>
-    <dgm:txFillClrLst meth="repeat">
-      <a:schemeClr val="dk1"/>
-    </dgm:txFillClrLst>
-    <dgm:txEffectClrLst/>
-  </dgm:styleLbl>
-  <dgm:styleLbl name="alignAcc1">
-    <dgm:fillClrLst meth="repeat">
-      <a:schemeClr val="lt1">
-        <a:alpha val="90000"/>
-      </a:schemeClr>
-    </dgm:fillClrLst>
-    <dgm:linClrLst>
-      <a:schemeClr val="accent5"/>
-      <a:schemeClr val="accent6"/>
-    </dgm:linClrLst>
-    <dgm:effectClrLst/>
-    <dgm:txLinClrLst/>
-    <dgm:txFillClrLst meth="repeat">
-      <a:schemeClr val="dk1"/>
-    </dgm:txFillClrLst>
-    <dgm:txEffectClrLst/>
-  </dgm:styleLbl>
-  <dgm:styleLbl name="trAlignAcc1">
-    <dgm:fillClrLst meth="repeat">
-      <a:schemeClr val="lt1">
-        <a:alpha val="40000"/>
-      </a:schemeClr>
-    </dgm:fillClrLst>
-    <dgm:linClrLst meth="repeat">
-      <a:schemeClr val="accent5"/>
-    </dgm:linClrLst>
-    <dgm:effectClrLst/>
-    <dgm:txLinClrLst/>
-    <dgm:txFillClrLst meth="repeat">
-      <a:schemeClr val="dk1"/>
-    </dgm:txFillClrLst>
-    <dgm:txEffectClrLst/>
-  </dgm:styleLbl>
-  <dgm:styleLbl name="bgAcc1">
-    <dgm:fillClrLst meth="repeat">
-      <a:schemeClr val="lt1">
-        <a:alpha val="90000"/>
-      </a:schemeClr>
-    </dgm:fillClrLst>
-    <dgm:linClrLst>
-      <a:schemeClr val="accent5"/>
-      <a:schemeClr val="accent6"/>
-    </dgm:linClrLst>
-    <dgm:effectClrLst/>
-    <dgm:txLinClrLst/>
-    <dgm:txFillClrLst meth="repeat">
-      <a:schemeClr val="dk1"/>
-    </dgm:txFillClrLst>
-    <dgm:txEffectClrLst/>
-  </dgm:styleLbl>
-  <dgm:styleLbl name="solidFgAcc1">
-    <dgm:fillClrLst meth="repeat">
-      <a:schemeClr val="lt1"/>
-    </dgm:fillClrLst>
-    <dgm:linClrLst>
-      <a:schemeClr val="accent5"/>
-      <a:schemeClr val="accent6"/>
-    </dgm:linClrLst>
-    <dgm:effectClrLst/>
-    <dgm:txLinClrLst/>
-    <dgm:txFillClrLst meth="repeat">
-      <a:schemeClr val="dk1"/>
-    </dgm:txFillClrLst>
-    <dgm:txEffectClrLst/>
-  </dgm:styleLbl>
-  <dgm:styleLbl name="solidAlignAcc1">
-    <dgm:fillClrLst meth="repeat">
-      <a:schemeClr val="lt1"/>
-    </dgm:fillClrLst>
-    <dgm:linClrLst>
-      <a:schemeClr val="accent5"/>
-      <a:schemeClr val="accent6"/>
-    </dgm:linClrLst>
-    <dgm:effectClrLst/>
-    <dgm:txLinClrLst/>
-    <dgm:txFillClrLst meth="repeat">
-      <a:schemeClr val="dk1"/>
-    </dgm:txFillClrLst>
-    <dgm:txEffectClrLst/>
-  </dgm:styleLbl>
-  <dgm:styleLbl name="solidBgAcc1">
-    <dgm:fillClrLst meth="repeat">
-      <a:schemeClr val="lt1"/>
-    </dgm:fillClrLst>
-    <dgm:linClrLst>
-      <a:schemeClr val="accent5"/>
-      <a:schemeClr val="accent6"/>
-    </dgm:linClrLst>
-    <dgm:effectClrLst/>
-    <dgm:txLinClrLst/>
-    <dgm:txFillClrLst meth="repeat">
-      <a:schemeClr val="dk1"/>
-    </dgm:txFillClrLst>
-    <dgm:txEffectClrLst/>
-  </dgm:styleLbl>
-  <dgm:styleLbl name="fgAccFollowNode1">
-    <dgm:fillClrLst>
-      <a:schemeClr val="accent5">
-        <a:tint val="40000"/>
-        <a:alpha val="90000"/>
-      </a:schemeClr>
-      <a:schemeClr val="accent6">
-        <a:tint val="40000"/>
-        <a:alpha val="90000"/>
-      </a:schemeClr>
-    </dgm:fillClrLst>
-    <dgm:linClrLst>
-      <a:schemeClr val="accent5">
-        <a:tint val="40000"/>
-        <a:alpha val="90000"/>
-      </a:schemeClr>
-      <a:schemeClr val="accent5">
-        <a:tint val="40000"/>
-        <a:alpha val="90000"/>
-      </a:schemeClr>
-    </dgm:linClrLst>
-    <dgm:effectClrLst/>
-    <dgm:txLinClrLst/>
-    <dgm:txFillClrLst meth="repeat">
-      <a:schemeClr val="dk1"/>
-    </dgm:txFillClrLst>
-    <dgm:txEffectClrLst/>
-  </dgm:styleLbl>
-  <dgm:styleLbl name="alignAccFollowNode1">
-    <dgm:fillClrLst>
-      <a:schemeClr val="accent5">
-        <a:tint val="40000"/>
-        <a:alpha val="90000"/>
-      </a:schemeClr>
-      <a:schemeClr val="accent6">
-        <a:tint val="40000"/>
-        <a:alpha val="90000"/>
-      </a:schemeClr>
-    </dgm:fillClrLst>
-    <dgm:linClrLst>
-      <a:schemeClr val="accent5">
-        <a:tint val="40000"/>
-        <a:alpha val="90000"/>
-      </a:schemeClr>
-      <a:schemeClr val="accent6">
-        <a:tint val="40000"/>
-        <a:alpha val="90000"/>
-      </a:schemeClr>
-    </dgm:linClrLst>
-    <dgm:effectClrLst/>
-    <dgm:txLinClrLst/>
-    <dgm:txFillClrLst meth="repeat">
-      <a:schemeClr val="dk1"/>
-    </dgm:txFillClrLst>
-    <dgm:txEffectClrLst/>
-  </dgm:styleLbl>
-  <dgm:styleLbl name="bgAccFollowNode1">
-    <dgm:fillClrLst>
-      <a:schemeClr val="accent5">
-        <a:tint val="40000"/>
-        <a:alpha val="90000"/>
-      </a:schemeClr>
-      <a:schemeClr val="accent6">
-        <a:tint val="40000"/>
-        <a:alpha val="90000"/>
-      </a:schemeClr>
-    </dgm:fillClrLst>
-    <dgm:linClrLst>
-      <a:schemeClr val="accent5">
-        <a:tint val="40000"/>
-        <a:alpha val="90000"/>
-      </a:schemeClr>
-      <a:schemeClr val="accent6">
-        <a:tint val="40000"/>
-        <a:alpha val="90000"/>
-      </a:schemeClr>
-    </dgm:linClrLst>
-    <dgm:effectClrLst/>
-    <dgm:txLinClrLst/>
-    <dgm:txFillClrLst meth="repeat">
-      <a:schemeClr val="dk1"/>
-    </dgm:txFillClrLst>
-    <dgm:txEffectClrLst/>
-  </dgm:styleLbl>
-  <dgm:styleLbl name="fgAcc0">
-    <dgm:fillClrLst meth="repeat">
-      <a:schemeClr val="lt1">
-        <a:alpha val="90000"/>
-      </a:schemeClr>
-    </dgm:fillClrLst>
-    <dgm:linClrLst>
-      <a:schemeClr val="accent4"/>
-    </dgm:linClrLst>
-    <dgm:effectClrLst/>
-    <dgm:txLinClrLst/>
-    <dgm:txFillClrLst meth="repeat">
-      <a:schemeClr val="dk1"/>
-    </dgm:txFillClrLst>
-    <dgm:txEffectClrLst/>
-  </dgm:styleLbl>
-  <dgm:styleLbl name="fgAcc2">
-    <dgm:fillClrLst meth="repeat">
-      <a:schemeClr val="lt1">
-        <a:alpha val="90000"/>
-      </a:schemeClr>
-    </dgm:fillClrLst>
-    <dgm:linClrLst>
-      <a:schemeClr val="accent6"/>
-    </dgm:linClrLst>
-    <dgm:effectClrLst/>
-    <dgm:txLinClrLst/>
-    <dgm:txFillClrLst meth="repeat">
-      <a:schemeClr val="dk1"/>
-    </dgm:txFillClrLst>
-    <dgm:txEffectClrLst/>
-  </dgm:styleLbl>
-  <dgm:styleLbl name="fgAcc3">
-    <dgm:fillClrLst meth="repeat">
-      <a:schemeClr val="lt1">
-        <a:alpha val="90000"/>
-      </a:schemeClr>
-    </dgm:fillClrLst>
-    <dgm:linClrLst>
-      <a:schemeClr val="accent1"/>
-    </dgm:linClrLst>
-    <dgm:effectClrLst/>
-    <dgm:txLinClrLst/>
-    <dgm:txFillClrLst meth="repeat">
-      <a:schemeClr val="dk1"/>
-    </dgm:txFillClrLst>
-    <dgm:txEffectClrLst/>
-  </dgm:styleLbl>
-  <dgm:styleLbl name="fgAcc4">
-    <dgm:fillClrLst meth="repeat">
-      <a:schemeClr val="lt1">
-        <a:alpha val="90000"/>
-      </a:schemeClr>
-    </dgm:fillClrLst>
-    <dgm:linClrLst>
-      <a:schemeClr val="accent2"/>
-    </dgm:linClrLst>
-    <dgm:effectClrLst/>
-    <dgm:txLinClrLst/>
-    <dgm:txFillClrLst meth="repeat">
-      <a:schemeClr val="dk1"/>
-    </dgm:txFillClrLst>
-    <dgm:txEffectClrLst/>
-  </dgm:styleLbl>
-  <dgm:styleLbl name="bgShp">
-    <dgm:fillClrLst meth="repeat">
-      <a:schemeClr val="accent5">
-        <a:tint val="40000"/>
-      </a:schemeClr>
-    </dgm:fillClrLst>
-    <dgm:linClrLst meth="repeat">
-      <a:schemeClr val="dk1"/>
-    </dgm:linClrLst>
-    <dgm:effectClrLst/>
-    <dgm:txLinClrLst/>
-    <dgm:txFillClrLst meth="repeat">
-      <a:schemeClr val="dk1"/>
-    </dgm:txFillClrLst>
-    <dgm:txEffectClrLst/>
-  </dgm:styleLbl>
-  <dgm:styleLbl name="dkBgShp">
-    <dgm:fillClrLst meth="repeat">
-      <a:schemeClr val="accent5">
-        <a:shade val="90000"/>
-      </a:schemeClr>
-    </dgm:fillClrLst>
-    <dgm:linClrLst meth="repeat">
-      <a:schemeClr val="dk1"/>
-    </dgm:linClrLst>
-    <dgm:effectClrLst/>
-    <dgm:txLinClrLst/>
-    <dgm:txFillClrLst meth="repeat">
-      <a:schemeClr val="lt1"/>
-    </dgm:txFillClrLst>
-    <dgm:txEffectClrLst/>
-  </dgm:styleLbl>
-  <dgm:styleLbl name="trBgShp">
-    <dgm:fillClrLst meth="repeat">
-      <a:schemeClr val="accent5">
-        <a:tint val="50000"/>
-        <a:alpha val="40000"/>
-      </a:schemeClr>
-    </dgm:fillClrLst>
-    <dgm:linClrLst meth="repeat">
-      <a:schemeClr val="accent5"/>
-    </dgm:linClrLst>
-    <dgm:effectClrLst/>
-    <dgm:txLinClrLst/>
-    <dgm:txFillClrLst meth="repeat">
-      <a:schemeClr val="lt1"/>
-    </dgm:txFillClrLst>
-    <dgm:txEffectClrLst/>
-  </dgm:styleLbl>
-  <dgm:styleLbl name="fgShp">
-    <dgm:fillClrLst meth="repeat">
-      <a:schemeClr val="accent5">
-        <a:tint val="40000"/>
-      </a:schemeClr>
-    </dgm:fillClrLst>
-    <dgm:linClrLst meth="repeat">
-      <a:schemeClr val="lt1"/>
-    </dgm:linClrLst>
-    <dgm:effectClrLst/>
-    <dgm:txLinClrLst/>
-    <dgm:txFillClrLst meth="repeat">
-      <a:schemeClr val="dk1"/>
-    </dgm:txFillClrLst>
-    <dgm:txEffectClrLst/>
-  </dgm:styleLbl>
-  <dgm:styleLbl name="revTx">
-    <dgm:fillClrLst meth="repeat">
-      <a:schemeClr val="lt1">
-        <a:alpha val="0"/>
-      </a:schemeClr>
-    </dgm:fillClrLst>
-    <dgm:linClrLst meth="repeat">
-      <a:schemeClr val="dk1">
-        <a:alpha val="0"/>
-      </a:schemeClr>
-    </dgm:linClrLst>
-    <dgm:effectClrLst/>
-    <dgm:txLinClrLst/>
-    <dgm:txFillClrLst meth="repeat">
-      <a:schemeClr val="tx1"/>
-    </dgm:txFillClrLst>
-    <dgm:txEffectClrLst/>
-  </dgm:styleLbl>
-</dgm:colorsDef>
-</file>
-
-<file path=ppt/diagrams/data1.xml><?xml version="1.0" encoding="utf-8"?>
-<dgm:dataModel xmlns:dgm="http://schemas.openxmlformats.org/drawingml/2006/diagram" xmlns:a="http://schemas.openxmlformats.org/drawingml/2006/main">
-  <dgm:ptLst>
-    <dgm:pt modelId="{82B7874D-9E37-4CE3-8828-594AD898F5CF}" type="doc">
-      <dgm:prSet loTypeId="urn:microsoft.com/office/officeart/2005/8/layout/hProcess6" loCatId="process" qsTypeId="urn:microsoft.com/office/officeart/2005/8/quickstyle/simple1" qsCatId="simple" csTypeId="urn:microsoft.com/office/officeart/2005/8/colors/colorful5" csCatId="colorful" phldr="1"/>
-      <dgm:spPr/>
-      <dgm:t>
-        <a:bodyPr/>
-        <a:lstStyle/>
-        <a:p>
-          <a:endParaRPr lang="en-US"/>
-        </a:p>
-      </dgm:t>
-    </dgm:pt>
-    <dgm:pt modelId="{FD57A578-90C0-4F3B-BCBC-9D1ADC7CBD5B}">
-      <dgm:prSet phldrT="[Text]"/>
-      <dgm:spPr/>
-      <dgm:t>
-        <a:bodyPr/>
-        <a:lstStyle/>
-        <a:p>
-          <a:r>
-            <a:rPr lang="en-US" dirty="0"/>
-            <a:t>MSE 0</a:t>
-          </a:r>
-        </a:p>
-      </dgm:t>
-    </dgm:pt>
-    <dgm:pt modelId="{FE589BA0-A86E-4A08-A4FC-CF50BE036805}" type="parTrans" cxnId="{57CCBB67-0592-4E21-B654-E9712A62C91D}">
-      <dgm:prSet/>
-      <dgm:spPr/>
-      <dgm:t>
-        <a:bodyPr/>
-        <a:lstStyle/>
-        <a:p>
-          <a:endParaRPr lang="en-US"/>
-        </a:p>
-      </dgm:t>
-    </dgm:pt>
-    <dgm:pt modelId="{FAB6C6B4-6A06-449D-B6E7-C33E9A778528}" type="sibTrans" cxnId="{57CCBB67-0592-4E21-B654-E9712A62C91D}">
-      <dgm:prSet/>
-      <dgm:spPr/>
-      <dgm:t>
-        <a:bodyPr/>
-        <a:lstStyle/>
-        <a:p>
-          <a:endParaRPr lang="en-US"/>
-        </a:p>
-      </dgm:t>
-    </dgm:pt>
-    <dgm:pt modelId="{DE7CA0C9-07FF-46D6-B635-EBF35E30530F}">
-      <dgm:prSet phldrT="[Text]"/>
-      <dgm:spPr>
-        <a:ln>
-          <a:solidFill>
-            <a:schemeClr val="tx1">
-              <a:alpha val="90000"/>
-            </a:schemeClr>
-          </a:solidFill>
-        </a:ln>
-      </dgm:spPr>
-      <dgm:t>
-        <a:bodyPr/>
-        <a:lstStyle/>
-        <a:p>
-          <a:r>
-            <a:rPr lang="en-US" dirty="0"/>
-            <a:t>Historical temp data incorporated from om</a:t>
-          </a:r>
-        </a:p>
-      </dgm:t>
-    </dgm:pt>
-    <dgm:pt modelId="{7A5824F7-5AEB-418D-A9E9-53D3122AED99}" type="parTrans" cxnId="{95A45927-7198-43D3-894E-F225DD35A2AD}">
-      <dgm:prSet/>
-      <dgm:spPr/>
-      <dgm:t>
-        <a:bodyPr/>
-        <a:lstStyle/>
-        <a:p>
-          <a:endParaRPr lang="en-US"/>
-        </a:p>
-      </dgm:t>
-    </dgm:pt>
-    <dgm:pt modelId="{E76932AB-C58E-41BA-980F-DCB78AF0380E}" type="sibTrans" cxnId="{95A45927-7198-43D3-894E-F225DD35A2AD}">
-      <dgm:prSet/>
-      <dgm:spPr/>
-      <dgm:t>
-        <a:bodyPr/>
-        <a:lstStyle/>
-        <a:p>
-          <a:endParaRPr lang="en-US"/>
-        </a:p>
-      </dgm:t>
-    </dgm:pt>
-    <dgm:pt modelId="{4A563F67-9203-4CFC-884F-B35B80BB9562}">
-      <dgm:prSet phldrT="[Text]"/>
-      <dgm:spPr/>
-      <dgm:t>
-        <a:bodyPr/>
-        <a:lstStyle/>
-        <a:p>
-          <a:r>
-            <a:rPr lang="en-US" dirty="0"/>
-            <a:t>MSE 1</a:t>
-          </a:r>
-        </a:p>
-      </dgm:t>
-    </dgm:pt>
-    <dgm:pt modelId="{DBA1F6F7-7964-4D73-9C1B-CA12BBABE492}" type="parTrans" cxnId="{402FEAED-68BC-49F3-9BAA-945BD783A250}">
-      <dgm:prSet/>
-      <dgm:spPr/>
-      <dgm:t>
-        <a:bodyPr/>
-        <a:lstStyle/>
-        <a:p>
-          <a:endParaRPr lang="en-US"/>
-        </a:p>
-      </dgm:t>
-    </dgm:pt>
-    <dgm:pt modelId="{7756EFCF-2627-48AC-B622-C1DA745BE97E}" type="sibTrans" cxnId="{402FEAED-68BC-49F3-9BAA-945BD783A250}">
-      <dgm:prSet/>
-      <dgm:spPr/>
-      <dgm:t>
-        <a:bodyPr/>
-        <a:lstStyle/>
-        <a:p>
-          <a:endParaRPr lang="en-US"/>
-        </a:p>
-      </dgm:t>
-    </dgm:pt>
-    <dgm:pt modelId="{0C5F9779-B9A6-40F4-BC7D-7CDFA01D0495}">
-      <dgm:prSet phldrT="[Text]"/>
-      <dgm:spPr/>
-      <dgm:t>
-        <a:bodyPr/>
-        <a:lstStyle/>
-        <a:p>
-          <a:r>
-            <a:rPr lang="en-US" dirty="0"/>
-            <a:t>MSE 2</a:t>
-          </a:r>
-        </a:p>
-      </dgm:t>
-    </dgm:pt>
-    <dgm:pt modelId="{C0124B2D-DFE2-40A5-BD86-C64417F59210}" type="parTrans" cxnId="{64B45CBE-70C8-4B85-B89B-C02D867AA782}">
-      <dgm:prSet/>
-      <dgm:spPr/>
-      <dgm:t>
-        <a:bodyPr/>
-        <a:lstStyle/>
-        <a:p>
-          <a:endParaRPr lang="en-US"/>
-        </a:p>
-      </dgm:t>
-    </dgm:pt>
-    <dgm:pt modelId="{8263CA6D-F1A5-44D8-A89B-42EE252F623B}" type="sibTrans" cxnId="{64B45CBE-70C8-4B85-B89B-C02D867AA782}">
-      <dgm:prSet/>
-      <dgm:spPr/>
-      <dgm:t>
-        <a:bodyPr/>
-        <a:lstStyle/>
-        <a:p>
-          <a:endParaRPr lang="en-US"/>
-        </a:p>
-      </dgm:t>
-    </dgm:pt>
-    <dgm:pt modelId="{913BD10D-747A-4DDF-AB66-D5AA2C59F2D9}">
-      <dgm:prSet phldrT="[Text]"/>
-      <dgm:spPr>
-        <a:ln>
-          <a:solidFill>
-            <a:schemeClr val="tx1"/>
-          </a:solidFill>
-        </a:ln>
-      </dgm:spPr>
-      <dgm:t>
-        <a:bodyPr/>
-        <a:lstStyle/>
-        <a:p>
-          <a:r>
-            <a:rPr lang="en-US" dirty="0"/>
-            <a:t>2025-2028 temp data incorporated from om</a:t>
-          </a:r>
-        </a:p>
-      </dgm:t>
-    </dgm:pt>
-    <dgm:pt modelId="{06D63F4F-49F4-4D87-9CB4-EE34BFC67030}" type="parTrans" cxnId="{F939D983-A71A-41ED-B398-D2F7202304D5}">
-      <dgm:prSet/>
-      <dgm:spPr/>
-      <dgm:t>
-        <a:bodyPr/>
-        <a:lstStyle/>
-        <a:p>
-          <a:endParaRPr lang="en-US"/>
-        </a:p>
-      </dgm:t>
-    </dgm:pt>
-    <dgm:pt modelId="{D4C38017-61D6-4642-A7FA-0454A1EDF910}" type="sibTrans" cxnId="{F939D983-A71A-41ED-B398-D2F7202304D5}">
-      <dgm:prSet/>
-      <dgm:spPr/>
-      <dgm:t>
-        <a:bodyPr/>
-        <a:lstStyle/>
-        <a:p>
-          <a:endParaRPr lang="en-US"/>
-        </a:p>
-      </dgm:t>
-    </dgm:pt>
-    <dgm:pt modelId="{4CC82033-3B1E-4AE5-B34E-60FBAE93B632}">
-      <dgm:prSet phldrT="[Text]"/>
-      <dgm:spPr>
-        <a:ln>
-          <a:solidFill>
-            <a:schemeClr val="tx1"/>
-          </a:solidFill>
-        </a:ln>
-      </dgm:spPr>
-      <dgm:t>
-        <a:bodyPr/>
-        <a:lstStyle/>
-        <a:p>
-          <a:r>
-            <a:rPr lang="en-US" dirty="0"/>
-            <a:t>EM projects 2028-2031 </a:t>
-          </a:r>
-        </a:p>
-      </dgm:t>
-    </dgm:pt>
-    <dgm:pt modelId="{86AA7A8E-CF2C-40ED-A5F5-3DB6CCC2A0FA}" type="parTrans" cxnId="{73213B7F-6B38-4862-A779-9B9F57765263}">
-      <dgm:prSet/>
-      <dgm:spPr/>
-      <dgm:t>
-        <a:bodyPr/>
-        <a:lstStyle/>
-        <a:p>
-          <a:endParaRPr lang="en-US"/>
-        </a:p>
-      </dgm:t>
-    </dgm:pt>
-    <dgm:pt modelId="{0B015DA9-592A-45DC-8326-0A5CB51A74CD}" type="sibTrans" cxnId="{73213B7F-6B38-4862-A779-9B9F57765263}">
-      <dgm:prSet/>
-      <dgm:spPr/>
-      <dgm:t>
-        <a:bodyPr/>
-        <a:lstStyle/>
-        <a:p>
-          <a:endParaRPr lang="en-US"/>
-        </a:p>
-      </dgm:t>
-    </dgm:pt>
-    <dgm:pt modelId="{520134A7-0FFB-4D92-BE2A-695210CB689D}">
-      <dgm:prSet/>
-      <dgm:spPr/>
-      <dgm:t>
-        <a:bodyPr/>
-        <a:lstStyle/>
-        <a:p>
-          <a:r>
-            <a:rPr lang="en-US" dirty="0"/>
-            <a:t>MSE cont.</a:t>
-          </a:r>
-        </a:p>
-      </dgm:t>
-    </dgm:pt>
-    <dgm:pt modelId="{2182CDA9-FD90-4AF0-91C4-DB684BC71FD1}" type="parTrans" cxnId="{17999F5E-E59F-4BF7-911F-3E48A997DD7C}">
-      <dgm:prSet/>
-      <dgm:spPr/>
-      <dgm:t>
-        <a:bodyPr/>
-        <a:lstStyle/>
-        <a:p>
-          <a:endParaRPr lang="en-US"/>
-        </a:p>
-      </dgm:t>
-    </dgm:pt>
-    <dgm:pt modelId="{2A22AA69-E2F8-4E2C-838B-5ED2F98AA80C}" type="sibTrans" cxnId="{17999F5E-E59F-4BF7-911F-3E48A997DD7C}">
-      <dgm:prSet/>
-      <dgm:spPr/>
-      <dgm:t>
-        <a:bodyPr/>
-        <a:lstStyle/>
-        <a:p>
-          <a:endParaRPr lang="en-US"/>
-        </a:p>
-      </dgm:t>
-    </dgm:pt>
-    <dgm:pt modelId="{EF46479C-488B-47B8-9B30-FE5827B80FF3}">
-      <dgm:prSet phldrT="[Text]"/>
-      <dgm:spPr>
-        <a:ln>
-          <a:solidFill>
-            <a:schemeClr val="tx1">
-              <a:alpha val="90000"/>
-            </a:schemeClr>
-          </a:solidFill>
-        </a:ln>
-      </dgm:spPr>
-      <dgm:t>
-        <a:bodyPr/>
-        <a:lstStyle/>
-        <a:p>
-          <a:r>
-            <a:rPr lang="en-US" dirty="0"/>
-            <a:t>2022-2025 temp data incorporated from om</a:t>
-          </a:r>
-        </a:p>
-      </dgm:t>
-    </dgm:pt>
-    <dgm:pt modelId="{162FDFC9-F12F-4509-8234-94AA8C8F2109}" type="sibTrans" cxnId="{770B6246-0B43-42AB-A0D6-58F7FA047A34}">
-      <dgm:prSet/>
-      <dgm:spPr/>
-      <dgm:t>
-        <a:bodyPr/>
-        <a:lstStyle/>
-        <a:p>
-          <a:endParaRPr lang="en-US"/>
-        </a:p>
-      </dgm:t>
-    </dgm:pt>
-    <dgm:pt modelId="{ED1F9E86-A791-4D95-BD0F-DCE69726C23A}" type="parTrans" cxnId="{770B6246-0B43-42AB-A0D6-58F7FA047A34}">
-      <dgm:prSet/>
-      <dgm:spPr/>
-      <dgm:t>
-        <a:bodyPr/>
-        <a:lstStyle/>
-        <a:p>
-          <a:endParaRPr lang="en-US"/>
-        </a:p>
-      </dgm:t>
-    </dgm:pt>
-    <dgm:pt modelId="{1EB09A3A-5B05-4277-B7F1-3D192C5F63A8}">
-      <dgm:prSet phldrT="[Text]"/>
-      <dgm:spPr>
-        <a:ln>
-          <a:solidFill>
-            <a:schemeClr val="tx1">
-              <a:alpha val="90000"/>
-            </a:schemeClr>
-          </a:solidFill>
-        </a:ln>
-      </dgm:spPr>
-      <dgm:t>
-        <a:bodyPr/>
-        <a:lstStyle/>
-        <a:p>
-          <a:r>
-            <a:rPr lang="en-US" dirty="0"/>
-            <a:t>EM projects 2025-2028</a:t>
-          </a:r>
-        </a:p>
-      </dgm:t>
-    </dgm:pt>
-    <dgm:pt modelId="{73731C78-D863-4CD5-823F-8244B21B52DB}" type="sibTrans" cxnId="{CD209D1F-B722-46A3-887C-FFA9A0746C4C}">
-      <dgm:prSet/>
-      <dgm:spPr/>
-      <dgm:t>
-        <a:bodyPr/>
-        <a:lstStyle/>
-        <a:p>
-          <a:endParaRPr lang="en-US"/>
-        </a:p>
-      </dgm:t>
-    </dgm:pt>
-    <dgm:pt modelId="{2CEA9166-F86F-41F9-AD36-821866F7C20D}" type="parTrans" cxnId="{CD209D1F-B722-46A3-887C-FFA9A0746C4C}">
-      <dgm:prSet/>
-      <dgm:spPr/>
-      <dgm:t>
-        <a:bodyPr/>
-        <a:lstStyle/>
-        <a:p>
-          <a:endParaRPr lang="en-US"/>
-        </a:p>
-      </dgm:t>
-    </dgm:pt>
-    <dgm:pt modelId="{1E3589DB-895F-4C73-A612-4E7B4BDF34E0}">
-      <dgm:prSet phldrT="[Text]"/>
-      <dgm:spPr>
-        <a:ln>
-          <a:solidFill>
-            <a:schemeClr val="tx1">
-              <a:alpha val="90000"/>
-            </a:schemeClr>
-          </a:solidFill>
-        </a:ln>
-      </dgm:spPr>
-      <dgm:t>
-        <a:bodyPr/>
-        <a:lstStyle/>
-        <a:p>
-          <a:r>
-            <a:rPr lang="en-US" dirty="0"/>
-            <a:t>EM projects 2022-2025</a:t>
-          </a:r>
-        </a:p>
-      </dgm:t>
-    </dgm:pt>
-    <dgm:pt modelId="{C2FFCF98-18B8-42C0-8317-51157E9C75B6}" type="sibTrans" cxnId="{FC3A2749-265F-48BB-8286-2A33E2187176}">
-      <dgm:prSet/>
-      <dgm:spPr/>
-      <dgm:t>
-        <a:bodyPr/>
-        <a:lstStyle/>
-        <a:p>
-          <a:endParaRPr lang="en-US"/>
-        </a:p>
-      </dgm:t>
-    </dgm:pt>
-    <dgm:pt modelId="{D3EFA1E1-B7C1-4612-B2E1-503DF3BEE957}" type="parTrans" cxnId="{FC3A2749-265F-48BB-8286-2A33E2187176}">
-      <dgm:prSet/>
-      <dgm:spPr/>
-      <dgm:t>
-        <a:bodyPr/>
-        <a:lstStyle/>
-        <a:p>
-          <a:endParaRPr lang="en-US"/>
-        </a:p>
-      </dgm:t>
-    </dgm:pt>
-    <dgm:pt modelId="{E3AF6A8D-B142-4901-900D-6CB33BC20149}">
-      <dgm:prSet/>
-      <dgm:spPr>
-        <a:ln>
-          <a:solidFill>
-            <a:schemeClr val="tx1">
-              <a:alpha val="90000"/>
-            </a:schemeClr>
-          </a:solidFill>
-        </a:ln>
-      </dgm:spPr>
-      <dgm:t>
-        <a:bodyPr/>
-        <a:lstStyle/>
-        <a:p>
-          <a:r>
-            <a:rPr lang="en-US" dirty="0"/>
-            <a:t>…</a:t>
-          </a:r>
-        </a:p>
-        <a:p>
-          <a:endParaRPr lang="en-US" dirty="0"/>
-        </a:p>
-      </dgm:t>
-    </dgm:pt>
-    <dgm:pt modelId="{BB43A68B-777B-41A5-AA0D-C21EA3E536A7}" type="parTrans" cxnId="{0E357CA8-7A8E-43B3-92DF-1B16BE1F040A}">
-      <dgm:prSet/>
-      <dgm:spPr/>
-      <dgm:t>
-        <a:bodyPr/>
-        <a:lstStyle/>
-        <a:p>
-          <a:endParaRPr lang="en-US"/>
-        </a:p>
-      </dgm:t>
-    </dgm:pt>
-    <dgm:pt modelId="{8F47D564-9C7F-431A-9677-2146DD4D5FB1}" type="sibTrans" cxnId="{0E357CA8-7A8E-43B3-92DF-1B16BE1F040A}">
-      <dgm:prSet/>
-      <dgm:spPr/>
-      <dgm:t>
-        <a:bodyPr/>
-        <a:lstStyle/>
-        <a:p>
-          <a:endParaRPr lang="en-US"/>
-        </a:p>
-      </dgm:t>
-    </dgm:pt>
-    <dgm:pt modelId="{30AC0B21-66E2-4486-8E9D-FC872FF9791D}" type="pres">
-      <dgm:prSet presAssocID="{82B7874D-9E37-4CE3-8828-594AD898F5CF}" presName="theList" presStyleCnt="0">
-        <dgm:presLayoutVars>
-          <dgm:dir/>
-          <dgm:animLvl val="lvl"/>
-          <dgm:resizeHandles val="exact"/>
-        </dgm:presLayoutVars>
-      </dgm:prSet>
-      <dgm:spPr/>
-    </dgm:pt>
-    <dgm:pt modelId="{C8CC04AC-70A6-487E-82F6-1B402B25C111}" type="pres">
-      <dgm:prSet presAssocID="{FD57A578-90C0-4F3B-BCBC-9D1ADC7CBD5B}" presName="compNode" presStyleCnt="0"/>
-      <dgm:spPr/>
-    </dgm:pt>
-    <dgm:pt modelId="{FEC3FB5A-69C6-431C-96C1-5422858F0E0D}" type="pres">
-      <dgm:prSet presAssocID="{FD57A578-90C0-4F3B-BCBC-9D1ADC7CBD5B}" presName="noGeometry" presStyleCnt="0"/>
-      <dgm:spPr/>
-    </dgm:pt>
-    <dgm:pt modelId="{9659E34C-014E-4E05-899E-B11E2A997F7E}" type="pres">
-      <dgm:prSet presAssocID="{FD57A578-90C0-4F3B-BCBC-9D1ADC7CBD5B}" presName="childTextVisible" presStyleLbl="bgAccFollowNode1" presStyleIdx="0" presStyleCnt="4">
-        <dgm:presLayoutVars>
-          <dgm:bulletEnabled val="1"/>
-        </dgm:presLayoutVars>
-      </dgm:prSet>
-      <dgm:spPr/>
-    </dgm:pt>
-    <dgm:pt modelId="{91C13853-6155-4E21-93BE-5585D9F23B2C}" type="pres">
-      <dgm:prSet presAssocID="{FD57A578-90C0-4F3B-BCBC-9D1ADC7CBD5B}" presName="childTextHidden" presStyleLbl="bgAccFollowNode1" presStyleIdx="0" presStyleCnt="4"/>
-      <dgm:spPr/>
-    </dgm:pt>
-    <dgm:pt modelId="{2878E946-785C-4CE2-9A7B-9D90A25A8B03}" type="pres">
-      <dgm:prSet presAssocID="{FD57A578-90C0-4F3B-BCBC-9D1ADC7CBD5B}" presName="parentText" presStyleLbl="node1" presStyleIdx="0" presStyleCnt="4">
-        <dgm:presLayoutVars>
-          <dgm:chMax val="1"/>
-          <dgm:bulletEnabled val="1"/>
-        </dgm:presLayoutVars>
-      </dgm:prSet>
-      <dgm:spPr/>
-    </dgm:pt>
-    <dgm:pt modelId="{2F159059-B845-405C-80FC-A3DD9CB76822}" type="pres">
-      <dgm:prSet presAssocID="{FD57A578-90C0-4F3B-BCBC-9D1ADC7CBD5B}" presName="aSpace" presStyleCnt="0"/>
-      <dgm:spPr/>
-    </dgm:pt>
-    <dgm:pt modelId="{77F89179-C5E4-4BB2-9EE1-04115A13833D}" type="pres">
-      <dgm:prSet presAssocID="{4A563F67-9203-4CFC-884F-B35B80BB9562}" presName="compNode" presStyleCnt="0"/>
-      <dgm:spPr/>
-    </dgm:pt>
-    <dgm:pt modelId="{D93815C1-8488-4344-BF8B-E5FA1853A6BE}" type="pres">
-      <dgm:prSet presAssocID="{4A563F67-9203-4CFC-884F-B35B80BB9562}" presName="noGeometry" presStyleCnt="0"/>
-      <dgm:spPr/>
-    </dgm:pt>
-    <dgm:pt modelId="{B57AC32F-04F6-4557-9B28-47EBFB8A7258}" type="pres">
-      <dgm:prSet presAssocID="{4A563F67-9203-4CFC-884F-B35B80BB9562}" presName="childTextVisible" presStyleLbl="bgAccFollowNode1" presStyleIdx="1" presStyleCnt="4">
-        <dgm:presLayoutVars>
-          <dgm:bulletEnabled val="1"/>
-        </dgm:presLayoutVars>
-      </dgm:prSet>
-      <dgm:spPr/>
-    </dgm:pt>
-    <dgm:pt modelId="{51B462FD-6A2D-43F8-B8AA-FCF0DD3F382C}" type="pres">
-      <dgm:prSet presAssocID="{4A563F67-9203-4CFC-884F-B35B80BB9562}" presName="childTextHidden" presStyleLbl="bgAccFollowNode1" presStyleIdx="1" presStyleCnt="4"/>
-      <dgm:spPr/>
-    </dgm:pt>
-    <dgm:pt modelId="{2222C918-E6F6-465A-B76A-2D94259CF0DF}" type="pres">
-      <dgm:prSet presAssocID="{4A563F67-9203-4CFC-884F-B35B80BB9562}" presName="parentText" presStyleLbl="node1" presStyleIdx="1" presStyleCnt="4">
-        <dgm:presLayoutVars>
-          <dgm:chMax val="1"/>
-          <dgm:bulletEnabled val="1"/>
-        </dgm:presLayoutVars>
-      </dgm:prSet>
-      <dgm:spPr/>
-    </dgm:pt>
-    <dgm:pt modelId="{A1F0577E-A6F9-4E52-835A-8B279C6737FD}" type="pres">
-      <dgm:prSet presAssocID="{4A563F67-9203-4CFC-884F-B35B80BB9562}" presName="aSpace" presStyleCnt="0"/>
-      <dgm:spPr/>
-    </dgm:pt>
-    <dgm:pt modelId="{F0C2F6D3-02E2-4FF9-8672-951BC20349CF}" type="pres">
-      <dgm:prSet presAssocID="{0C5F9779-B9A6-40F4-BC7D-7CDFA01D0495}" presName="compNode" presStyleCnt="0"/>
-      <dgm:spPr/>
-    </dgm:pt>
-    <dgm:pt modelId="{FE9FD98B-E4A6-42A3-98DC-EAC84A65BEEB}" type="pres">
-      <dgm:prSet presAssocID="{0C5F9779-B9A6-40F4-BC7D-7CDFA01D0495}" presName="noGeometry" presStyleCnt="0"/>
-      <dgm:spPr/>
-    </dgm:pt>
-    <dgm:pt modelId="{AC231F00-2DA0-4E04-9F01-8B922C4FB8EB}" type="pres">
-      <dgm:prSet presAssocID="{0C5F9779-B9A6-40F4-BC7D-7CDFA01D0495}" presName="childTextVisible" presStyleLbl="bgAccFollowNode1" presStyleIdx="2" presStyleCnt="4">
-        <dgm:presLayoutVars>
-          <dgm:bulletEnabled val="1"/>
-        </dgm:presLayoutVars>
-      </dgm:prSet>
-      <dgm:spPr/>
-    </dgm:pt>
-    <dgm:pt modelId="{9C9D14A7-A11E-4D4F-BAC3-31CF8C980BC4}" type="pres">
-      <dgm:prSet presAssocID="{0C5F9779-B9A6-40F4-BC7D-7CDFA01D0495}" presName="childTextHidden" presStyleLbl="bgAccFollowNode1" presStyleIdx="2" presStyleCnt="4"/>
-      <dgm:spPr/>
-    </dgm:pt>
-    <dgm:pt modelId="{787B77B4-FA4D-46B7-9BD2-D48DA2F344F1}" type="pres">
-      <dgm:prSet presAssocID="{0C5F9779-B9A6-40F4-BC7D-7CDFA01D0495}" presName="parentText" presStyleLbl="node1" presStyleIdx="2" presStyleCnt="4">
-        <dgm:presLayoutVars>
-          <dgm:chMax val="1"/>
-          <dgm:bulletEnabled val="1"/>
-        </dgm:presLayoutVars>
-      </dgm:prSet>
-      <dgm:spPr/>
-    </dgm:pt>
-    <dgm:pt modelId="{CDCBAA26-2AF4-4B22-9362-E6AC06153049}" type="pres">
-      <dgm:prSet presAssocID="{0C5F9779-B9A6-40F4-BC7D-7CDFA01D0495}" presName="aSpace" presStyleCnt="0"/>
-      <dgm:spPr/>
-    </dgm:pt>
-    <dgm:pt modelId="{AE78EFD4-E0ED-4E63-9E70-E43E9964555A}" type="pres">
-      <dgm:prSet presAssocID="{520134A7-0FFB-4D92-BE2A-695210CB689D}" presName="compNode" presStyleCnt="0"/>
-      <dgm:spPr/>
-    </dgm:pt>
-    <dgm:pt modelId="{C1C9940F-9F79-4338-9539-E46BA4C4E877}" type="pres">
-      <dgm:prSet presAssocID="{520134A7-0FFB-4D92-BE2A-695210CB689D}" presName="noGeometry" presStyleCnt="0"/>
-      <dgm:spPr/>
-    </dgm:pt>
-    <dgm:pt modelId="{BA691BD7-0B2E-491B-BF6E-B2EF993E279C}" type="pres">
-      <dgm:prSet presAssocID="{520134A7-0FFB-4D92-BE2A-695210CB689D}" presName="childTextVisible" presStyleLbl="bgAccFollowNode1" presStyleIdx="3" presStyleCnt="4">
-        <dgm:presLayoutVars>
-          <dgm:bulletEnabled val="1"/>
-        </dgm:presLayoutVars>
-      </dgm:prSet>
-      <dgm:spPr/>
-    </dgm:pt>
-    <dgm:pt modelId="{31716BC5-9859-4616-AD20-817238C74963}" type="pres">
-      <dgm:prSet presAssocID="{520134A7-0FFB-4D92-BE2A-695210CB689D}" presName="childTextHidden" presStyleLbl="bgAccFollowNode1" presStyleIdx="3" presStyleCnt="4"/>
-      <dgm:spPr/>
-    </dgm:pt>
-    <dgm:pt modelId="{68391720-4408-4595-A0AD-FE441A1E3937}" type="pres">
-      <dgm:prSet presAssocID="{520134A7-0FFB-4D92-BE2A-695210CB689D}" presName="parentText" presStyleLbl="node1" presStyleIdx="3" presStyleCnt="4">
-        <dgm:presLayoutVars>
-          <dgm:chMax val="1"/>
-          <dgm:bulletEnabled val="1"/>
-        </dgm:presLayoutVars>
-      </dgm:prSet>
-      <dgm:spPr/>
-    </dgm:pt>
-  </dgm:ptLst>
-  <dgm:cxnLst>
-    <dgm:cxn modelId="{2F1AFD08-5E90-4225-A784-09F58307A234}" type="presOf" srcId="{1EB09A3A-5B05-4277-B7F1-3D192C5F63A8}" destId="{51B462FD-6A2D-43F8-B8AA-FCF0DD3F382C}" srcOrd="1" destOrd="1" presId="urn:microsoft.com/office/officeart/2005/8/layout/hProcess6"/>
-    <dgm:cxn modelId="{B9DE8909-77E0-4FA7-A797-D523C2610DE2}" type="presOf" srcId="{4CC82033-3B1E-4AE5-B34E-60FBAE93B632}" destId="{9C9D14A7-A11E-4D4F-BAC3-31CF8C980BC4}" srcOrd="1" destOrd="1" presId="urn:microsoft.com/office/officeart/2005/8/layout/hProcess6"/>
-    <dgm:cxn modelId="{66B6271E-50E4-4975-A8A3-0403D1E29A0D}" type="presOf" srcId="{0C5F9779-B9A6-40F4-BC7D-7CDFA01D0495}" destId="{787B77B4-FA4D-46B7-9BD2-D48DA2F344F1}" srcOrd="0" destOrd="0" presId="urn:microsoft.com/office/officeart/2005/8/layout/hProcess6"/>
-    <dgm:cxn modelId="{CD209D1F-B722-46A3-887C-FFA9A0746C4C}" srcId="{4A563F67-9203-4CFC-884F-B35B80BB9562}" destId="{1EB09A3A-5B05-4277-B7F1-3D192C5F63A8}" srcOrd="1" destOrd="0" parTransId="{2CEA9166-F86F-41F9-AD36-821866F7C20D}" sibTransId="{73731C78-D863-4CD5-823F-8244B21B52DB}"/>
-    <dgm:cxn modelId="{AB48C225-5835-46CE-9B5A-FC5A47D19A2C}" type="presOf" srcId="{913BD10D-747A-4DDF-AB66-D5AA2C59F2D9}" destId="{AC231F00-2DA0-4E04-9F01-8B922C4FB8EB}" srcOrd="0" destOrd="0" presId="urn:microsoft.com/office/officeart/2005/8/layout/hProcess6"/>
-    <dgm:cxn modelId="{603D4626-1D68-48FE-BD8C-BA05819E0F36}" type="presOf" srcId="{EF46479C-488B-47B8-9B30-FE5827B80FF3}" destId="{B57AC32F-04F6-4557-9B28-47EBFB8A7258}" srcOrd="0" destOrd="0" presId="urn:microsoft.com/office/officeart/2005/8/layout/hProcess6"/>
-    <dgm:cxn modelId="{95A45927-7198-43D3-894E-F225DD35A2AD}" srcId="{FD57A578-90C0-4F3B-BCBC-9D1ADC7CBD5B}" destId="{DE7CA0C9-07FF-46D6-B635-EBF35E30530F}" srcOrd="0" destOrd="0" parTransId="{7A5824F7-5AEB-418D-A9E9-53D3122AED99}" sibTransId="{E76932AB-C58E-41BA-980F-DCB78AF0380E}"/>
-    <dgm:cxn modelId="{43BCEA29-87D5-4BDC-A016-9440105AEA21}" type="presOf" srcId="{1EB09A3A-5B05-4277-B7F1-3D192C5F63A8}" destId="{B57AC32F-04F6-4557-9B28-47EBFB8A7258}" srcOrd="0" destOrd="1" presId="urn:microsoft.com/office/officeart/2005/8/layout/hProcess6"/>
-    <dgm:cxn modelId="{9CD33E33-F4D1-44E8-B894-2F6DF8BEB002}" type="presOf" srcId="{EF46479C-488B-47B8-9B30-FE5827B80FF3}" destId="{51B462FD-6A2D-43F8-B8AA-FCF0DD3F382C}" srcOrd="1" destOrd="0" presId="urn:microsoft.com/office/officeart/2005/8/layout/hProcess6"/>
-    <dgm:cxn modelId="{17999F5E-E59F-4BF7-911F-3E48A997DD7C}" srcId="{82B7874D-9E37-4CE3-8828-594AD898F5CF}" destId="{520134A7-0FFB-4D92-BE2A-695210CB689D}" srcOrd="3" destOrd="0" parTransId="{2182CDA9-FD90-4AF0-91C4-DB684BC71FD1}" sibTransId="{2A22AA69-E2F8-4E2C-838B-5ED2F98AA80C}"/>
-    <dgm:cxn modelId="{0107E560-898E-4096-BB25-BCE7B1642067}" type="presOf" srcId="{FD57A578-90C0-4F3B-BCBC-9D1ADC7CBD5B}" destId="{2878E946-785C-4CE2-9A7B-9D90A25A8B03}" srcOrd="0" destOrd="0" presId="urn:microsoft.com/office/officeart/2005/8/layout/hProcess6"/>
-    <dgm:cxn modelId="{770B6246-0B43-42AB-A0D6-58F7FA047A34}" srcId="{4A563F67-9203-4CFC-884F-B35B80BB9562}" destId="{EF46479C-488B-47B8-9B30-FE5827B80FF3}" srcOrd="0" destOrd="0" parTransId="{ED1F9E86-A791-4D95-BD0F-DCE69726C23A}" sibTransId="{162FDFC9-F12F-4509-8234-94AA8C8F2109}"/>
-    <dgm:cxn modelId="{57CCBB67-0592-4E21-B654-E9712A62C91D}" srcId="{82B7874D-9E37-4CE3-8828-594AD898F5CF}" destId="{FD57A578-90C0-4F3B-BCBC-9D1ADC7CBD5B}" srcOrd="0" destOrd="0" parTransId="{FE589BA0-A86E-4A08-A4FC-CF50BE036805}" sibTransId="{FAB6C6B4-6A06-449D-B6E7-C33E9A778528}"/>
-    <dgm:cxn modelId="{FC3A2749-265F-48BB-8286-2A33E2187176}" srcId="{FD57A578-90C0-4F3B-BCBC-9D1ADC7CBD5B}" destId="{1E3589DB-895F-4C73-A612-4E7B4BDF34E0}" srcOrd="1" destOrd="0" parTransId="{D3EFA1E1-B7C1-4612-B2E1-503DF3BEE957}" sibTransId="{C2FFCF98-18B8-42C0-8317-51157E9C75B6}"/>
-    <dgm:cxn modelId="{85D7CC50-7ECC-4990-8DA6-EF43F506ED05}" type="presOf" srcId="{E3AF6A8D-B142-4901-900D-6CB33BC20149}" destId="{31716BC5-9859-4616-AD20-817238C74963}" srcOrd="1" destOrd="0" presId="urn:microsoft.com/office/officeart/2005/8/layout/hProcess6"/>
-    <dgm:cxn modelId="{73213B7F-6B38-4862-A779-9B9F57765263}" srcId="{0C5F9779-B9A6-40F4-BC7D-7CDFA01D0495}" destId="{4CC82033-3B1E-4AE5-B34E-60FBAE93B632}" srcOrd="1" destOrd="0" parTransId="{86AA7A8E-CF2C-40ED-A5F5-3DB6CCC2A0FA}" sibTransId="{0B015DA9-592A-45DC-8326-0A5CB51A74CD}"/>
-    <dgm:cxn modelId="{F939D983-A71A-41ED-B398-D2F7202304D5}" srcId="{0C5F9779-B9A6-40F4-BC7D-7CDFA01D0495}" destId="{913BD10D-747A-4DDF-AB66-D5AA2C59F2D9}" srcOrd="0" destOrd="0" parTransId="{06D63F4F-49F4-4D87-9CB4-EE34BFC67030}" sibTransId="{D4C38017-61D6-4642-A7FA-0454A1EDF910}"/>
-    <dgm:cxn modelId="{F79AFE98-4042-46B5-8937-D13CBABFB22D}" type="presOf" srcId="{1E3589DB-895F-4C73-A612-4E7B4BDF34E0}" destId="{91C13853-6155-4E21-93BE-5585D9F23B2C}" srcOrd="1" destOrd="1" presId="urn:microsoft.com/office/officeart/2005/8/layout/hProcess6"/>
-    <dgm:cxn modelId="{DFBDB5A1-097F-49C2-A7E6-DF4EC20E313B}" type="presOf" srcId="{4CC82033-3B1E-4AE5-B34E-60FBAE93B632}" destId="{AC231F00-2DA0-4E04-9F01-8B922C4FB8EB}" srcOrd="0" destOrd="1" presId="urn:microsoft.com/office/officeart/2005/8/layout/hProcess6"/>
-    <dgm:cxn modelId="{CBA3BDA6-38FE-4F69-AE86-11240606CE7B}" type="presOf" srcId="{DE7CA0C9-07FF-46D6-B635-EBF35E30530F}" destId="{9659E34C-014E-4E05-899E-B11E2A997F7E}" srcOrd="0" destOrd="0" presId="urn:microsoft.com/office/officeart/2005/8/layout/hProcess6"/>
-    <dgm:cxn modelId="{0E357CA8-7A8E-43B3-92DF-1B16BE1F040A}" srcId="{520134A7-0FFB-4D92-BE2A-695210CB689D}" destId="{E3AF6A8D-B142-4901-900D-6CB33BC20149}" srcOrd="0" destOrd="0" parTransId="{BB43A68B-777B-41A5-AA0D-C21EA3E536A7}" sibTransId="{8F47D564-9C7F-431A-9677-2146DD4D5FB1}"/>
-    <dgm:cxn modelId="{0FB935B3-3699-4C4D-BAB3-8CD2EFAF1695}" type="presOf" srcId="{82B7874D-9E37-4CE3-8828-594AD898F5CF}" destId="{30AC0B21-66E2-4486-8E9D-FC872FF9791D}" srcOrd="0" destOrd="0" presId="urn:microsoft.com/office/officeart/2005/8/layout/hProcess6"/>
-    <dgm:cxn modelId="{36553FB6-24CB-4C8C-85A8-9245C4DEEE33}" type="presOf" srcId="{520134A7-0FFB-4D92-BE2A-695210CB689D}" destId="{68391720-4408-4595-A0AD-FE441A1E3937}" srcOrd="0" destOrd="0" presId="urn:microsoft.com/office/officeart/2005/8/layout/hProcess6"/>
-    <dgm:cxn modelId="{64B45CBE-70C8-4B85-B89B-C02D867AA782}" srcId="{82B7874D-9E37-4CE3-8828-594AD898F5CF}" destId="{0C5F9779-B9A6-40F4-BC7D-7CDFA01D0495}" srcOrd="2" destOrd="0" parTransId="{C0124B2D-DFE2-40A5-BD86-C64417F59210}" sibTransId="{8263CA6D-F1A5-44D8-A89B-42EE252F623B}"/>
-    <dgm:cxn modelId="{A6DFB8CA-FD2B-423C-A099-F85C4B641911}" type="presOf" srcId="{E3AF6A8D-B142-4901-900D-6CB33BC20149}" destId="{BA691BD7-0B2E-491B-BF6E-B2EF993E279C}" srcOrd="0" destOrd="0" presId="urn:microsoft.com/office/officeart/2005/8/layout/hProcess6"/>
-    <dgm:cxn modelId="{A1ECF8D1-30E9-4119-8160-86BAC709770D}" type="presOf" srcId="{DE7CA0C9-07FF-46D6-B635-EBF35E30530F}" destId="{91C13853-6155-4E21-93BE-5585D9F23B2C}" srcOrd="1" destOrd="0" presId="urn:microsoft.com/office/officeart/2005/8/layout/hProcess6"/>
-    <dgm:cxn modelId="{ECDFFFD3-8A2A-4B9C-844F-C82C8CA1A99F}" type="presOf" srcId="{4A563F67-9203-4CFC-884F-B35B80BB9562}" destId="{2222C918-E6F6-465A-B76A-2D94259CF0DF}" srcOrd="0" destOrd="0" presId="urn:microsoft.com/office/officeart/2005/8/layout/hProcess6"/>
-    <dgm:cxn modelId="{3C54C7DC-CFA8-4387-8810-378801F0D354}" type="presOf" srcId="{1E3589DB-895F-4C73-A612-4E7B4BDF34E0}" destId="{9659E34C-014E-4E05-899E-B11E2A997F7E}" srcOrd="0" destOrd="1" presId="urn:microsoft.com/office/officeart/2005/8/layout/hProcess6"/>
-    <dgm:cxn modelId="{8E132CE0-2DC7-4B15-A028-CEAC18988C80}" type="presOf" srcId="{913BD10D-747A-4DDF-AB66-D5AA2C59F2D9}" destId="{9C9D14A7-A11E-4D4F-BAC3-31CF8C980BC4}" srcOrd="1" destOrd="0" presId="urn:microsoft.com/office/officeart/2005/8/layout/hProcess6"/>
-    <dgm:cxn modelId="{402FEAED-68BC-49F3-9BAA-945BD783A250}" srcId="{82B7874D-9E37-4CE3-8828-594AD898F5CF}" destId="{4A563F67-9203-4CFC-884F-B35B80BB9562}" srcOrd="1" destOrd="0" parTransId="{DBA1F6F7-7964-4D73-9C1B-CA12BBABE492}" sibTransId="{7756EFCF-2627-48AC-B622-C1DA745BE97E}"/>
-    <dgm:cxn modelId="{C4026794-1CCB-4AD2-9664-A56687E2416C}" type="presParOf" srcId="{30AC0B21-66E2-4486-8E9D-FC872FF9791D}" destId="{C8CC04AC-70A6-487E-82F6-1B402B25C111}" srcOrd="0" destOrd="0" presId="urn:microsoft.com/office/officeart/2005/8/layout/hProcess6"/>
-    <dgm:cxn modelId="{881DD29D-F4C9-4CD4-9F76-164F089C265B}" type="presParOf" srcId="{C8CC04AC-70A6-487E-82F6-1B402B25C111}" destId="{FEC3FB5A-69C6-431C-96C1-5422858F0E0D}" srcOrd="0" destOrd="0" presId="urn:microsoft.com/office/officeart/2005/8/layout/hProcess6"/>
-    <dgm:cxn modelId="{1DD74BC4-71FD-473C-A7A0-58943F2FFF99}" type="presParOf" srcId="{C8CC04AC-70A6-487E-82F6-1B402B25C111}" destId="{9659E34C-014E-4E05-899E-B11E2A997F7E}" srcOrd="1" destOrd="0" presId="urn:microsoft.com/office/officeart/2005/8/layout/hProcess6"/>
-    <dgm:cxn modelId="{B843936E-0671-4520-8C6E-97AAC39A63C0}" type="presParOf" srcId="{C8CC04AC-70A6-487E-82F6-1B402B25C111}" destId="{91C13853-6155-4E21-93BE-5585D9F23B2C}" srcOrd="2" destOrd="0" presId="urn:microsoft.com/office/officeart/2005/8/layout/hProcess6"/>
-    <dgm:cxn modelId="{843541F5-F0BE-4BBC-8C87-A9381FC3A659}" type="presParOf" srcId="{C8CC04AC-70A6-487E-82F6-1B402B25C111}" destId="{2878E946-785C-4CE2-9A7B-9D90A25A8B03}" srcOrd="3" destOrd="0" presId="urn:microsoft.com/office/officeart/2005/8/layout/hProcess6"/>
-    <dgm:cxn modelId="{F3C63E59-7789-4D7D-8184-DF71CFB2898B}" type="presParOf" srcId="{30AC0B21-66E2-4486-8E9D-FC872FF9791D}" destId="{2F159059-B845-405C-80FC-A3DD9CB76822}" srcOrd="1" destOrd="0" presId="urn:microsoft.com/office/officeart/2005/8/layout/hProcess6"/>
-    <dgm:cxn modelId="{C005C343-6DA9-4708-9055-E9F7CC3B14D4}" type="presParOf" srcId="{30AC0B21-66E2-4486-8E9D-FC872FF9791D}" destId="{77F89179-C5E4-4BB2-9EE1-04115A13833D}" srcOrd="2" destOrd="0" presId="urn:microsoft.com/office/officeart/2005/8/layout/hProcess6"/>
-    <dgm:cxn modelId="{0AA020E5-B40F-4D5A-93BB-435826E14DAA}" type="presParOf" srcId="{77F89179-C5E4-4BB2-9EE1-04115A13833D}" destId="{D93815C1-8488-4344-BF8B-E5FA1853A6BE}" srcOrd="0" destOrd="0" presId="urn:microsoft.com/office/officeart/2005/8/layout/hProcess6"/>
-    <dgm:cxn modelId="{A4EB5C7E-C517-4093-9CCB-64734FF400C9}" type="presParOf" srcId="{77F89179-C5E4-4BB2-9EE1-04115A13833D}" destId="{B57AC32F-04F6-4557-9B28-47EBFB8A7258}" srcOrd="1" destOrd="0" presId="urn:microsoft.com/office/officeart/2005/8/layout/hProcess6"/>
-    <dgm:cxn modelId="{BB8C71EF-575B-4BBB-AFAA-1EDACEE92910}" type="presParOf" srcId="{77F89179-C5E4-4BB2-9EE1-04115A13833D}" destId="{51B462FD-6A2D-43F8-B8AA-FCF0DD3F382C}" srcOrd="2" destOrd="0" presId="urn:microsoft.com/office/officeart/2005/8/layout/hProcess6"/>
-    <dgm:cxn modelId="{941A62C3-93CE-4ED8-AF13-2A0ABE38EEE8}" type="presParOf" srcId="{77F89179-C5E4-4BB2-9EE1-04115A13833D}" destId="{2222C918-E6F6-465A-B76A-2D94259CF0DF}" srcOrd="3" destOrd="0" presId="urn:microsoft.com/office/officeart/2005/8/layout/hProcess6"/>
-    <dgm:cxn modelId="{F3012CB1-D917-4907-9AD7-A65F67083EA0}" type="presParOf" srcId="{30AC0B21-66E2-4486-8E9D-FC872FF9791D}" destId="{A1F0577E-A6F9-4E52-835A-8B279C6737FD}" srcOrd="3" destOrd="0" presId="urn:microsoft.com/office/officeart/2005/8/layout/hProcess6"/>
-    <dgm:cxn modelId="{C4FB8DD5-4452-47C6-AF49-77358BDC2A2C}" type="presParOf" srcId="{30AC0B21-66E2-4486-8E9D-FC872FF9791D}" destId="{F0C2F6D3-02E2-4FF9-8672-951BC20349CF}" srcOrd="4" destOrd="0" presId="urn:microsoft.com/office/officeart/2005/8/layout/hProcess6"/>
-    <dgm:cxn modelId="{446D5799-2AB9-4AB7-A603-38C0AAF2A8A3}" type="presParOf" srcId="{F0C2F6D3-02E2-4FF9-8672-951BC20349CF}" destId="{FE9FD98B-E4A6-42A3-98DC-EAC84A65BEEB}" srcOrd="0" destOrd="0" presId="urn:microsoft.com/office/officeart/2005/8/layout/hProcess6"/>
-    <dgm:cxn modelId="{F1D90962-62D6-48F8-A955-6E26E561ABC0}" type="presParOf" srcId="{F0C2F6D3-02E2-4FF9-8672-951BC20349CF}" destId="{AC231F00-2DA0-4E04-9F01-8B922C4FB8EB}" srcOrd="1" destOrd="0" presId="urn:microsoft.com/office/officeart/2005/8/layout/hProcess6"/>
-    <dgm:cxn modelId="{47695474-AD6C-4F8C-A4BA-55050456D6B8}" type="presParOf" srcId="{F0C2F6D3-02E2-4FF9-8672-951BC20349CF}" destId="{9C9D14A7-A11E-4D4F-BAC3-31CF8C980BC4}" srcOrd="2" destOrd="0" presId="urn:microsoft.com/office/officeart/2005/8/layout/hProcess6"/>
-    <dgm:cxn modelId="{ACCF9B90-22F1-4956-B112-83E71876B617}" type="presParOf" srcId="{F0C2F6D3-02E2-4FF9-8672-951BC20349CF}" destId="{787B77B4-FA4D-46B7-9BD2-D48DA2F344F1}" srcOrd="3" destOrd="0" presId="urn:microsoft.com/office/officeart/2005/8/layout/hProcess6"/>
-    <dgm:cxn modelId="{E78E7CFE-3A89-43A2-AEED-DE5BB23C9BC3}" type="presParOf" srcId="{30AC0B21-66E2-4486-8E9D-FC872FF9791D}" destId="{CDCBAA26-2AF4-4B22-9362-E6AC06153049}" srcOrd="5" destOrd="0" presId="urn:microsoft.com/office/officeart/2005/8/layout/hProcess6"/>
-    <dgm:cxn modelId="{F7A72CC3-4100-46D1-BEB3-B3761B2A9D23}" type="presParOf" srcId="{30AC0B21-66E2-4486-8E9D-FC872FF9791D}" destId="{AE78EFD4-E0ED-4E63-9E70-E43E9964555A}" srcOrd="6" destOrd="0" presId="urn:microsoft.com/office/officeart/2005/8/layout/hProcess6"/>
-    <dgm:cxn modelId="{584FCF86-2B85-4F2F-B315-74D293B0F5B9}" type="presParOf" srcId="{AE78EFD4-E0ED-4E63-9E70-E43E9964555A}" destId="{C1C9940F-9F79-4338-9539-E46BA4C4E877}" srcOrd="0" destOrd="0" presId="urn:microsoft.com/office/officeart/2005/8/layout/hProcess6"/>
-    <dgm:cxn modelId="{1D4BE041-7576-4998-917B-C99385D7880B}" type="presParOf" srcId="{AE78EFD4-E0ED-4E63-9E70-E43E9964555A}" destId="{BA691BD7-0B2E-491B-BF6E-B2EF993E279C}" srcOrd="1" destOrd="0" presId="urn:microsoft.com/office/officeart/2005/8/layout/hProcess6"/>
-    <dgm:cxn modelId="{C2684FE7-EF21-4124-9A5E-65AFFA438A5E}" type="presParOf" srcId="{AE78EFD4-E0ED-4E63-9E70-E43E9964555A}" destId="{31716BC5-9859-4616-AD20-817238C74963}" srcOrd="2" destOrd="0" presId="urn:microsoft.com/office/officeart/2005/8/layout/hProcess6"/>
-    <dgm:cxn modelId="{DA874351-0997-45B8-B5F4-57DBE34350BC}" type="presParOf" srcId="{AE78EFD4-E0ED-4E63-9E70-E43E9964555A}" destId="{68391720-4408-4595-A0AD-FE441A1E3937}" srcOrd="3" destOrd="0" presId="urn:microsoft.com/office/officeart/2005/8/layout/hProcess6"/>
-  </dgm:cxnLst>
-  <dgm:bg/>
-  <dgm:whole/>
-  <dgm:extLst>
-    <a:ext uri="http://schemas.microsoft.com/office/drawing/2008/diagram">
-      <dsp:dataModelExt xmlns:dsp="http://schemas.microsoft.com/office/drawing/2008/diagram" relId="rId9" minVer="http://schemas.openxmlformats.org/drawingml/2006/diagram"/>
-    </a:ext>
-  </dgm:extLst>
-</dgm:dataModel>
-</file>
-
-<file path=ppt/diagrams/drawing1.xml><?xml version="1.0" encoding="utf-8"?>
-<dsp:drawing xmlns:dgm="http://schemas.openxmlformats.org/drawingml/2006/diagram" xmlns:dsp="http://schemas.microsoft.com/office/drawing/2008/diagram" xmlns:a="http://schemas.openxmlformats.org/drawingml/2006/main">
-  <dsp:spTree>
-    <dsp:nvGrpSpPr>
-      <dsp:cNvPr id="0" name=""/>
-      <dsp:cNvGrpSpPr/>
-    </dsp:nvGrpSpPr>
-    <dsp:grpSpPr/>
-    <dsp:sp modelId="{9659E34C-014E-4E05-899E-B11E2A997F7E}">
-      <dsp:nvSpPr>
-        <dsp:cNvPr id="0" name=""/>
-        <dsp:cNvSpPr/>
-      </dsp:nvSpPr>
-      <dsp:spPr>
-        <a:xfrm>
-          <a:off x="1351717" y="1674700"/>
-          <a:ext cx="5351240" cy="4677657"/>
-        </a:xfrm>
-        <a:prstGeom prst="rightArrow">
-          <a:avLst>
-            <a:gd name="adj1" fmla="val 70000"/>
-            <a:gd name="adj2" fmla="val 50000"/>
-          </a:avLst>
-        </a:prstGeom>
-        <a:solidFill>
-          <a:schemeClr val="accent5">
-            <a:tint val="40000"/>
-            <a:alpha val="90000"/>
-            <a:hueOff val="0"/>
-            <a:satOff val="0"/>
-            <a:lumOff val="0"/>
-            <a:alphaOff val="0"/>
-          </a:schemeClr>
-        </a:solidFill>
-        <a:ln w="25400" cap="flat" cmpd="sng" algn="ctr">
-          <a:solidFill>
-            <a:schemeClr val="tx1">
-              <a:alpha val="90000"/>
-            </a:schemeClr>
-          </a:solidFill>
-          <a:prstDash val="solid"/>
-        </a:ln>
-        <a:effectLst/>
-      </dsp:spPr>
-      <dsp:style>
-        <a:lnRef idx="2">
-          <a:scrgbClr r="0" g="0" b="0"/>
-        </a:lnRef>
-        <a:fillRef idx="1">
-          <a:scrgbClr r="0" g="0" b="0"/>
-        </a:fillRef>
-        <a:effectRef idx="0">
-          <a:scrgbClr r="0" g="0" b="0"/>
-        </a:effectRef>
-        <a:fontRef idx="minor"/>
-      </dsp:style>
-      <dsp:txBody>
-        <a:bodyPr spcFirstLastPara="0" vert="horz" wrap="square" lIns="78740" tIns="19685" rIns="39370" bIns="19685" numCol="1" spcCol="1270" anchor="ctr" anchorCtr="0">
-          <a:noAutofit/>
-        </a:bodyPr>
-        <a:lstStyle/>
-        <a:p>
-          <a:pPr marL="285750" lvl="1" indent="-285750" algn="l" defTabSz="1377950">
-            <a:lnSpc>
-              <a:spcPct val="90000"/>
-            </a:lnSpc>
-            <a:spcBef>
-              <a:spcPct val="0"/>
-            </a:spcBef>
-            <a:spcAft>
-              <a:spcPct val="15000"/>
-            </a:spcAft>
-            <a:buChar char="•"/>
-          </a:pPr>
-          <a:r>
-            <a:rPr lang="en-US" sz="3100" kern="1200" dirty="0"/>
-            <a:t>Historical temp data incorporated from om</a:t>
-          </a:r>
-        </a:p>
-        <a:p>
-          <a:pPr marL="285750" lvl="1" indent="-285750" algn="l" defTabSz="1377950">
-            <a:lnSpc>
-              <a:spcPct val="90000"/>
-            </a:lnSpc>
-            <a:spcBef>
-              <a:spcPct val="0"/>
-            </a:spcBef>
-            <a:spcAft>
-              <a:spcPct val="15000"/>
-            </a:spcAft>
-            <a:buChar char="•"/>
-          </a:pPr>
-          <a:r>
-            <a:rPr lang="en-US" sz="3100" kern="1200" dirty="0"/>
-            <a:t>EM projects 2022-2025</a:t>
-          </a:r>
-        </a:p>
-      </dsp:txBody>
-      <dsp:txXfrm>
-        <a:off x="2689527" y="2376349"/>
-        <a:ext cx="2608730" cy="3274359"/>
-      </dsp:txXfrm>
-    </dsp:sp>
-    <dsp:sp modelId="{2878E946-785C-4CE2-9A7B-9D90A25A8B03}">
-      <dsp:nvSpPr>
-        <dsp:cNvPr id="0" name=""/>
-        <dsp:cNvSpPr/>
-      </dsp:nvSpPr>
-      <dsp:spPr>
-        <a:xfrm>
-          <a:off x="13907" y="2675718"/>
-          <a:ext cx="2675620" cy="2675620"/>
-        </a:xfrm>
-        <a:prstGeom prst="ellipse">
-          <a:avLst/>
-        </a:prstGeom>
-        <a:solidFill>
-          <a:schemeClr val="accent5">
-            <a:hueOff val="0"/>
-            <a:satOff val="0"/>
-            <a:lumOff val="0"/>
-            <a:alphaOff val="0"/>
-          </a:schemeClr>
-        </a:solidFill>
-        <a:ln w="25400" cap="flat" cmpd="sng" algn="ctr">
-          <a:solidFill>
-            <a:schemeClr val="lt1">
-              <a:hueOff val="0"/>
-              <a:satOff val="0"/>
-              <a:lumOff val="0"/>
-              <a:alphaOff val="0"/>
-            </a:schemeClr>
-          </a:solidFill>
-          <a:prstDash val="solid"/>
-        </a:ln>
-        <a:effectLst/>
-      </dsp:spPr>
-      <dsp:style>
-        <a:lnRef idx="2">
-          <a:scrgbClr r="0" g="0" b="0"/>
-        </a:lnRef>
-        <a:fillRef idx="1">
-          <a:scrgbClr r="0" g="0" b="0"/>
-        </a:fillRef>
-        <a:effectRef idx="0">
-          <a:scrgbClr r="0" g="0" b="0"/>
-        </a:effectRef>
-        <a:fontRef idx="minor">
-          <a:schemeClr val="lt1"/>
-        </a:fontRef>
-      </dsp:style>
-      <dsp:txBody>
-        <a:bodyPr spcFirstLastPara="0" vert="horz" wrap="square" lIns="41275" tIns="41275" rIns="41275" bIns="41275" numCol="1" spcCol="1270" anchor="ctr" anchorCtr="0">
-          <a:noAutofit/>
-        </a:bodyPr>
-        <a:lstStyle/>
-        <a:p>
-          <a:pPr marL="0" lvl="0" indent="0" algn="ctr" defTabSz="2889250">
-            <a:lnSpc>
-              <a:spcPct val="90000"/>
-            </a:lnSpc>
-            <a:spcBef>
-              <a:spcPct val="0"/>
-            </a:spcBef>
-            <a:spcAft>
-              <a:spcPct val="35000"/>
-            </a:spcAft>
-            <a:buNone/>
-          </a:pPr>
-          <a:r>
-            <a:rPr lang="en-US" sz="6500" kern="1200" dirty="0"/>
-            <a:t>MSE 0</a:t>
-          </a:r>
-        </a:p>
-      </dsp:txBody>
-      <dsp:txXfrm>
-        <a:off x="405742" y="3067553"/>
-        <a:ext cx="1891950" cy="1891950"/>
-      </dsp:txXfrm>
-    </dsp:sp>
-    <dsp:sp modelId="{B57AC32F-04F6-4557-9B28-47EBFB8A7258}">
-      <dsp:nvSpPr>
-        <dsp:cNvPr id="0" name=""/>
-        <dsp:cNvSpPr/>
-      </dsp:nvSpPr>
-      <dsp:spPr>
-        <a:xfrm>
-          <a:off x="8375220" y="1674700"/>
-          <a:ext cx="5351240" cy="4677657"/>
-        </a:xfrm>
-        <a:prstGeom prst="rightArrow">
-          <a:avLst>
-            <a:gd name="adj1" fmla="val 70000"/>
-            <a:gd name="adj2" fmla="val 50000"/>
-          </a:avLst>
-        </a:prstGeom>
-        <a:solidFill>
-          <a:schemeClr val="accent5">
-            <a:tint val="40000"/>
-            <a:alpha val="90000"/>
-            <a:hueOff val="-637670"/>
-            <a:satOff val="7732"/>
-            <a:lumOff val="-1770"/>
-            <a:alphaOff val="0"/>
-          </a:schemeClr>
-        </a:solidFill>
-        <a:ln w="25400" cap="flat" cmpd="sng" algn="ctr">
-          <a:solidFill>
-            <a:schemeClr val="tx1">
-              <a:alpha val="90000"/>
-            </a:schemeClr>
-          </a:solidFill>
-          <a:prstDash val="solid"/>
-        </a:ln>
-        <a:effectLst/>
-      </dsp:spPr>
-      <dsp:style>
-        <a:lnRef idx="2">
-          <a:scrgbClr r="0" g="0" b="0"/>
-        </a:lnRef>
-        <a:fillRef idx="1">
-          <a:scrgbClr r="0" g="0" b="0"/>
-        </a:fillRef>
-        <a:effectRef idx="0">
-          <a:scrgbClr r="0" g="0" b="0"/>
-        </a:effectRef>
-        <a:fontRef idx="minor"/>
-      </dsp:style>
-      <dsp:txBody>
-        <a:bodyPr spcFirstLastPara="0" vert="horz" wrap="square" lIns="78740" tIns="19685" rIns="39370" bIns="19685" numCol="1" spcCol="1270" anchor="ctr" anchorCtr="0">
-          <a:noAutofit/>
-        </a:bodyPr>
-        <a:lstStyle/>
-        <a:p>
-          <a:pPr marL="285750" lvl="1" indent="-285750" algn="l" defTabSz="1377950">
-            <a:lnSpc>
-              <a:spcPct val="90000"/>
-            </a:lnSpc>
-            <a:spcBef>
-              <a:spcPct val="0"/>
-            </a:spcBef>
-            <a:spcAft>
-              <a:spcPct val="15000"/>
-            </a:spcAft>
-            <a:buChar char="•"/>
-          </a:pPr>
-          <a:r>
-            <a:rPr lang="en-US" sz="3100" kern="1200" dirty="0"/>
-            <a:t>2022-2025 temp data incorporated from om</a:t>
-          </a:r>
-        </a:p>
-        <a:p>
-          <a:pPr marL="285750" lvl="1" indent="-285750" algn="l" defTabSz="1377950">
-            <a:lnSpc>
-              <a:spcPct val="90000"/>
-            </a:lnSpc>
-            <a:spcBef>
-              <a:spcPct val="0"/>
-            </a:spcBef>
-            <a:spcAft>
-              <a:spcPct val="15000"/>
-            </a:spcAft>
-            <a:buChar char="•"/>
-          </a:pPr>
-          <a:r>
-            <a:rPr lang="en-US" sz="3100" kern="1200" dirty="0"/>
-            <a:t>EM projects 2025-2028</a:t>
-          </a:r>
-        </a:p>
-      </dsp:txBody>
-      <dsp:txXfrm>
-        <a:off x="9713030" y="2376349"/>
-        <a:ext cx="2608730" cy="3274359"/>
-      </dsp:txXfrm>
-    </dsp:sp>
-    <dsp:sp modelId="{2222C918-E6F6-465A-B76A-2D94259CF0DF}">
-      <dsp:nvSpPr>
-        <dsp:cNvPr id="0" name=""/>
-        <dsp:cNvSpPr/>
-      </dsp:nvSpPr>
-      <dsp:spPr>
-        <a:xfrm>
-          <a:off x="7037410" y="2675718"/>
-          <a:ext cx="2675620" cy="2675620"/>
-        </a:xfrm>
-        <a:prstGeom prst="ellipse">
-          <a:avLst/>
-        </a:prstGeom>
-        <a:solidFill>
-          <a:schemeClr val="accent5">
-            <a:hueOff val="-879995"/>
-            <a:satOff val="13492"/>
-            <a:lumOff val="-12157"/>
-            <a:alphaOff val="0"/>
-          </a:schemeClr>
-        </a:solidFill>
-        <a:ln w="25400" cap="flat" cmpd="sng" algn="ctr">
-          <a:solidFill>
-            <a:schemeClr val="lt1">
-              <a:hueOff val="0"/>
-              <a:satOff val="0"/>
-              <a:lumOff val="0"/>
-              <a:alphaOff val="0"/>
-            </a:schemeClr>
-          </a:solidFill>
-          <a:prstDash val="solid"/>
-        </a:ln>
-        <a:effectLst/>
-      </dsp:spPr>
-      <dsp:style>
-        <a:lnRef idx="2">
-          <a:scrgbClr r="0" g="0" b="0"/>
-        </a:lnRef>
-        <a:fillRef idx="1">
-          <a:scrgbClr r="0" g="0" b="0"/>
-        </a:fillRef>
-        <a:effectRef idx="0">
-          <a:scrgbClr r="0" g="0" b="0"/>
-        </a:effectRef>
-        <a:fontRef idx="minor">
-          <a:schemeClr val="lt1"/>
-        </a:fontRef>
-      </dsp:style>
-      <dsp:txBody>
-        <a:bodyPr spcFirstLastPara="0" vert="horz" wrap="square" lIns="41275" tIns="41275" rIns="41275" bIns="41275" numCol="1" spcCol="1270" anchor="ctr" anchorCtr="0">
-          <a:noAutofit/>
-        </a:bodyPr>
-        <a:lstStyle/>
-        <a:p>
-          <a:pPr marL="0" lvl="0" indent="0" algn="ctr" defTabSz="2889250">
-            <a:lnSpc>
-              <a:spcPct val="90000"/>
-            </a:lnSpc>
-            <a:spcBef>
-              <a:spcPct val="0"/>
-            </a:spcBef>
-            <a:spcAft>
-              <a:spcPct val="35000"/>
-            </a:spcAft>
-            <a:buNone/>
-          </a:pPr>
-          <a:r>
-            <a:rPr lang="en-US" sz="6500" kern="1200" dirty="0"/>
-            <a:t>MSE 1</a:t>
-          </a:r>
-        </a:p>
-      </dsp:txBody>
-      <dsp:txXfrm>
-        <a:off x="7429245" y="3067553"/>
-        <a:ext cx="1891950" cy="1891950"/>
-      </dsp:txXfrm>
-    </dsp:sp>
-    <dsp:sp modelId="{AC231F00-2DA0-4E04-9F01-8B922C4FB8EB}">
-      <dsp:nvSpPr>
-        <dsp:cNvPr id="0" name=""/>
-        <dsp:cNvSpPr/>
-      </dsp:nvSpPr>
-      <dsp:spPr>
-        <a:xfrm>
-          <a:off x="15398722" y="1674700"/>
-          <a:ext cx="5351240" cy="4677657"/>
-        </a:xfrm>
-        <a:prstGeom prst="rightArrow">
-          <a:avLst>
-            <a:gd name="adj1" fmla="val 70000"/>
-            <a:gd name="adj2" fmla="val 50000"/>
-          </a:avLst>
-        </a:prstGeom>
-        <a:solidFill>
-          <a:schemeClr val="accent5">
-            <a:tint val="40000"/>
-            <a:alpha val="90000"/>
-            <a:hueOff val="-1275340"/>
-            <a:satOff val="15463"/>
-            <a:lumOff val="-3540"/>
-            <a:alphaOff val="0"/>
-          </a:schemeClr>
-        </a:solidFill>
-        <a:ln w="25400" cap="flat" cmpd="sng" algn="ctr">
-          <a:solidFill>
-            <a:schemeClr val="tx1"/>
-          </a:solidFill>
-          <a:prstDash val="solid"/>
-        </a:ln>
-        <a:effectLst/>
-      </dsp:spPr>
-      <dsp:style>
-        <a:lnRef idx="2">
-          <a:scrgbClr r="0" g="0" b="0"/>
-        </a:lnRef>
-        <a:fillRef idx="1">
-          <a:scrgbClr r="0" g="0" b="0"/>
-        </a:fillRef>
-        <a:effectRef idx="0">
-          <a:scrgbClr r="0" g="0" b="0"/>
-        </a:effectRef>
-        <a:fontRef idx="minor"/>
-      </dsp:style>
-      <dsp:txBody>
-        <a:bodyPr spcFirstLastPara="0" vert="horz" wrap="square" lIns="78740" tIns="19685" rIns="39370" bIns="19685" numCol="1" spcCol="1270" anchor="ctr" anchorCtr="0">
-          <a:noAutofit/>
-        </a:bodyPr>
-        <a:lstStyle/>
-        <a:p>
-          <a:pPr marL="285750" lvl="1" indent="-285750" algn="l" defTabSz="1377950">
-            <a:lnSpc>
-              <a:spcPct val="90000"/>
-            </a:lnSpc>
-            <a:spcBef>
-              <a:spcPct val="0"/>
-            </a:spcBef>
-            <a:spcAft>
-              <a:spcPct val="15000"/>
-            </a:spcAft>
-            <a:buChar char="•"/>
-          </a:pPr>
-          <a:r>
-            <a:rPr lang="en-US" sz="3100" kern="1200" dirty="0"/>
-            <a:t>2025-2028 temp data incorporated from om</a:t>
-          </a:r>
-        </a:p>
-        <a:p>
-          <a:pPr marL="285750" lvl="1" indent="-285750" algn="l" defTabSz="1377950">
-            <a:lnSpc>
-              <a:spcPct val="90000"/>
-            </a:lnSpc>
-            <a:spcBef>
-              <a:spcPct val="0"/>
-            </a:spcBef>
-            <a:spcAft>
-              <a:spcPct val="15000"/>
-            </a:spcAft>
-            <a:buChar char="•"/>
-          </a:pPr>
-          <a:r>
-            <a:rPr lang="en-US" sz="3100" kern="1200" dirty="0"/>
-            <a:t>EM projects 2028-2031 </a:t>
-          </a:r>
-        </a:p>
-      </dsp:txBody>
-      <dsp:txXfrm>
-        <a:off x="16736532" y="2376349"/>
-        <a:ext cx="2608730" cy="3274359"/>
-      </dsp:txXfrm>
-    </dsp:sp>
-    <dsp:sp modelId="{787B77B4-FA4D-46B7-9BD2-D48DA2F344F1}">
-      <dsp:nvSpPr>
-        <dsp:cNvPr id="0" name=""/>
-        <dsp:cNvSpPr/>
-      </dsp:nvSpPr>
-      <dsp:spPr>
-        <a:xfrm>
-          <a:off x="14060912" y="2675718"/>
-          <a:ext cx="2675620" cy="2675620"/>
-        </a:xfrm>
-        <a:prstGeom prst="ellipse">
-          <a:avLst/>
-        </a:prstGeom>
-        <a:solidFill>
-          <a:schemeClr val="accent5">
-            <a:hueOff val="-1759991"/>
-            <a:satOff val="26985"/>
-            <a:lumOff val="-24313"/>
-            <a:alphaOff val="0"/>
-          </a:schemeClr>
-        </a:solidFill>
-        <a:ln w="25400" cap="flat" cmpd="sng" algn="ctr">
-          <a:solidFill>
-            <a:schemeClr val="lt1">
-              <a:hueOff val="0"/>
-              <a:satOff val="0"/>
-              <a:lumOff val="0"/>
-              <a:alphaOff val="0"/>
-            </a:schemeClr>
-          </a:solidFill>
-          <a:prstDash val="solid"/>
-        </a:ln>
-        <a:effectLst/>
-      </dsp:spPr>
-      <dsp:style>
-        <a:lnRef idx="2">
-          <a:scrgbClr r="0" g="0" b="0"/>
-        </a:lnRef>
-        <a:fillRef idx="1">
-          <a:scrgbClr r="0" g="0" b="0"/>
-        </a:fillRef>
-        <a:effectRef idx="0">
-          <a:scrgbClr r="0" g="0" b="0"/>
-        </a:effectRef>
-        <a:fontRef idx="minor">
-          <a:schemeClr val="lt1"/>
-        </a:fontRef>
-      </dsp:style>
-      <dsp:txBody>
-        <a:bodyPr spcFirstLastPara="0" vert="horz" wrap="square" lIns="41275" tIns="41275" rIns="41275" bIns="41275" numCol="1" spcCol="1270" anchor="ctr" anchorCtr="0">
-          <a:noAutofit/>
-        </a:bodyPr>
-        <a:lstStyle/>
-        <a:p>
-          <a:pPr marL="0" lvl="0" indent="0" algn="ctr" defTabSz="2889250">
-            <a:lnSpc>
-              <a:spcPct val="90000"/>
-            </a:lnSpc>
-            <a:spcBef>
-              <a:spcPct val="0"/>
-            </a:spcBef>
-            <a:spcAft>
-              <a:spcPct val="35000"/>
-            </a:spcAft>
-            <a:buNone/>
-          </a:pPr>
-          <a:r>
-            <a:rPr lang="en-US" sz="6500" kern="1200" dirty="0"/>
-            <a:t>MSE 2</a:t>
-          </a:r>
-        </a:p>
-      </dsp:txBody>
-      <dsp:txXfrm>
-        <a:off x="14452747" y="3067553"/>
-        <a:ext cx="1891950" cy="1891950"/>
-      </dsp:txXfrm>
-    </dsp:sp>
-    <dsp:sp modelId="{BA691BD7-0B2E-491B-BF6E-B2EF993E279C}">
-      <dsp:nvSpPr>
-        <dsp:cNvPr id="0" name=""/>
-        <dsp:cNvSpPr/>
-      </dsp:nvSpPr>
-      <dsp:spPr>
-        <a:xfrm>
-          <a:off x="22422225" y="1674700"/>
-          <a:ext cx="5351240" cy="4677657"/>
-        </a:xfrm>
-        <a:prstGeom prst="rightArrow">
-          <a:avLst>
-            <a:gd name="adj1" fmla="val 70000"/>
-            <a:gd name="adj2" fmla="val 50000"/>
-          </a:avLst>
-        </a:prstGeom>
-        <a:solidFill>
-          <a:schemeClr val="accent5">
-            <a:tint val="40000"/>
-            <a:alpha val="90000"/>
-            <a:hueOff val="-1913010"/>
-            <a:satOff val="23195"/>
-            <a:lumOff val="-5310"/>
-            <a:alphaOff val="0"/>
-          </a:schemeClr>
-        </a:solidFill>
-        <a:ln w="25400" cap="flat" cmpd="sng" algn="ctr">
-          <a:solidFill>
-            <a:schemeClr val="tx1">
-              <a:alpha val="90000"/>
-            </a:schemeClr>
-          </a:solidFill>
-          <a:prstDash val="solid"/>
-        </a:ln>
-        <a:effectLst/>
-      </dsp:spPr>
-      <dsp:style>
-        <a:lnRef idx="2">
-          <a:scrgbClr r="0" g="0" b="0"/>
-        </a:lnRef>
-        <a:fillRef idx="1">
-          <a:scrgbClr r="0" g="0" b="0"/>
-        </a:fillRef>
-        <a:effectRef idx="0">
-          <a:scrgbClr r="0" g="0" b="0"/>
-        </a:effectRef>
-        <a:fontRef idx="minor"/>
-      </dsp:style>
-      <dsp:txBody>
-        <a:bodyPr spcFirstLastPara="0" vert="horz" wrap="square" lIns="78740" tIns="19685" rIns="39370" bIns="19685" numCol="1" spcCol="1270" anchor="ctr" anchorCtr="0">
-          <a:noAutofit/>
-        </a:bodyPr>
-        <a:lstStyle/>
-        <a:p>
-          <a:pPr marL="0" lvl="0" indent="0" algn="ctr" defTabSz="1377950">
-            <a:lnSpc>
-              <a:spcPct val="90000"/>
-            </a:lnSpc>
-            <a:spcBef>
-              <a:spcPct val="0"/>
-            </a:spcBef>
-            <a:spcAft>
-              <a:spcPct val="35000"/>
-            </a:spcAft>
-            <a:buNone/>
-          </a:pPr>
-          <a:r>
-            <a:rPr lang="en-US" sz="3100" kern="1200" dirty="0"/>
-            <a:t>…</a:t>
-          </a:r>
-        </a:p>
-        <a:p>
-          <a:pPr marL="0" lvl="0" indent="0" algn="ctr" defTabSz="1377950">
-            <a:lnSpc>
-              <a:spcPct val="90000"/>
-            </a:lnSpc>
-            <a:spcBef>
-              <a:spcPct val="0"/>
-            </a:spcBef>
-            <a:spcAft>
-              <a:spcPct val="35000"/>
-            </a:spcAft>
-            <a:buNone/>
-          </a:pPr>
-          <a:endParaRPr lang="en-US" sz="3100" kern="1200" dirty="0"/>
-        </a:p>
-      </dsp:txBody>
-      <dsp:txXfrm>
-        <a:off x="23760035" y="2376349"/>
-        <a:ext cx="2608730" cy="3274359"/>
-      </dsp:txXfrm>
-    </dsp:sp>
-    <dsp:sp modelId="{68391720-4408-4595-A0AD-FE441A1E3937}">
-      <dsp:nvSpPr>
-        <dsp:cNvPr id="0" name=""/>
-        <dsp:cNvSpPr/>
-      </dsp:nvSpPr>
-      <dsp:spPr>
-        <a:xfrm>
-          <a:off x="21084415" y="2675718"/>
-          <a:ext cx="2675620" cy="2675620"/>
-        </a:xfrm>
-        <a:prstGeom prst="ellipse">
-          <a:avLst/>
-        </a:prstGeom>
-        <a:solidFill>
-          <a:schemeClr val="accent5">
-            <a:hueOff val="-2639986"/>
-            <a:satOff val="40477"/>
-            <a:lumOff val="-36470"/>
-            <a:alphaOff val="0"/>
-          </a:schemeClr>
-        </a:solidFill>
-        <a:ln w="25400" cap="flat" cmpd="sng" algn="ctr">
-          <a:solidFill>
-            <a:schemeClr val="lt1">
-              <a:hueOff val="0"/>
-              <a:satOff val="0"/>
-              <a:lumOff val="0"/>
-              <a:alphaOff val="0"/>
-            </a:schemeClr>
-          </a:solidFill>
-          <a:prstDash val="solid"/>
-        </a:ln>
-        <a:effectLst/>
-      </dsp:spPr>
-      <dsp:style>
-        <a:lnRef idx="2">
-          <a:scrgbClr r="0" g="0" b="0"/>
-        </a:lnRef>
-        <a:fillRef idx="1">
-          <a:scrgbClr r="0" g="0" b="0"/>
-        </a:fillRef>
-        <a:effectRef idx="0">
-          <a:scrgbClr r="0" g="0" b="0"/>
-        </a:effectRef>
-        <a:fontRef idx="minor">
-          <a:schemeClr val="lt1"/>
-        </a:fontRef>
-      </dsp:style>
-      <dsp:txBody>
-        <a:bodyPr spcFirstLastPara="0" vert="horz" wrap="square" lIns="41275" tIns="41275" rIns="41275" bIns="41275" numCol="1" spcCol="1270" anchor="ctr" anchorCtr="0">
-          <a:noAutofit/>
-        </a:bodyPr>
-        <a:lstStyle/>
-        <a:p>
-          <a:pPr marL="0" lvl="0" indent="0" algn="ctr" defTabSz="2889250">
-            <a:lnSpc>
-              <a:spcPct val="90000"/>
-            </a:lnSpc>
-            <a:spcBef>
-              <a:spcPct val="0"/>
-            </a:spcBef>
-            <a:spcAft>
-              <a:spcPct val="35000"/>
-            </a:spcAft>
-            <a:buNone/>
-          </a:pPr>
-          <a:r>
-            <a:rPr lang="en-US" sz="6500" kern="1200" dirty="0"/>
-            <a:t>MSE cont.</a:t>
-          </a:r>
-        </a:p>
-      </dsp:txBody>
-      <dsp:txXfrm>
-        <a:off x="21476250" y="3067553"/>
-        <a:ext cx="1891950" cy="1891950"/>
-      </dsp:txXfrm>
-    </dsp:sp>
-  </dsp:spTree>
-</dsp:drawing>
-</file>
-
-<file path=ppt/diagrams/layout1.xml><?xml version="1.0" encoding="utf-8"?>
-<dgm:layoutDef xmlns:dgm="http://schemas.openxmlformats.org/drawingml/2006/diagram" xmlns:a="http://schemas.openxmlformats.org/drawingml/2006/main" uniqueId="urn:microsoft.com/office/officeart/2005/8/layout/hProcess6">
-  <dgm:title val=""/>
-  <dgm:desc val=""/>
-  <dgm:catLst>
-    <dgm:cat type="process" pri="7000"/>
-  </dgm:catLst>
-  <dgm:sampData>
-    <dgm:dataModel>
-      <dgm:ptLst>
-        <dgm:pt modelId="0" type="doc"/>
-        <dgm:pt modelId="1">
-          <dgm:prSet phldr="1"/>
-        </dgm:pt>
-        <dgm:pt modelId="11">
-          <dgm:prSet phldr="1"/>
-        </dgm:pt>
-        <dgm:pt modelId="12">
-          <dgm:prSet phldr="1"/>
-        </dgm:pt>
-        <dgm:pt modelId="2">
-          <dgm:prSet phldr="1"/>
-        </dgm:pt>
-        <dgm:pt modelId="21">
-          <dgm:prSet phldr="1"/>
-        </dgm:pt>
-        <dgm:pt modelId="22">
-          <dgm:prSet phldr="1"/>
-        </dgm:pt>
-        <dgm:pt modelId="3">
-          <dgm:prSet phldr="1"/>
-        </dgm:pt>
-        <dgm:pt modelId="31">
-          <dgm:prSet phldr="1"/>
-        </dgm:pt>
-        <dgm:pt modelId="32">
-          <dgm:prSet phldr="1"/>
-        </dgm:pt>
-      </dgm:ptLst>
-      <dgm:cxnLst>
-        <dgm:cxn modelId="4" srcId="0" destId="1" srcOrd="0" destOrd="0"/>
-        <dgm:cxn modelId="5" srcId="0" destId="2" srcOrd="1" destOrd="0"/>
-        <dgm:cxn modelId="13" srcId="1" destId="11" srcOrd="0" destOrd="0"/>
-        <dgm:cxn modelId="14" srcId="1" destId="12" srcOrd="0" destOrd="0"/>
-        <dgm:cxn modelId="23" srcId="2" destId="21" srcOrd="0" destOrd="0"/>
-        <dgm:cxn modelId="24" srcId="2" destId="22" srcOrd="0" destOrd="0"/>
-        <dgm:cxn modelId="33" srcId="3" destId="31" srcOrd="0" destOrd="0"/>
-        <dgm:cxn modelId="34" srcId="3" destId="32" srcOrd="0" destOrd="0"/>
-      </dgm:cxnLst>
-      <dgm:bg/>
-      <dgm:whole/>
-    </dgm:dataModel>
-  </dgm:sampData>
-  <dgm:styleData>
-    <dgm:dataModel>
-      <dgm:ptLst>
-        <dgm:pt modelId="0" type="doc"/>
-        <dgm:pt modelId="1"/>
-        <dgm:pt modelId="11"/>
-        <dgm:pt modelId="2"/>
-        <dgm:pt modelId="21"/>
-      </dgm:ptLst>
-      <dgm:cxnLst>
-        <dgm:cxn modelId="4" srcId="0" destId="1" srcOrd="0" destOrd="0"/>
-        <dgm:cxn modelId="5" srcId="0" destId="2" srcOrd="1" destOrd="0"/>
-        <dgm:cxn modelId="13" srcId="1" destId="11" srcOrd="0" destOrd="0"/>
-        <dgm:cxn modelId="23" srcId="2" destId="21" srcOrd="0" destOrd="0"/>
-      </dgm:cxnLst>
-      <dgm:bg/>
-      <dgm:whole/>
-    </dgm:dataModel>
-  </dgm:styleData>
-  <dgm:clrData>
-    <dgm:dataModel>
-      <dgm:ptLst>
-        <dgm:pt modelId="0" type="doc"/>
-        <dgm:pt modelId="1"/>
-        <dgm:pt modelId="11"/>
-        <dgm:pt modelId="2"/>
-        <dgm:pt modelId="21"/>
-        <dgm:pt modelId="3"/>
-        <dgm:pt modelId="31"/>
-        <dgm:pt modelId="4"/>
-        <dgm:pt modelId="41"/>
-      </dgm:ptLst>
-      <dgm:cxnLst>
-        <dgm:cxn modelId="5" srcId="0" destId="1" srcOrd="0" destOrd="0"/>
-        <dgm:cxn modelId="6" srcId="0" destId="2" srcOrd="1" destOrd="0"/>
-        <dgm:cxn modelId="7" srcId="0" destId="3" srcOrd="2" destOrd="0"/>
-        <dgm:cxn modelId="8" srcId="0" destId="4" srcOrd="3" destOrd="0"/>
-        <dgm:cxn modelId="13" srcId="1" destId="11" srcOrd="0" destOrd="0"/>
-        <dgm:cxn modelId="23" srcId="2" destId="21" srcOrd="0" destOrd="0"/>
-        <dgm:cxn modelId="33" srcId="3" destId="31" srcOrd="0" destOrd="0"/>
-        <dgm:cxn modelId="43" srcId="4" destId="41" srcOrd="0" destOrd="0"/>
-      </dgm:cxnLst>
-      <dgm:bg/>
-      <dgm:whole/>
-    </dgm:dataModel>
-  </dgm:clrData>
-  <dgm:layoutNode name="theList">
-    <dgm:varLst>
-      <dgm:dir/>
-      <dgm:animLvl val="lvl"/>
-      <dgm:resizeHandles val="exact"/>
-    </dgm:varLst>
-    <dgm:choose name="Name0">
-      <dgm:if name="Name1" func="var" arg="dir" op="equ" val="norm">
-        <dgm:alg type="lin">
-          <dgm:param type="linDir" val="fromL"/>
-          <dgm:param type="nodeHorzAlign" val="l"/>
-        </dgm:alg>
-      </dgm:if>
-      <dgm:else name="Name2">
-        <dgm:alg type="lin">
-          <dgm:param type="linDir" val="fromR"/>
-          <dgm:param type="nodeHorzAlign" val="r"/>
-        </dgm:alg>
-      </dgm:else>
-    </dgm:choose>
-    <dgm:shape xmlns:r="http://schemas.openxmlformats.org/officeDocument/2006/relationships" r:blip="">
-      <dgm:adjLst/>
-    </dgm:shape>
-    <dgm:presOf/>
-    <dgm:constrLst>
-      <dgm:constr type="w" for="ch" forName="compNode" refType="w"/>
-      <dgm:constr type="h" for="ch" forName="compNode" refType="w" refFor="ch" refForName="compNode" fact="0.7"/>
-      <dgm:constr type="ctrY" for="ch" forName="compNode" refType="h" fact="0.5"/>
-      <dgm:constr type="w" for="ch" forName="aSpace" refType="w" fact="0.05"/>
-      <dgm:constr type="primFontSz" for="des" forName="childTextHidden" op="equ" val="65"/>
-      <dgm:constr type="primFontSz" for="des" forName="parentText" op="equ"/>
-    </dgm:constrLst>
-    <dgm:ruleLst/>
-    <dgm:forEach name="aNodeForEach" axis="ch" ptType="node">
-      <dgm:layoutNode name="compNode">
-        <dgm:alg type="composite">
-          <dgm:param type="ar" val="1.43"/>
-        </dgm:alg>
-        <dgm:shape xmlns:r="http://schemas.openxmlformats.org/officeDocument/2006/relationships" r:blip="">
-          <dgm:adjLst/>
-        </dgm:shape>
-        <dgm:presOf/>
-        <dgm:choose name="Name3">
-          <dgm:if name="Name4" func="var" arg="dir" op="equ" val="norm">
-            <dgm:constrLst>
-              <dgm:constr type="w" for="ch" forName="childTextVisible" refType="w" fact="0.8"/>
-              <dgm:constr type="h" for="ch" forName="childTextVisible" refType="h"/>
-              <dgm:constr type="r" for="ch" forName="childTextVisible" refType="w"/>
-              <dgm:constr type="w" for="ch" forName="childTextHidden" refType="w" fact="0.6"/>
-              <dgm:constr type="h" for="ch" forName="childTextHidden" refType="h"/>
-              <dgm:constr type="r" for="ch" forName="childTextHidden" refType="w"/>
-              <dgm:constr type="l" for="ch" forName="parentText"/>
-              <dgm:constr type="w" for="ch" forName="parentText" refType="w" fact="0.4"/>
-              <dgm:constr type="h" for="ch" forName="parentText" refType="w" refFor="ch" refForName="parentText" op="equ"/>
-              <dgm:constr type="ctrY" for="ch" forName="parentText" refType="h" fact="0.5"/>
-            </dgm:constrLst>
-          </dgm:if>
-          <dgm:else name="Name5">
-            <dgm:constrLst>
-              <dgm:constr type="w" for="ch" forName="childTextVisible" refType="w" fact="0.8"/>
-              <dgm:constr type="h" for="ch" forName="childTextVisible" refType="h"/>
-              <dgm:constr type="l" for="ch" forName="childTextVisible"/>
-              <dgm:constr type="w" for="ch" forName="childTextHidden" refType="w" fact="0.6"/>
-              <dgm:constr type="h" for="ch" forName="childTextHidden" refType="h"/>
-              <dgm:constr type="l" for="ch" forName="childTextHidden"/>
-              <dgm:constr type="r" for="ch" forName="parentText" refType="w"/>
-              <dgm:constr type="w" for="ch" forName="parentText" refType="w" fact="0.4"/>
-              <dgm:constr type="h" for="ch" forName="parentText" refType="w" refFor="ch" refForName="parentText" op="equ"/>
-              <dgm:constr type="ctrY" for="ch" forName="parentText" refType="h" fact="0.5"/>
-            </dgm:constrLst>
-          </dgm:else>
-        </dgm:choose>
-        <dgm:ruleLst/>
-        <dgm:layoutNode name="noGeometry">
-          <dgm:alg type="sp"/>
-          <dgm:shape xmlns:r="http://schemas.openxmlformats.org/officeDocument/2006/relationships" r:blip="">
-            <dgm:adjLst/>
-          </dgm:shape>
-          <dgm:presOf/>
-          <dgm:constrLst/>
-          <dgm:ruleLst/>
-        </dgm:layoutNode>
-        <dgm:layoutNode name="childTextVisible" styleLbl="bgAccFollowNode1">
-          <dgm:varLst>
-            <dgm:bulletEnabled val="1"/>
-          </dgm:varLst>
-          <dgm:alg type="sp"/>
-          <dgm:choose name="Name6">
-            <dgm:if name="Name7" func="var" arg="dir" op="equ" val="norm">
-              <dgm:shape xmlns:r="http://schemas.openxmlformats.org/officeDocument/2006/relationships" type="rightArrow" r:blip="">
-                <dgm:adjLst>
-                  <dgm:adj idx="1" val="0.7"/>
-                  <dgm:adj idx="2" val="0.5"/>
-                </dgm:adjLst>
-              </dgm:shape>
-            </dgm:if>
-            <dgm:else name="Name8">
-              <dgm:shape xmlns:r="http://schemas.openxmlformats.org/officeDocument/2006/relationships" type="leftArrow" r:blip="">
-                <dgm:adjLst>
-                  <dgm:adj idx="1" val="0.7"/>
-                  <dgm:adj idx="2" val="0.5"/>
-                </dgm:adjLst>
-              </dgm:shape>
-            </dgm:else>
-          </dgm:choose>
-          <dgm:presOf axis="des" ptType="node"/>
-          <dgm:constrLst/>
-          <dgm:ruleLst/>
-        </dgm:layoutNode>
-        <dgm:layoutNode name="childTextHidden" styleLbl="bgAccFollowNode1">
-          <dgm:choose name="Name9">
-            <dgm:if name="Name10" axis="des followSib" ptType="node node" st="1 1" cnt="1 0" func="cnt" op="gte" val="1">
-              <dgm:alg type="tx">
-                <dgm:param type="stBulletLvl" val="1"/>
-                <dgm:param type="txAnchorVertCh" val="mid"/>
-              </dgm:alg>
-            </dgm:if>
-            <dgm:else name="Name11">
-              <dgm:alg type="tx">
-                <dgm:param type="stBulletLvl" val="2"/>
-                <dgm:param type="txAnchorVertCh" val="mid"/>
-              </dgm:alg>
-            </dgm:else>
-          </dgm:choose>
-          <dgm:choose name="Name12">
-            <dgm:if name="Name13" func="var" arg="dir" op="equ" val="norm">
-              <dgm:shape xmlns:r="http://schemas.openxmlformats.org/officeDocument/2006/relationships" type="rightArrow" r:blip="" hideGeom="1">
-                <dgm:adjLst>
-                  <dgm:adj idx="1" val="0.7"/>
-                  <dgm:adj idx="2" val="0.5"/>
-                </dgm:adjLst>
-              </dgm:shape>
-            </dgm:if>
-            <dgm:else name="Name14">
-              <dgm:shape xmlns:r="http://schemas.openxmlformats.org/officeDocument/2006/relationships" type="leftArrow" r:blip="" hideGeom="1">
-                <dgm:adjLst>
-                  <dgm:adj idx="1" val="0.7"/>
-                  <dgm:adj idx="2" val="0.5"/>
-                </dgm:adjLst>
-              </dgm:shape>
-            </dgm:else>
-          </dgm:choose>
-          <dgm:presOf axis="des" ptType="node"/>
-          <dgm:constrLst>
-            <dgm:constr type="secFontSz" refType="primFontSz"/>
-            <dgm:constr type="tMarg" refType="primFontSz" fact="0.05"/>
-            <dgm:constr type="bMarg" refType="primFontSz" fact="0.05"/>
-            <dgm:constr type="rMarg" refType="primFontSz" fact="0.1"/>
-            <dgm:constr type="lMarg" refType="primFontSz" fact="0.2"/>
-          </dgm:constrLst>
-          <dgm:ruleLst>
-            <dgm:rule type="primFontSz" val="5" fact="NaN" max="NaN"/>
-          </dgm:ruleLst>
-        </dgm:layoutNode>
-        <dgm:layoutNode name="parentText" styleLbl="node1">
-          <dgm:varLst>
-            <dgm:chMax val="1"/>
-            <dgm:bulletEnabled val="1"/>
-          </dgm:varLst>
-          <dgm:alg type="tx"/>
-          <dgm:shape xmlns:r="http://schemas.openxmlformats.org/officeDocument/2006/relationships" type="ellipse" r:blip="">
-            <dgm:adjLst/>
-          </dgm:shape>
-          <dgm:presOf axis="self"/>
-          <dgm:constrLst>
-            <dgm:constr type="primFontSz" val="65"/>
-            <dgm:constr type="tMarg" refType="primFontSz" fact="0.05"/>
-            <dgm:constr type="bMarg" refType="primFontSz" fact="0.05"/>
-            <dgm:constr type="lMarg" refType="primFontSz" fact="0.05"/>
-            <dgm:constr type="rMarg" refType="primFontSz" fact="0.05"/>
-          </dgm:constrLst>
-          <dgm:ruleLst>
-            <dgm:rule type="primFontSz" val="5" fact="NaN" max="NaN"/>
-          </dgm:ruleLst>
-        </dgm:layoutNode>
-      </dgm:layoutNode>
-      <dgm:choose name="Name15">
-        <dgm:if name="Name16" axis="self" ptType="node" func="revPos" op="gte" val="2">
-          <dgm:layoutNode name="aSpace">
-            <dgm:alg type="sp"/>
-            <dgm:shape xmlns:r="http://schemas.openxmlformats.org/officeDocument/2006/relationships" r:blip="">
-              <dgm:adjLst/>
-            </dgm:shape>
-            <dgm:presOf/>
-            <dgm:constrLst/>
-            <dgm:ruleLst/>
-          </dgm:layoutNode>
-        </dgm:if>
-        <dgm:else name="Name17"/>
-      </dgm:choose>
-    </dgm:forEach>
-  </dgm:layoutNode>
-</dgm:layoutDef>
-</file>
-
-<file path=ppt/diagrams/quickStyle1.xml><?xml version="1.0" encoding="utf-8"?>
-<dgm:styleDef xmlns:dgm="http://schemas.openxmlformats.org/drawingml/2006/diagram" xmlns:a="http://schemas.openxmlformats.org/drawingml/2006/main" uniqueId="urn:microsoft.com/office/officeart/2005/8/quickstyle/simple1">
-  <dgm:title val=""/>
-  <dgm:desc val=""/>
-  <dgm:catLst>
-    <dgm:cat type="simple" pri="10100"/>
-  </dgm:catLst>
-  <dgm:scene3d>
-    <a:camera prst="orthographicFront"/>
-    <a:lightRig rig="threePt" dir="t"/>
-  </dgm:scene3d>
-  <dgm:styleLbl name="node0">
-    <dgm:scene3d>
-      <a:camera prst="orthographicFront"/>
-      <a:lightRig rig="threePt" dir="t"/>
-    </dgm:scene3d>
-    <dgm:sp3d/>
-    <dgm:txPr/>
-    <dgm:style>
-      <a:lnRef idx="2">
-        <a:scrgbClr r="0" g="0" b="0"/>
-      </a:lnRef>
-      <a:fillRef idx="1">
-        <a:scrgbClr r="0" g="0" b="0"/>
-      </a:fillRef>
-      <a:effectRef idx="0">
-        <a:scrgbClr r="0" g="0" b="0"/>
-      </a:effectRef>
-      <a:fontRef idx="minor">
-        <a:schemeClr val="lt1"/>
-      </a:fontRef>
-    </dgm:style>
-  </dgm:styleLbl>
-  <dgm:styleLbl name="lnNode1">
-    <dgm:scene3d>
-      <a:camera prst="orthographicFront"/>
-      <a:lightRig rig="threePt" dir="t"/>
-    </dgm:scene3d>
-    <dgm:sp3d/>
-    <dgm:txPr/>
-    <dgm:style>
-      <a:lnRef idx="2">
-        <a:scrgbClr r="0" g="0" b="0"/>
-      </a:lnRef>
-      <a:fillRef idx="1">
-        <a:scrgbClr r="0" g="0" b="0"/>
-      </a:fillRef>
-      <a:effectRef idx="0">
-        <a:scrgbClr r="0" g="0" b="0"/>
-      </a:effectRef>
-      <a:fontRef idx="minor">
-        <a:schemeClr val="lt1"/>
-      </a:fontRef>
-    </dgm:style>
-  </dgm:styleLbl>
-  <dgm:styleLbl name="vennNode1">
-    <dgm:scene3d>
-      <a:camera prst="orthographicFront"/>
-      <a:lightRig rig="threePt" dir="t"/>
-    </dgm:scene3d>
-    <dgm:sp3d/>
-    <dgm:txPr/>
-    <dgm:style>
-      <a:lnRef idx="2">
-        <a:scrgbClr r="0" g="0" b="0"/>
-      </a:lnRef>
-      <a:fillRef idx="1">
-        <a:scrgbClr r="0" g="0" b="0"/>
-      </a:fillRef>
-      <a:effectRef idx="0">
-        <a:scrgbClr r="0" g="0" b="0"/>
-      </a:effectRef>
-      <a:fontRef idx="minor">
-        <a:schemeClr val="tx1"/>
-      </a:fontRef>
-    </dgm:style>
-  </dgm:styleLbl>
-  <dgm:styleLbl name="alignNode1">
-    <dgm:scene3d>
-      <a:camera prst="orthographicFront"/>
-      <a:lightRig rig="threePt" dir="t"/>
-    </dgm:scene3d>
-    <dgm:sp3d/>
-    <dgm:txPr/>
-    <dgm:style>
-      <a:lnRef idx="2">
-        <a:scrgbClr r="0" g="0" b="0"/>
-      </a:lnRef>
-      <a:fillRef idx="1">
-        <a:scrgbClr r="0" g="0" b="0"/>
-      </a:fillRef>
-      <a:effectRef idx="0">
-        <a:scrgbClr r="0" g="0" b="0"/>
-      </a:effectRef>
-      <a:fontRef idx="minor">
-        <a:schemeClr val="lt1"/>
-      </a:fontRef>
-    </dgm:style>
-  </dgm:styleLbl>
-  <dgm:styleLbl name="node1">
-    <dgm:scene3d>
-      <a:camera prst="orthographicFront"/>
-      <a:lightRig rig="threePt" dir="t"/>
-    </dgm:scene3d>
-    <dgm:sp3d/>
-    <dgm:txPr/>
-    <dgm:style>
-      <a:lnRef idx="2">
-        <a:scrgbClr r="0" g="0" b="0"/>
-      </a:lnRef>
-      <a:fillRef idx="1">
-        <a:scrgbClr r="0" g="0" b="0"/>
-      </a:fillRef>
-      <a:effectRef idx="0">
-        <a:scrgbClr r="0" g="0" b="0"/>
-      </a:effectRef>
-      <a:fontRef idx="minor">
-        <a:schemeClr val="lt1"/>
-      </a:fontRef>
-    </dgm:style>
-  </dgm:styleLbl>
-  <dgm:styleLbl name="node2">
-    <dgm:scene3d>
-      <a:camera prst="orthographicFront"/>
-      <a:lightRig rig="threePt" dir="t"/>
-    </dgm:scene3d>
-    <dgm:sp3d/>
-    <dgm:txPr/>
-    <dgm:style>
-      <a:lnRef idx="2">
-        <a:scrgbClr r="0" g="0" b="0"/>
-      </a:lnRef>
-      <a:fillRef idx="1">
-        <a:scrgbClr r="0" g="0" b="0"/>
-      </a:fillRef>
-      <a:effectRef idx="0">
-        <a:scrgbClr r="0" g="0" b="0"/>
-      </a:effectRef>
-      <a:fontRef idx="minor">
-        <a:schemeClr val="lt1"/>
-      </a:fontRef>
-    </dgm:style>
-  </dgm:styleLbl>
-  <dgm:styleLbl name="node3">
-    <dgm:scene3d>
-      <a:camera prst="orthographicFront"/>
-      <a:lightRig rig="threePt" dir="t"/>
-    </dgm:scene3d>
-    <dgm:sp3d/>
-    <dgm:txPr/>
-    <dgm:style>
-      <a:lnRef idx="2">
-        <a:scrgbClr r="0" g="0" b="0"/>
-      </a:lnRef>
-      <a:fillRef idx="1">
-        <a:scrgbClr r="0" g="0" b="0"/>
-      </a:fillRef>
-      <a:effectRef idx="0">
-        <a:scrgbClr r="0" g="0" b="0"/>
-      </a:effectRef>
-      <a:fontRef idx="minor">
-        <a:schemeClr val="lt1"/>
-      </a:fontRef>
-    </dgm:style>
-  </dgm:styleLbl>
-  <dgm:styleLbl name="node4">
-    <dgm:scene3d>
-      <a:camera prst="orthographicFront"/>
-      <a:lightRig rig="threePt" dir="t"/>
-    </dgm:scene3d>
-    <dgm:sp3d/>
-    <dgm:txPr/>
-    <dgm:style>
-      <a:lnRef idx="2">
-        <a:scrgbClr r="0" g="0" b="0"/>
-      </a:lnRef>
-      <a:fillRef idx="1">
-        <a:scrgbClr r="0" g="0" b="0"/>
-      </a:fillRef>
-      <a:effectRef idx="0">
-        <a:scrgbClr r="0" g="0" b="0"/>
-      </a:effectRef>
-      <a:fontRef idx="minor">
-        <a:schemeClr val="lt1"/>
-      </a:fontRef>
-    </dgm:style>
-  </dgm:styleLbl>
-  <dgm:styleLbl name="fgImgPlace1">
-    <dgm:scene3d>
-      <a:camera prst="orthographicFront"/>
-      <a:lightRig rig="threePt" dir="t"/>
-    </dgm:scene3d>
-    <dgm:sp3d/>
-    <dgm:txPr/>
-    <dgm:style>
-      <a:lnRef idx="2">
-        <a:scrgbClr r="0" g="0" b="0"/>
-      </a:lnRef>
-      <a:fillRef idx="1">
-        <a:scrgbClr r="0" g="0" b="0"/>
-      </a:fillRef>
-      <a:effectRef idx="0">
-        <a:scrgbClr r="0" g="0" b="0"/>
-      </a:effectRef>
-      <a:fontRef idx="minor"/>
-    </dgm:style>
-  </dgm:styleLbl>
-  <dgm:styleLbl name="alignImgPlace1">
-    <dgm:scene3d>
-      <a:camera prst="orthographicFront"/>
-      <a:lightRig rig="threePt" dir="t"/>
-    </dgm:scene3d>
-    <dgm:sp3d/>
-    <dgm:txPr/>
-    <dgm:style>
-      <a:lnRef idx="2">
-        <a:scrgbClr r="0" g="0" b="0"/>
-      </a:lnRef>
-      <a:fillRef idx="1">
-        <a:scrgbClr r="0" g="0" b="0"/>
-      </a:fillRef>
-      <a:effectRef idx="0">
-        <a:scrgbClr r="0" g="0" b="0"/>
-      </a:effectRef>
-      <a:fontRef idx="minor"/>
-    </dgm:style>
-  </dgm:styleLbl>
-  <dgm:styleLbl name="bgImgPlace1">
-    <dgm:scene3d>
-      <a:camera prst="orthographicFront"/>
-      <a:lightRig rig="threePt" dir="t"/>
-    </dgm:scene3d>
-    <dgm:sp3d/>
-    <dgm:txPr/>
-    <dgm:style>
-      <a:lnRef idx="2">
-        <a:scrgbClr r="0" g="0" b="0"/>
-      </a:lnRef>
-      <a:fillRef idx="1">
-        <a:scrgbClr r="0" g="0" b="0"/>
-      </a:fillRef>
-      <a:effectRef idx="0">
-        <a:scrgbClr r="0" g="0" b="0"/>
-      </a:effectRef>
-      <a:fontRef idx="minor"/>
-    </dgm:style>
-  </dgm:styleLbl>
-  <dgm:styleLbl name="sibTrans2D1">
-    <dgm:scene3d>
-      <a:camera prst="orthographicFront"/>
-      <a:lightRig rig="threePt" dir="t"/>
-    </dgm:scene3d>
-    <dgm:sp3d/>
-    <dgm:txPr/>
-    <dgm:style>
-      <a:lnRef idx="0">
-        <a:scrgbClr r="0" g="0" b="0"/>
-      </a:lnRef>
-      <a:fillRef idx="1">
-        <a:scrgbClr r="0" g="0" b="0"/>
-      </a:fillRef>
-      <a:effectRef idx="0">
-        <a:scrgbClr r="0" g="0" b="0"/>
-      </a:effectRef>
-      <a:fontRef idx="minor">
-        <a:schemeClr val="lt1"/>
-      </a:fontRef>
-    </dgm:style>
-  </dgm:styleLbl>
-  <dgm:styleLbl name="fgSibTrans2D1">
-    <dgm:scene3d>
-      <a:camera prst="orthographicFront"/>
-      <a:lightRig rig="threePt" dir="t"/>
-    </dgm:scene3d>
-    <dgm:sp3d/>
-    <dgm:txPr/>
-    <dgm:style>
-      <a:lnRef idx="0">
-        <a:scrgbClr r="0" g="0" b="0"/>
-      </a:lnRef>
-      <a:fillRef idx="1">
-        <a:scrgbClr r="0" g="0" b="0"/>
-      </a:fillRef>
-      <a:effectRef idx="0">
-        <a:scrgbClr r="0" g="0" b="0"/>
-      </a:effectRef>
-      <a:fontRef idx="minor">
-        <a:schemeClr val="lt1"/>
-      </a:fontRef>
-    </dgm:style>
-  </dgm:styleLbl>
-  <dgm:styleLbl name="bgSibTrans2D1">
-    <dgm:scene3d>
-      <a:camera prst="orthographicFront"/>
-      <a:lightRig rig="threePt" dir="t"/>
-    </dgm:scene3d>
-    <dgm:sp3d/>
-    <dgm:txPr/>
-    <dgm:style>
-      <a:lnRef idx="0">
-        <a:scrgbClr r="0" g="0" b="0"/>
-      </a:lnRef>
-      <a:fillRef idx="1">
-        <a:scrgbClr r="0" g="0" b="0"/>
-      </a:fillRef>
-      <a:effectRef idx="0">
-        <a:scrgbClr r="0" g="0" b="0"/>
-      </a:effectRef>
-      <a:fontRef idx="minor">
-        <a:schemeClr val="lt1"/>
-      </a:fontRef>
-    </dgm:style>
-  </dgm:styleLbl>
-  <dgm:styleLbl name="sibTrans1D1">
-    <dgm:scene3d>
-      <a:camera prst="orthographicFront"/>
-      <a:lightRig rig="threePt" dir="t"/>
-    </dgm:scene3d>
-    <dgm:sp3d/>
-    <dgm:txPr/>
-    <dgm:style>
-      <a:lnRef idx="1">
-        <a:scrgbClr r="0" g="0" b="0"/>
-      </a:lnRef>
-      <a:fillRef idx="0">
-        <a:scrgbClr r="0" g="0" b="0"/>
-      </a:fillRef>
-      <a:effectRef idx="0">
-        <a:scrgbClr r="0" g="0" b="0"/>
-      </a:effectRef>
-      <a:fontRef idx="minor"/>
-    </dgm:style>
-  </dgm:styleLbl>
-  <dgm:styleLbl name="callout">
-    <dgm:scene3d>
-      <a:camera prst="orthographicFront"/>
-      <a:lightRig rig="threePt" dir="t"/>
-    </dgm:scene3d>
-    <dgm:sp3d/>
-    <dgm:txPr/>
-    <dgm:style>
-      <a:lnRef idx="2">
-        <a:scrgbClr r="0" g="0" b="0"/>
-      </a:lnRef>
-      <a:fillRef idx="1">
-        <a:scrgbClr r="0" g="0" b="0"/>
-      </a:fillRef>
-      <a:effectRef idx="0">
-        <a:scrgbClr r="0" g="0" b="0"/>
-      </a:effectRef>
-      <a:fontRef idx="minor"/>
-    </dgm:style>
-  </dgm:styleLbl>
-  <dgm:styleLbl name="asst0">
-    <dgm:scene3d>
-      <a:camera prst="orthographicFront"/>
-      <a:lightRig rig="threePt" dir="t"/>
-    </dgm:scene3d>
-    <dgm:sp3d/>
-    <dgm:txPr/>
-    <dgm:style>
-      <a:lnRef idx="2">
-        <a:scrgbClr r="0" g="0" b="0"/>
-      </a:lnRef>
-      <a:fillRef idx="1">
-        <a:scrgbClr r="0" g="0" b="0"/>
-      </a:fillRef>
-      <a:effectRef idx="0">
-        <a:scrgbClr r="0" g="0" b="0"/>
-      </a:effectRef>
-      <a:fontRef idx="minor">
-        <a:schemeClr val="lt1"/>
-      </a:fontRef>
-    </dgm:style>
-  </dgm:styleLbl>
-  <dgm:styleLbl name="asst1">
-    <dgm:scene3d>
-      <a:camera prst="orthographicFront"/>
-      <a:lightRig rig="threePt" dir="t"/>
-    </dgm:scene3d>
-    <dgm:sp3d/>
-    <dgm:txPr/>
-    <dgm:style>
-      <a:lnRef idx="2">
-        <a:scrgbClr r="0" g="0" b="0"/>
-      </a:lnRef>
-      <a:fillRef idx="1">
-        <a:scrgbClr r="0" g="0" b="0"/>
-      </a:fillRef>
-      <a:effectRef idx="0">
-        <a:scrgbClr r="0" g="0" b="0"/>
-      </a:effectRef>
-      <a:fontRef idx="minor">
-        <a:schemeClr val="lt1"/>
-      </a:fontRef>
-    </dgm:style>
-  </dgm:styleLbl>
-  <dgm:styleLbl name="asst2">
-    <dgm:scene3d>
-      <a:camera prst="orthographicFront"/>
-      <a:lightRig rig="threePt" dir="t"/>
-    </dgm:scene3d>
-    <dgm:sp3d/>
-    <dgm:txPr/>
-    <dgm:style>
-      <a:lnRef idx="2">
-        <a:scrgbClr r="0" g="0" b="0"/>
-      </a:lnRef>
-      <a:fillRef idx="1">
-        <a:scrgbClr r="0" g="0" b="0"/>
-      </a:fillRef>
-      <a:effectRef idx="0">
-        <a:scrgbClr r="0" g="0" b="0"/>
-      </a:effectRef>
-      <a:fontRef idx="minor">
-        <a:schemeClr val="lt1"/>
-      </a:fontRef>
-    </dgm:style>
-  </dgm:styleLbl>
-  <dgm:styleLbl name="asst3">
-    <dgm:scene3d>
-      <a:camera prst="orthographicFront"/>
-      <a:lightRig rig="threePt" dir="t"/>
-    </dgm:scene3d>
-    <dgm:sp3d/>
-    <dgm:txPr/>
-    <dgm:style>
-      <a:lnRef idx="2">
-        <a:scrgbClr r="0" g="0" b="0"/>
-      </a:lnRef>
-      <a:fillRef idx="1">
-        <a:scrgbClr r="0" g="0" b="0"/>
-      </a:fillRef>
-      <a:effectRef idx="0">
-        <a:scrgbClr r="0" g="0" b="0"/>
-      </a:effectRef>
-      <a:fontRef idx="minor">
-        <a:schemeClr val="lt1"/>
-      </a:fontRef>
-    </dgm:style>
-  </dgm:styleLbl>
-  <dgm:styleLbl name="asst4">
-    <dgm:scene3d>
-      <a:camera prst="orthographicFront"/>
-      <a:lightRig rig="threePt" dir="t"/>
-    </dgm:scene3d>
-    <dgm:sp3d/>
-    <dgm:txPr/>
-    <dgm:style>
-      <a:lnRef idx="2">
-        <a:scrgbClr r="0" g="0" b="0"/>
-      </a:lnRef>
-      <a:fillRef idx="1">
-        <a:scrgbClr r="0" g="0" b="0"/>
-      </a:fillRef>
-      <a:effectRef idx="0">
-        <a:scrgbClr r="0" g="0" b="0"/>
-      </a:effectRef>
-      <a:fontRef idx="minor">
-        <a:schemeClr val="lt1"/>
-      </a:fontRef>
-    </dgm:style>
-  </dgm:styleLbl>
-  <dgm:styleLbl name="parChTrans2D1">
-    <dgm:scene3d>
-      <a:camera prst="orthographicFront"/>
-      <a:lightRig rig="threePt" dir="t"/>
-    </dgm:scene3d>
-    <dgm:sp3d/>
-    <dgm:txPr/>
-    <dgm:style>
-      <a:lnRef idx="2">
-        <a:scrgbClr r="0" g="0" b="0"/>
-      </a:lnRef>
-      <a:fillRef idx="1">
-        <a:scrgbClr r="0" g="0" b="0"/>
-      </a:fillRef>
-      <a:effectRef idx="0">
-        <a:scrgbClr r="0" g="0" b="0"/>
-      </a:effectRef>
-      <a:fontRef idx="minor">
-        <a:schemeClr val="lt1"/>
-      </a:fontRef>
-    </dgm:style>
-  </dgm:styleLbl>
-  <dgm:styleLbl name="parChTrans2D2">
-    <dgm:scene3d>
-      <a:camera prst="orthographicFront"/>
-      <a:lightRig rig="threePt" dir="t"/>
-    </dgm:scene3d>
-    <dgm:sp3d/>
-    <dgm:txPr/>
-    <dgm:style>
-      <a:lnRef idx="2">
-        <a:scrgbClr r="0" g="0" b="0"/>
-      </a:lnRef>
-      <a:fillRef idx="1">
-        <a:scrgbClr r="0" g="0" b="0"/>
-      </a:fillRef>
-      <a:effectRef idx="0">
-        <a:scrgbClr r="0" g="0" b="0"/>
-      </a:effectRef>
-      <a:fontRef idx="minor">
-        <a:schemeClr val="lt1"/>
-      </a:fontRef>
-    </dgm:style>
-  </dgm:styleLbl>
-  <dgm:styleLbl name="parChTrans2D3">
-    <dgm:scene3d>
-      <a:camera prst="orthographicFront"/>
-      <a:lightRig rig="threePt" dir="t"/>
-    </dgm:scene3d>
-    <dgm:sp3d/>
-    <dgm:txPr/>
-    <dgm:style>
-      <a:lnRef idx="2">
-        <a:scrgbClr r="0" g="0" b="0"/>
-      </a:lnRef>
-      <a:fillRef idx="1">
-        <a:scrgbClr r="0" g="0" b="0"/>
-      </a:fillRef>
-      <a:effectRef idx="0">
-        <a:scrgbClr r="0" g="0" b="0"/>
-      </a:effectRef>
-      <a:fontRef idx="minor">
-        <a:schemeClr val="lt1"/>
-      </a:fontRef>
-    </dgm:style>
-  </dgm:styleLbl>
-  <dgm:styleLbl name="parChTrans2D4">
-    <dgm:scene3d>
-      <a:camera prst="orthographicFront"/>
-      <a:lightRig rig="threePt" dir="t"/>
-    </dgm:scene3d>
-    <dgm:sp3d/>
-    <dgm:txPr/>
-    <dgm:style>
-      <a:lnRef idx="2">
-        <a:scrgbClr r="0" g="0" b="0"/>
-      </a:lnRef>
-      <a:fillRef idx="1">
-        <a:scrgbClr r="0" g="0" b="0"/>
-      </a:fillRef>
-      <a:effectRef idx="0">
-        <a:scrgbClr r="0" g="0" b="0"/>
-      </a:effectRef>
-      <a:fontRef idx="minor">
-        <a:schemeClr val="lt1"/>
-      </a:fontRef>
-    </dgm:style>
-  </dgm:styleLbl>
-  <dgm:styleLbl name="parChTrans1D1">
-    <dgm:scene3d>
-      <a:camera prst="orthographicFront"/>
-      <a:lightRig rig="threePt" dir="t"/>
-    </dgm:scene3d>
-    <dgm:sp3d/>
-    <dgm:txPr/>
-    <dgm:style>
-      <a:lnRef idx="2">
-        <a:scrgbClr r="0" g="0" b="0"/>
-      </a:lnRef>
-      <a:fillRef idx="0">
-        <a:scrgbClr r="0" g="0" b="0"/>
-      </a:fillRef>
-      <a:effectRef idx="0">
-        <a:scrgbClr r="0" g="0" b="0"/>
-      </a:effectRef>
-      <a:fontRef idx="minor"/>
-    </dgm:style>
-  </dgm:styleLbl>
-  <dgm:styleLbl name="parChTrans1D2">
-    <dgm:scene3d>
-      <a:camera prst="orthographicFront"/>
-      <a:lightRig rig="threePt" dir="t"/>
-    </dgm:scene3d>
-    <dgm:sp3d/>
-    <dgm:txPr/>
-    <dgm:style>
-      <a:lnRef idx="2">
-        <a:scrgbClr r="0" g="0" b="0"/>
-      </a:lnRef>
-      <a:fillRef idx="0">
-        <a:scrgbClr r="0" g="0" b="0"/>
-      </a:fillRef>
-      <a:effectRef idx="0">
-        <a:scrgbClr r="0" g="0" b="0"/>
-      </a:effectRef>
-      <a:fontRef idx="minor"/>
-    </dgm:style>
-  </dgm:styleLbl>
-  <dgm:styleLbl name="parChTrans1D3">
-    <dgm:scene3d>
-      <a:camera prst="orthographicFront"/>
-      <a:lightRig rig="threePt" dir="t"/>
-    </dgm:scene3d>
-    <dgm:sp3d/>
-    <dgm:txPr/>
-    <dgm:style>
-      <a:lnRef idx="2">
-        <a:scrgbClr r="0" g="0" b="0"/>
-      </a:lnRef>
-      <a:fillRef idx="0">
-        <a:scrgbClr r="0" g="0" b="0"/>
-      </a:fillRef>
-      <a:effectRef idx="0">
-        <a:scrgbClr r="0" g="0" b="0"/>
-      </a:effectRef>
-      <a:fontRef idx="minor"/>
-    </dgm:style>
-  </dgm:styleLbl>
-  <dgm:styleLbl name="parChTrans1D4">
-    <dgm:scene3d>
-      <a:camera prst="orthographicFront"/>
-      <a:lightRig rig="threePt" dir="t"/>
-    </dgm:scene3d>
-    <dgm:sp3d/>
-    <dgm:txPr/>
-    <dgm:style>
-      <a:lnRef idx="2">
-        <a:scrgbClr r="0" g="0" b="0"/>
-      </a:lnRef>
-      <a:fillRef idx="0">
-        <a:scrgbClr r="0" g="0" b="0"/>
-      </a:fillRef>
-      <a:effectRef idx="0">
-        <a:scrgbClr r="0" g="0" b="0"/>
-      </a:effectRef>
-      <a:fontRef idx="minor"/>
-    </dgm:style>
-  </dgm:styleLbl>
-  <dgm:styleLbl name="fgAcc1">
-    <dgm:scene3d>
-      <a:camera prst="orthographicFront"/>
-      <a:lightRig rig="threePt" dir="t"/>
-    </dgm:scene3d>
-    <dgm:sp3d/>
-    <dgm:txPr/>
-    <dgm:style>
-      <a:lnRef idx="2">
-        <a:scrgbClr r="0" g="0" b="0"/>
-      </a:lnRef>
-      <a:fillRef idx="1">
-        <a:scrgbClr r="0" g="0" b="0"/>
-      </a:fillRef>
-      <a:effectRef idx="0">
-        <a:scrgbClr r="0" g="0" b="0"/>
-      </a:effectRef>
-      <a:fontRef idx="minor"/>
-    </dgm:style>
-  </dgm:styleLbl>
-  <dgm:styleLbl name="conFgAcc1">
-    <dgm:scene3d>
-      <a:camera prst="orthographicFront"/>
-      <a:lightRig rig="threePt" dir="t"/>
-    </dgm:scene3d>
-    <dgm:sp3d/>
-    <dgm:txPr/>
-    <dgm:style>
-      <a:lnRef idx="2">
-        <a:scrgbClr r="0" g="0" b="0"/>
-      </a:lnRef>
-      <a:fillRef idx="1">
-        <a:scrgbClr r="0" g="0" b="0"/>
-      </a:fillRef>
-      <a:effectRef idx="0">
-        <a:scrgbClr r="0" g="0" b="0"/>
-      </a:effectRef>
-      <a:fontRef idx="minor"/>
-    </dgm:style>
-  </dgm:styleLbl>
-  <dgm:styleLbl name="alignAcc1">
-    <dgm:scene3d>
-      <a:camera prst="orthographicFront"/>
-      <a:lightRig rig="threePt" dir="t"/>
-    </dgm:scene3d>
-    <dgm:sp3d/>
-    <dgm:txPr/>
-    <dgm:style>
-      <a:lnRef idx="2">
-        <a:scrgbClr r="0" g="0" b="0"/>
-      </a:lnRef>
-      <a:fillRef idx="1">
-        <a:scrgbClr r="0" g="0" b="0"/>
-      </a:fillRef>
-      <a:effectRef idx="0">
-        <a:scrgbClr r="0" g="0" b="0"/>
-      </a:effectRef>
-      <a:fontRef idx="minor"/>
-    </dgm:style>
-  </dgm:styleLbl>
-  <dgm:styleLbl name="trAlignAcc1">
-    <dgm:scene3d>
-      <a:camera prst="orthographicFront"/>
-      <a:lightRig rig="threePt" dir="t"/>
-    </dgm:scene3d>
-    <dgm:sp3d/>
-    <dgm:txPr/>
-    <dgm:style>
-      <a:lnRef idx="1">
-        <a:scrgbClr r="0" g="0" b="0"/>
-      </a:lnRef>
-      <a:fillRef idx="1">
-        <a:scrgbClr r="0" g="0" b="0"/>
-      </a:fillRef>
-      <a:effectRef idx="0">
-        <a:scrgbClr r="0" g="0" b="0"/>
-      </a:effectRef>
-      <a:fontRef idx="minor"/>
-    </dgm:style>
-  </dgm:styleLbl>
-  <dgm:styleLbl name="bgAcc1">
-    <dgm:scene3d>
-      <a:camera prst="orthographicFront"/>
-      <a:lightRig rig="threePt" dir="t"/>
-    </dgm:scene3d>
-    <dgm:sp3d/>
-    <dgm:txPr/>
-    <dgm:style>
-      <a:lnRef idx="2">
-        <a:scrgbClr r="0" g="0" b="0"/>
-      </a:lnRef>
-      <a:fillRef idx="1">
-        <a:scrgbClr r="0" g="0" b="0"/>
-      </a:fillRef>
-      <a:effectRef idx="0">
-        <a:scrgbClr r="0" g="0" b="0"/>
-      </a:effectRef>
-      <a:fontRef idx="minor"/>
-    </dgm:style>
-  </dgm:styleLbl>
-  <dgm:styleLbl name="solidFgAcc1">
-    <dgm:scene3d>
-      <a:camera prst="orthographicFront"/>
-      <a:lightRig rig="threePt" dir="t"/>
-    </dgm:scene3d>
-    <dgm:sp3d/>
-    <dgm:txPr/>
-    <dgm:style>
-      <a:lnRef idx="2">
-        <a:scrgbClr r="0" g="0" b="0"/>
-      </a:lnRef>
-      <a:fillRef idx="1">
-        <a:scrgbClr r="0" g="0" b="0"/>
-      </a:fillRef>
-      <a:effectRef idx="0">
-        <a:scrgbClr r="0" g="0" b="0"/>
-      </a:effectRef>
-      <a:fontRef idx="minor"/>
-    </dgm:style>
-  </dgm:styleLbl>
-  <dgm:styleLbl name="solidAlignAcc1">
-    <dgm:scene3d>
-      <a:camera prst="orthographicFront"/>
-      <a:lightRig rig="threePt" dir="t"/>
-    </dgm:scene3d>
-    <dgm:sp3d/>
-    <dgm:txPr/>
-    <dgm:style>
-      <a:lnRef idx="2">
-        <a:scrgbClr r="0" g="0" b="0"/>
-      </a:lnRef>
-      <a:fillRef idx="1">
-        <a:scrgbClr r="0" g="0" b="0"/>
-      </a:fillRef>
-      <a:effectRef idx="0">
-        <a:scrgbClr r="0" g="0" b="0"/>
-      </a:effectRef>
-      <a:fontRef idx="minor"/>
-    </dgm:style>
-  </dgm:styleLbl>
-  <dgm:styleLbl name="solidBgAcc1">
-    <dgm:scene3d>
-      <a:camera prst="orthographicFront"/>
-      <a:lightRig rig="threePt" dir="t"/>
-    </dgm:scene3d>
-    <dgm:sp3d/>
-    <dgm:txPr/>
-    <dgm:style>
-      <a:lnRef idx="2">
-        <a:scrgbClr r="0" g="0" b="0"/>
-      </a:lnRef>
-      <a:fillRef idx="1">
-        <a:scrgbClr r="0" g="0" b="0"/>
-      </a:fillRef>
-      <a:effectRef idx="0">
-        <a:scrgbClr r="0" g="0" b="0"/>
-      </a:effectRef>
-      <a:fontRef idx="minor"/>
-    </dgm:style>
-  </dgm:styleLbl>
-  <dgm:styleLbl name="fgAccFollowNode1">
-    <dgm:scene3d>
-      <a:camera prst="orthographicFront"/>
-      <a:lightRig rig="threePt" dir="t"/>
-    </dgm:scene3d>
-    <dgm:sp3d/>
-    <dgm:txPr/>
-    <dgm:style>
-      <a:lnRef idx="2">
-        <a:scrgbClr r="0" g="0" b="0"/>
-      </a:lnRef>
-      <a:fillRef idx="1">
-        <a:scrgbClr r="0" g="0" b="0"/>
-      </a:fillRef>
-      <a:effectRef idx="0">
-        <a:scrgbClr r="0" g="0" b="0"/>
-      </a:effectRef>
-      <a:fontRef idx="minor"/>
-    </dgm:style>
-  </dgm:styleLbl>
-  <dgm:styleLbl name="alignAccFollowNode1">
-    <dgm:scene3d>
-      <a:camera prst="orthographicFront"/>
-      <a:lightRig rig="threePt" dir="t"/>
-    </dgm:scene3d>
-    <dgm:sp3d/>
-    <dgm:txPr/>
-    <dgm:style>
-      <a:lnRef idx="2">
-        <a:scrgbClr r="0" g="0" b="0"/>
-      </a:lnRef>
-      <a:fillRef idx="1">
-        <a:scrgbClr r="0" g="0" b="0"/>
-      </a:fillRef>
-      <a:effectRef idx="0">
-        <a:scrgbClr r="0" g="0" b="0"/>
-      </a:effectRef>
-      <a:fontRef idx="minor"/>
-    </dgm:style>
-  </dgm:styleLbl>
-  <dgm:styleLbl name="bgAccFollowNode1">
-    <dgm:scene3d>
-      <a:camera prst="orthographicFront"/>
-      <a:lightRig rig="threePt" dir="t"/>
-    </dgm:scene3d>
-    <dgm:sp3d/>
-    <dgm:txPr/>
-    <dgm:style>
-      <a:lnRef idx="2">
-        <a:scrgbClr r="0" g="0" b="0"/>
-      </a:lnRef>
-      <a:fillRef idx="1">
-        <a:scrgbClr r="0" g="0" b="0"/>
-      </a:fillRef>
-      <a:effectRef idx="0">
-        <a:scrgbClr r="0" g="0" b="0"/>
-      </a:effectRef>
-      <a:fontRef idx="minor"/>
-    </dgm:style>
-  </dgm:styleLbl>
-  <dgm:styleLbl name="fgAcc0">
-    <dgm:scene3d>
-      <a:camera prst="orthographicFront"/>
-      <a:lightRig rig="threePt" dir="t"/>
-    </dgm:scene3d>
-    <dgm:sp3d/>
-    <dgm:txPr/>
-    <dgm:style>
-      <a:lnRef idx="2">
-        <a:scrgbClr r="0" g="0" b="0"/>
-      </a:lnRef>
-      <a:fillRef idx="1">
-        <a:scrgbClr r="0" g="0" b="0"/>
-      </a:fillRef>
-      <a:effectRef idx="0">
-        <a:scrgbClr r="0" g="0" b="0"/>
-      </a:effectRef>
-      <a:fontRef idx="minor"/>
-    </dgm:style>
-  </dgm:styleLbl>
-  <dgm:styleLbl name="fgAcc2">
-    <dgm:scene3d>
-      <a:camera prst="orthographicFront"/>
-      <a:lightRig rig="threePt" dir="t"/>
-    </dgm:scene3d>
-    <dgm:sp3d/>
-    <dgm:txPr/>
-    <dgm:style>
-      <a:lnRef idx="2">
-        <a:scrgbClr r="0" g="0" b="0"/>
-      </a:lnRef>
-      <a:fillRef idx="1">
-        <a:scrgbClr r="0" g="0" b="0"/>
-      </a:fillRef>
-      <a:effectRef idx="0">
-        <a:scrgbClr r="0" g="0" b="0"/>
-      </a:effectRef>
-      <a:fontRef idx="minor"/>
-    </dgm:style>
-  </dgm:styleLbl>
-  <dgm:styleLbl name="fgAcc3">
-    <dgm:scene3d>
-      <a:camera prst="orthographicFront"/>
-      <a:lightRig rig="threePt" dir="t"/>
-    </dgm:scene3d>
-    <dgm:sp3d/>
-    <dgm:txPr/>
-    <dgm:style>
-      <a:lnRef idx="2">
-        <a:scrgbClr r="0" g="0" b="0"/>
-      </a:lnRef>
-      <a:fillRef idx="1">
-        <a:scrgbClr r="0" g="0" b="0"/>
-      </a:fillRef>
-      <a:effectRef idx="0">
-        <a:scrgbClr r="0" g="0" b="0"/>
-      </a:effectRef>
-      <a:fontRef idx="minor"/>
-    </dgm:style>
-  </dgm:styleLbl>
-  <dgm:styleLbl name="fgAcc4">
-    <dgm:scene3d>
-      <a:camera prst="orthographicFront"/>
-      <a:lightRig rig="threePt" dir="t"/>
-    </dgm:scene3d>
-    <dgm:sp3d/>
-    <dgm:txPr/>
-    <dgm:style>
-      <a:lnRef idx="2">
-        <a:scrgbClr r="0" g="0" b="0"/>
-      </a:lnRef>
-      <a:fillRef idx="1">
-        <a:scrgbClr r="0" g="0" b="0"/>
-      </a:fillRef>
-      <a:effectRef idx="0">
-        <a:scrgbClr r="0" g="0" b="0"/>
-      </a:effectRef>
-      <a:fontRef idx="minor"/>
-    </dgm:style>
-  </dgm:styleLbl>
-  <dgm:styleLbl name="bgShp">
-    <dgm:scene3d>
-      <a:camera prst="orthographicFront"/>
-      <a:lightRig rig="threePt" dir="t"/>
-    </dgm:scene3d>
-    <dgm:sp3d/>
-    <dgm:txPr/>
-    <dgm:style>
-      <a:lnRef idx="0">
-        <a:scrgbClr r="0" g="0" b="0"/>
-      </a:lnRef>
-      <a:fillRef idx="1">
-        <a:scrgbClr r="0" g="0" b="0"/>
-      </a:fillRef>
-      <a:effectRef idx="0">
-        <a:scrgbClr r="0" g="0" b="0"/>
-      </a:effectRef>
-      <a:fontRef idx="minor"/>
-    </dgm:style>
-  </dgm:styleLbl>
-  <dgm:styleLbl name="dkBgShp">
-    <dgm:scene3d>
-      <a:camera prst="orthographicFront"/>
-      <a:lightRig rig="threePt" dir="t"/>
-    </dgm:scene3d>
-    <dgm:sp3d/>
-    <dgm:txPr/>
-    <dgm:style>
-      <a:lnRef idx="0">
-        <a:scrgbClr r="0" g="0" b="0"/>
-      </a:lnRef>
-      <a:fillRef idx="1">
-        <a:scrgbClr r="0" g="0" b="0"/>
-      </a:fillRef>
-      <a:effectRef idx="0">
-        <a:scrgbClr r="0" g="0" b="0"/>
-      </a:effectRef>
-      <a:fontRef idx="minor"/>
-    </dgm:style>
-  </dgm:styleLbl>
-  <dgm:styleLbl name="trBgShp">
-    <dgm:scene3d>
-      <a:camera prst="orthographicFront"/>
-      <a:lightRig rig="threePt" dir="t"/>
-    </dgm:scene3d>
-    <dgm:sp3d/>
-    <dgm:txPr/>
-    <dgm:style>
-      <a:lnRef idx="0">
-        <a:scrgbClr r="0" g="0" b="0"/>
-      </a:lnRef>
-      <a:fillRef idx="1">
-        <a:scrgbClr r="0" g="0" b="0"/>
-      </a:fillRef>
-      <a:effectRef idx="0">
-        <a:scrgbClr r="0" g="0" b="0"/>
-      </a:effectRef>
-      <a:fontRef idx="minor"/>
-    </dgm:style>
-  </dgm:styleLbl>
-  <dgm:styleLbl name="fgShp">
-    <dgm:scene3d>
-      <a:camera prst="orthographicFront"/>
-      <a:lightRig rig="threePt" dir="t"/>
-    </dgm:scene3d>
-    <dgm:sp3d/>
-    <dgm:txPr/>
-    <dgm:style>
-      <a:lnRef idx="2">
-        <a:scrgbClr r="0" g="0" b="0"/>
-      </a:lnRef>
-      <a:fillRef idx="1">
-        <a:scrgbClr r="0" g="0" b="0"/>
-      </a:fillRef>
-      <a:effectRef idx="0">
-        <a:scrgbClr r="0" g="0" b="0"/>
-      </a:effectRef>
-      <a:fontRef idx="minor"/>
-    </dgm:style>
-  </dgm:styleLbl>
-  <dgm:styleLbl name="revTx">
-    <dgm:scene3d>
-      <a:camera prst="orthographicFront"/>
-      <a:lightRig rig="threePt" dir="t"/>
-    </dgm:scene3d>
-    <dgm:sp3d/>
-    <dgm:txPr/>
-    <dgm:style>
-      <a:lnRef idx="0">
-        <a:scrgbClr r="0" g="0" b="0"/>
-      </a:lnRef>
-      <a:fillRef idx="0">
-        <a:scrgbClr r="0" g="0" b="0"/>
-      </a:fillRef>
-      <a:effectRef idx="0">
-        <a:scrgbClr r="0" g="0" b="0"/>
-      </a:effectRef>
-      <a:fontRef idx="minor"/>
-    </dgm:style>
-  </dgm:styleLbl>
-</dgm:styleDef>
-</file>
-
 <file path=ppt/handoutMasters/handoutMaster1.xml><?xml version="1.0" encoding="utf-8"?>
 <p:handoutMaster xmlns:a="http://schemas.openxmlformats.org/drawingml/2006/main" xmlns:r="http://schemas.openxmlformats.org/officeDocument/2006/relationships" xmlns:p="http://schemas.openxmlformats.org/presentationml/2006/main">
   <p:cSld>
@@ -3698,7 +224,7 @@
             <a:fld id="{0158C5BC-9A70-462C-B28D-9600239EAC64}" type="datetimeFigureOut">
               <a:rPr lang="en-US" smtClean="0"/>
               <a:pPr/>
-              <a:t>8/19/2025</a:t>
+              <a:t>8/20/2025</a:t>
             </a:fld>
             <a:endParaRPr lang="en-US"/>
           </a:p>
@@ -3865,7 +391,7 @@
             <a:fld id="{E6CC2317-6751-4CD4-9995-8782DD78E936}" type="datetimeFigureOut">
               <a:rPr lang="en-US" smtClean="0"/>
               <a:pPr/>
-              <a:t>8/19/2025</a:t>
+              <a:t>8/20/2025</a:t>
             </a:fld>
             <a:endParaRPr lang="en-US" dirty="0"/>
           </a:p>
@@ -11052,8 +7578,8 @@
         </p:nvSpPr>
         <p:spPr>
           <a:xfrm>
-            <a:off x="349488" y="5713377"/>
-            <a:ext cx="13137237" cy="8783450"/>
+            <a:off x="271793" y="5806618"/>
+            <a:ext cx="13137237" cy="7026539"/>
           </a:xfrm>
         </p:spPr>
         <p:txBody>
@@ -11069,11 +7595,11 @@
             </a:pPr>
             <a:r>
               <a:rPr lang="en-US" sz="3600" b="1" dirty="0"/>
-              <a:t>Different fish stocks have been shown to respond differently to extreme weather and climate change </a:t>
+              <a:t>Different fish stocks have been shown to respond differently to climate change </a:t>
             </a:r>
             <a:r>
               <a:rPr lang="en-US" sz="3600" dirty="0"/>
-              <a:t>creating challenges for stock assessors and the fishing industry. </a:t>
+              <a:t>creating challenges for stock assessors and the fishing industry and a need to forecast effects of climate change on fish stocks. </a:t>
             </a:r>
           </a:p>
           <a:p>
@@ -11087,7 +7613,7 @@
             </a:r>
             <a:r>
               <a:rPr lang="en-US" sz="3600" dirty="0"/>
-              <a:t>is a modeling framework that allows us to simulate different management plans and weigh the tradeoffs of different strategies.</a:t>
+              <a:t>is a modeling framework that simulates the outcomes of management decisions.</a:t>
             </a:r>
           </a:p>
           <a:p>
@@ -11097,42 +7623,12 @@
             </a:pPr>
             <a:r>
               <a:rPr lang="en-US" sz="3600" dirty="0"/>
-              <a:t>In this study we plan to </a:t>
+              <a:t>This study’s objectives are to test </a:t>
             </a:r>
             <a:r>
               <a:rPr lang="en-US" sz="3600" b="1" dirty="0"/>
-              <a:t>incorporate environmental covariates into an MSE</a:t>
-            </a:r>
-            <a:r>
-              <a:rPr lang="en-US" sz="3600" dirty="0"/>
-              <a:t> to better understand how best to use environmental projections. Specifically, we look at Georges Bank Yellowtail Flounder stock as a case study.</a:t>
-            </a:r>
-            <a:endParaRPr lang="en-US" sz="3000" dirty="0"/>
-          </a:p>
-          <a:p>
-            <a:pPr marL="457200" indent="-457200">
-              <a:buFont typeface="Arial" panose="020B0604020202020204" pitchFamily="34" charset="0"/>
-              <a:buChar char="•"/>
-            </a:pPr>
-            <a:endParaRPr lang="en-US" sz="3000" dirty="0"/>
-          </a:p>
-          <a:p>
-            <a:pPr marL="457200" indent="-457200">
-              <a:buFont typeface="Arial" panose="020B0604020202020204" pitchFamily="34" charset="0"/>
-              <a:buChar char="•"/>
-            </a:pPr>
-            <a:endParaRPr lang="en-US" sz="3000" dirty="0"/>
-          </a:p>
-          <a:p>
-            <a:endParaRPr lang="en-US" sz="3000" dirty="0"/>
-          </a:p>
-          <a:p>
-            <a:endParaRPr lang="en-US" sz="3000" dirty="0"/>
-          </a:p>
-          <a:p>
-            <a:endParaRPr lang="en-US" sz="3400" dirty="0"/>
-          </a:p>
-          <a:p>
+              <a:t>how different projections of environmental covariates in stock assessment affect long-term fishery outcomes.</a:t>
+            </a:r>
             <a:endParaRPr lang="en-US" dirty="0"/>
           </a:p>
         </p:txBody>
@@ -11156,7 +7652,7 @@
         <p:spPr>
           <a:xfrm>
             <a:off x="13845567" y="6523468"/>
-            <a:ext cx="13064653" cy="9685728"/>
+            <a:ext cx="13064653" cy="6915739"/>
           </a:xfrm>
         </p:spPr>
         <p:txBody>
@@ -11168,6 +7664,10 @@
               <a:buChar char="•"/>
             </a:pPr>
             <a:r>
+              <a:rPr lang="en-US" sz="3600" dirty="0"/>
+              <a:t>Using </a:t>
+            </a:r>
+            <a:r>
               <a:rPr lang="en-US" sz="3600" b="1" dirty="0"/>
               <a:t>Georges Bank Yellowtail Flounder </a:t>
             </a:r>
@@ -11189,7 +7689,7 @@
             </a:r>
             <a:r>
               <a:rPr lang="en-US" sz="3600" dirty="0"/>
-              <a:t>) is a currently overfished stock on the US Atlantic Coast. Bottom Temperature has been shown to have a controlling effect on recruitment </a:t>
+              <a:t>) as a case study, this stock is currently overfished and their recruitment is known to be sensitive to bottom temperature </a:t>
             </a:r>
             <a:r>
               <a:rPr lang="en-US" sz="3600" dirty="0">
@@ -11199,7 +7699,37 @@
               </a:rPr>
               <a:t>(CITE).</a:t>
             </a:r>
-            <a:endParaRPr lang="en-US" sz="3600" dirty="0"/>
+          </a:p>
+          <a:p>
+            <a:pPr marL="457200" indent="-457200">
+              <a:buFont typeface="Arial" panose="020B0604020202020204" pitchFamily="34" charset="0"/>
+              <a:buChar char="•"/>
+            </a:pPr>
+            <a:r>
+              <a:rPr lang="en-US" sz="3600" dirty="0"/>
+              <a:t>We will use </a:t>
+            </a:r>
+            <a:r>
+              <a:rPr lang="en-US" sz="3600" b="1" dirty="0"/>
+              <a:t>temperature forecasts from the Modular Ocean Model (MOM6) </a:t>
+            </a:r>
+            <a:r>
+              <a:rPr lang="en-US" sz="3600" dirty="0">
+                <a:highlight>
+                  <a:srgbClr val="FFFF00"/>
+                </a:highlight>
+              </a:rPr>
+              <a:t>(CITE) </a:t>
+            </a:r>
+            <a:r>
+              <a:rPr lang="en-US" sz="3600" dirty="0"/>
+              <a:t>to use as our OM environmental covariate.</a:t>
+            </a:r>
+            <a:endParaRPr lang="en-US" sz="3600" dirty="0">
+              <a:highlight>
+                <a:srgbClr val="00FF00"/>
+              </a:highlight>
+            </a:endParaRPr>
           </a:p>
           <a:p>
             <a:pPr marL="457200" indent="-457200">
@@ -11242,44 +7772,6 @@
               <a:rPr lang="en-US" sz="3600" dirty="0"/>
               <a:t>We will update these packages such that new temperature data is incorporated with each MSE period, simulating periodic stock assessments.</a:t>
             </a:r>
-          </a:p>
-          <a:p>
-            <a:pPr marL="457200" indent="-457200">
-              <a:buFont typeface="Arial" panose="020B0604020202020204" pitchFamily="34" charset="0"/>
-              <a:buChar char="•"/>
-            </a:pPr>
-            <a:r>
-              <a:rPr lang="en-US" sz="3600" dirty="0"/>
-              <a:t>We will use </a:t>
-            </a:r>
-            <a:r>
-              <a:rPr lang="en-US" sz="3600" b="1" dirty="0"/>
-              <a:t>temperature forecasts from the Modular Ocean Model (MOM6) </a:t>
-            </a:r>
-            <a:r>
-              <a:rPr lang="en-US" sz="3600" dirty="0">
-                <a:highlight>
-                  <a:srgbClr val="FFFF00"/>
-                </a:highlight>
-              </a:rPr>
-              <a:t>(CITE) </a:t>
-            </a:r>
-            <a:r>
-              <a:rPr lang="en-US" sz="3600" dirty="0"/>
-              <a:t>to compare the effectiveness of different temperature projections in assessing stock health and creating management strategies</a:t>
-            </a:r>
-          </a:p>
-          <a:p>
-            <a:endParaRPr lang="en-US" sz="3000" dirty="0"/>
-          </a:p>
-          <a:p>
-            <a:endParaRPr lang="en-US" sz="3000" dirty="0"/>
-          </a:p>
-          <a:p>
-            <a:pPr marL="457200" indent="-457200">
-              <a:buFont typeface="Arial" panose="020B0604020202020204" pitchFamily="34" charset="0"/>
-              <a:buChar char="•"/>
-            </a:pPr>
             <a:endParaRPr lang="en-US" sz="3000" dirty="0"/>
           </a:p>
         </p:txBody>
@@ -11302,7 +7794,7 @@
         </p:nvSpPr>
         <p:spPr>
           <a:xfrm>
-            <a:off x="28405252" y="5435709"/>
+            <a:off x="28405252" y="5276219"/>
             <a:ext cx="13478796" cy="830997"/>
           </a:xfrm>
         </p:spPr>
@@ -11981,7 +8473,7 @@
             </a:pPr>
             <a:r>
               <a:rPr lang="en-US" sz="3600" b="1" dirty="0"/>
-              <a:t>OM – </a:t>
+              <a:t>OM Projection – </a:t>
             </a:r>
             <a:r>
               <a:rPr lang="en-US" sz="3600" dirty="0"/>
@@ -12080,36 +8572,6 @@
           </a:p>
         </p:txBody>
       </p:sp>
-      <p:pic>
-        <p:nvPicPr>
-          <p:cNvPr id="17" name="Picture 16">
-            <a:extLst>
-              <a:ext uri="{FF2B5EF4-FFF2-40B4-BE49-F238E27FC236}">
-                <a16:creationId xmlns:a16="http://schemas.microsoft.com/office/drawing/2014/main" id="{36B1B24A-1A9C-C84E-DCF2-8D865C755662}"/>
-              </a:ext>
-            </a:extLst>
-          </p:cNvPr>
-          <p:cNvPicPr>
-            <a:picLocks noChangeAspect="1"/>
-          </p:cNvPicPr>
-          <p:nvPr/>
-        </p:nvPicPr>
-        <p:blipFill>
-          <a:blip r:embed="rId3"/>
-          <a:stretch>
-            <a:fillRect/>
-          </a:stretch>
-        </p:blipFill>
-        <p:spPr>
-          <a:xfrm>
-            <a:off x="27496915" y="6627539"/>
-            <a:ext cx="15899117" cy="9796425"/>
-          </a:xfrm>
-          <a:prstGeom prst="rect">
-            <a:avLst/>
-          </a:prstGeom>
-        </p:spPr>
-      </p:pic>
       <p:sp>
         <p:nvSpPr>
           <p:cNvPr id="19" name="Text Placeholder 18">
@@ -12140,49 +8602,6 @@
           </a:p>
         </p:txBody>
       </p:sp>
-      <p:cxnSp>
-        <p:nvCxnSpPr>
-          <p:cNvPr id="21" name="Straight Connector 20">
-            <a:extLst>
-              <a:ext uri="{FF2B5EF4-FFF2-40B4-BE49-F238E27FC236}">
-                <a16:creationId xmlns:a16="http://schemas.microsoft.com/office/drawing/2014/main" id="{FD1501CA-F393-EA63-4E64-9C77AAA4EEFA}"/>
-              </a:ext>
-            </a:extLst>
-          </p:cNvPr>
-          <p:cNvCxnSpPr>
-            <a:cxnSpLocks/>
-          </p:cNvCxnSpPr>
-          <p:nvPr/>
-        </p:nvCxnSpPr>
-        <p:spPr>
-          <a:xfrm>
-            <a:off x="35820138" y="6398939"/>
-            <a:ext cx="0" cy="9418320"/>
-          </a:xfrm>
-          <a:prstGeom prst="line">
-            <a:avLst/>
-          </a:prstGeom>
-          <a:ln w="57150">
-            <a:solidFill>
-              <a:srgbClr val="C00000"/>
-            </a:solidFill>
-          </a:ln>
-        </p:spPr>
-        <p:style>
-          <a:lnRef idx="1">
-            <a:schemeClr val="accent1"/>
-          </a:lnRef>
-          <a:fillRef idx="0">
-            <a:schemeClr val="accent1"/>
-          </a:fillRef>
-          <a:effectRef idx="0">
-            <a:schemeClr val="accent1"/>
-          </a:effectRef>
-          <a:fontRef idx="minor">
-            <a:schemeClr val="tx1"/>
-          </a:fontRef>
-        </p:style>
-      </p:cxnSp>
       <p:sp>
         <p:nvSpPr>
           <p:cNvPr id="24" name="TextBox 23">
@@ -12197,7 +8616,7 @@
         </p:nvSpPr>
         <p:spPr>
           <a:xfrm>
-            <a:off x="30951604" y="6102170"/>
+            <a:off x="30951604" y="5846986"/>
             <a:ext cx="2642903" cy="646331"/>
           </a:xfrm>
           <a:prstGeom prst="rect">
@@ -12234,7 +8653,7 @@
         </p:nvSpPr>
         <p:spPr>
           <a:xfrm>
-            <a:off x="36239593" y="6102170"/>
+            <a:off x="36239593" y="5846986"/>
             <a:ext cx="3766287" cy="646331"/>
           </a:xfrm>
           <a:prstGeom prst="rect">
@@ -12740,7 +9159,7 @@
           <p:nvPr/>
         </p:nvPicPr>
         <p:blipFill>
-          <a:blip r:embed="rId4">
+          <a:blip r:embed="rId3">
             <a:extLst>
               <a:ext uri="{28A0092B-C50C-407E-A947-70E740481C1C}">
                 <a14:useLocalDpi xmlns:a14="http://schemas.microsoft.com/office/drawing/2010/main" val="0"/>
@@ -12772,332 +9191,162 @@
           </a:extLst>
         </p:spPr>
       </p:pic>
-      <p:grpSp>
-        <p:nvGrpSpPr>
-          <p:cNvPr id="60" name="Group 59">
+      <p:sp>
+        <p:nvSpPr>
+          <p:cNvPr id="46" name="Rectangle 45">
             <a:extLst>
               <a:ext uri="{FF2B5EF4-FFF2-40B4-BE49-F238E27FC236}">
-                <a16:creationId xmlns:a16="http://schemas.microsoft.com/office/drawing/2014/main" id="{E4599962-B7D4-589C-2E18-B019EB305CA9}"/>
+                <a16:creationId xmlns:a16="http://schemas.microsoft.com/office/drawing/2014/main" id="{392B3269-EC23-5019-DE38-805D731F82F9}"/>
               </a:ext>
             </a:extLst>
           </p:cNvPr>
-          <p:cNvGrpSpPr/>
+          <p:cNvSpPr/>
           <p:nvPr/>
-        </p:nvGrpSpPr>
-        <p:grpSpPr>
+        </p:nvSpPr>
+        <p:spPr>
           <a:xfrm>
-            <a:off x="0" y="23277023"/>
-            <a:ext cx="28200429" cy="8744585"/>
-            <a:chOff x="450521" y="24773147"/>
-            <a:chExt cx="22014124" cy="6095995"/>
+            <a:off x="539026" y="24111600"/>
+            <a:ext cx="27550350" cy="5967060"/>
           </a:xfrm>
-        </p:grpSpPr>
-        <p:sp>
-          <p:nvSpPr>
-            <p:cNvPr id="46" name="Rectangle 45">
-              <a:extLst>
-                <a:ext uri="{FF2B5EF4-FFF2-40B4-BE49-F238E27FC236}">
-                  <a16:creationId xmlns:a16="http://schemas.microsoft.com/office/drawing/2014/main" id="{392B3269-EC23-5019-DE38-805D731F82F9}"/>
-                </a:ext>
-              </a:extLst>
-            </p:cNvPr>
-            <p:cNvSpPr/>
-            <p:nvPr/>
-          </p:nvSpPr>
-          <p:spPr>
-            <a:xfrm>
-              <a:off x="772965" y="25332708"/>
-              <a:ext cx="21369237" cy="4159736"/>
-            </a:xfrm>
-            <a:prstGeom prst="rect">
-              <a:avLst/>
-            </a:prstGeom>
+          <a:prstGeom prst="rect">
+            <a:avLst/>
+          </a:prstGeom>
+          <a:solidFill>
+            <a:schemeClr val="accent1">
+              <a:lumMod val="40000"/>
+              <a:lumOff val="60000"/>
+            </a:schemeClr>
+          </a:solidFill>
+          <a:ln>
             <a:solidFill>
-              <a:schemeClr val="accent1">
-                <a:lumMod val="40000"/>
-                <a:lumOff val="60000"/>
+              <a:schemeClr val="accent3">
+                <a:lumMod val="50000"/>
               </a:schemeClr>
             </a:solidFill>
-            <a:ln>
-              <a:solidFill>
-                <a:schemeClr val="accent3">
-                  <a:lumMod val="50000"/>
-                </a:schemeClr>
-              </a:solidFill>
-            </a:ln>
-          </p:spPr>
-          <p:style>
-            <a:lnRef idx="2">
-              <a:schemeClr val="accent1">
-                <a:shade val="15000"/>
-              </a:schemeClr>
-            </a:lnRef>
-            <a:fillRef idx="1">
-              <a:schemeClr val="accent1"/>
-            </a:fillRef>
-            <a:effectRef idx="0">
-              <a:schemeClr val="accent1"/>
-            </a:effectRef>
-            <a:fontRef idx="minor">
-              <a:schemeClr val="lt1"/>
-            </a:fontRef>
-          </p:style>
-          <p:txBody>
-            <a:bodyPr rtlCol="0" anchor="ctr"/>
-            <a:lstStyle/>
-            <a:p>
-              <a:pPr algn="ctr"/>
-              <a:endParaRPr lang="en-US" dirty="0"/>
-            </a:p>
-          </p:txBody>
-        </p:sp>
-        <p:graphicFrame>
-          <p:nvGraphicFramePr>
-            <p:cNvPr id="47" name="Diagram 46">
-              <a:extLst>
-                <a:ext uri="{FF2B5EF4-FFF2-40B4-BE49-F238E27FC236}">
-                  <a16:creationId xmlns:a16="http://schemas.microsoft.com/office/drawing/2014/main" id="{D5ABEF07-BF31-FE4D-99C0-E3AEA298085E}"/>
-                </a:ext>
-              </a:extLst>
-            </p:cNvPr>
-            <p:cNvGraphicFramePr/>
-            <p:nvPr>
-              <p:extLst>
-                <p:ext uri="{D42A27DB-BD31-4B8C-83A1-F6EECF244321}">
-                  <p14:modId xmlns:p14="http://schemas.microsoft.com/office/powerpoint/2010/main" val="3586469831"/>
-                </p:ext>
-              </p:extLst>
-            </p:nvPr>
-          </p:nvGraphicFramePr>
-          <p:xfrm>
-            <a:off x="450521" y="24773147"/>
-            <a:ext cx="21691680" cy="5595795"/>
-          </p:xfrm>
-          <a:graphic>
-            <a:graphicData uri="http://schemas.openxmlformats.org/drawingml/2006/diagram">
-              <dgm:relIds xmlns:dgm="http://schemas.openxmlformats.org/drawingml/2006/diagram" xmlns:r="http://schemas.openxmlformats.org/officeDocument/2006/relationships" r:dm="rId5" r:lo="rId6" r:qs="rId7" r:cs="rId8"/>
-            </a:graphicData>
-          </a:graphic>
-        </p:graphicFrame>
-        <p:cxnSp>
-          <p:nvCxnSpPr>
-            <p:cNvPr id="48" name="Straight Connector 47">
-              <a:extLst>
-                <a:ext uri="{FF2B5EF4-FFF2-40B4-BE49-F238E27FC236}">
-                  <a16:creationId xmlns:a16="http://schemas.microsoft.com/office/drawing/2014/main" id="{10CF632B-19E6-42F9-0D1E-934976D6D29D}"/>
-                </a:ext>
-              </a:extLst>
-            </p:cNvPr>
-            <p:cNvCxnSpPr>
-              <a:cxnSpLocks/>
-            </p:cNvCxnSpPr>
-            <p:nvPr/>
-          </p:nvCxnSpPr>
-          <p:spPr>
-            <a:xfrm>
-              <a:off x="5844127" y="26070427"/>
-              <a:ext cx="0" cy="3237103"/>
-            </a:xfrm>
-            <a:prstGeom prst="line">
-              <a:avLst/>
-            </a:prstGeom>
-            <a:ln>
-              <a:solidFill>
-                <a:srgbClr val="C00000"/>
-              </a:solidFill>
-            </a:ln>
-          </p:spPr>
-          <p:style>
-            <a:lnRef idx="2">
-              <a:schemeClr val="accent1"/>
-            </a:lnRef>
-            <a:fillRef idx="0">
-              <a:schemeClr val="accent1"/>
-            </a:fillRef>
-            <a:effectRef idx="1">
-              <a:schemeClr val="accent1"/>
-            </a:effectRef>
-            <a:fontRef idx="minor">
-              <a:schemeClr val="tx1"/>
-            </a:fontRef>
-          </p:style>
-        </p:cxnSp>
-        <p:sp>
-          <p:nvSpPr>
-            <p:cNvPr id="50" name="Arrow: Right 49">
-              <a:extLst>
-                <a:ext uri="{FF2B5EF4-FFF2-40B4-BE49-F238E27FC236}">
-                  <a16:creationId xmlns:a16="http://schemas.microsoft.com/office/drawing/2014/main" id="{9662C418-2A8C-2928-CD19-04EAE69A5CA1}"/>
-                </a:ext>
-              </a:extLst>
-            </p:cNvPr>
-            <p:cNvSpPr/>
-            <p:nvPr/>
-          </p:nvSpPr>
-          <p:spPr>
-            <a:xfrm>
-              <a:off x="772965" y="29307525"/>
-              <a:ext cx="21691680" cy="1561617"/>
-            </a:xfrm>
-            <a:prstGeom prst="rightArrow">
-              <a:avLst/>
-            </a:prstGeom>
+          </a:ln>
+        </p:spPr>
+        <p:style>
+          <a:lnRef idx="2">
+            <a:schemeClr val="accent1">
+              <a:shade val="15000"/>
+            </a:schemeClr>
+          </a:lnRef>
+          <a:fillRef idx="1">
+            <a:schemeClr val="accent1"/>
+          </a:fillRef>
+          <a:effectRef idx="0">
+            <a:schemeClr val="accent1"/>
+          </a:effectRef>
+          <a:fontRef idx="minor">
+            <a:schemeClr val="lt1"/>
+          </a:fontRef>
+        </p:style>
+        <p:txBody>
+          <a:bodyPr rtlCol="0" anchor="ctr"/>
+          <a:lstStyle/>
+          <a:p>
+            <a:pPr algn="ctr"/>
+            <a:endParaRPr lang="en-US" dirty="0"/>
+          </a:p>
+        </p:txBody>
+      </p:sp>
+      <p:sp>
+        <p:nvSpPr>
+          <p:cNvPr id="50" name="Arrow: Right 49">
+            <a:extLst>
+              <a:ext uri="{FF2B5EF4-FFF2-40B4-BE49-F238E27FC236}">
+                <a16:creationId xmlns:a16="http://schemas.microsoft.com/office/drawing/2014/main" id="{9662C418-2A8C-2928-CD19-04EAE69A5CA1}"/>
+              </a:ext>
+            </a:extLst>
+          </p:cNvPr>
+          <p:cNvSpPr/>
+          <p:nvPr/>
+        </p:nvSpPr>
+        <p:spPr>
+          <a:xfrm>
+            <a:off x="413056" y="29781499"/>
+            <a:ext cx="27787373" cy="2240109"/>
+          </a:xfrm>
+          <a:prstGeom prst="rightArrow">
+            <a:avLst/>
+          </a:prstGeom>
+          <a:solidFill>
+            <a:schemeClr val="bg2">
+              <a:lumMod val="25000"/>
+            </a:schemeClr>
+          </a:solidFill>
+        </p:spPr>
+        <p:style>
+          <a:lnRef idx="2">
+            <a:schemeClr val="accent3">
+              <a:shade val="15000"/>
+            </a:schemeClr>
+          </a:lnRef>
+          <a:fillRef idx="1">
+            <a:schemeClr val="accent3"/>
+          </a:fillRef>
+          <a:effectRef idx="0">
+            <a:schemeClr val="accent3"/>
+          </a:effectRef>
+          <a:fontRef idx="minor">
+            <a:schemeClr val="lt1"/>
+          </a:fontRef>
+        </p:style>
+        <p:txBody>
+          <a:bodyPr rtlCol="0" anchor="ctr"/>
+          <a:lstStyle/>
+          <a:p>
+            <a:pPr algn="ctr"/>
+            <a:r>
+              <a:rPr lang="en-US" sz="5100" dirty="0"/>
+              <a:t>OM Projection</a:t>
+            </a:r>
+          </a:p>
+        </p:txBody>
+      </p:sp>
+      <p:cxnSp>
+        <p:nvCxnSpPr>
+          <p:cNvPr id="54" name="Straight Connector 53">
+            <a:extLst>
+              <a:ext uri="{FF2B5EF4-FFF2-40B4-BE49-F238E27FC236}">
+                <a16:creationId xmlns:a16="http://schemas.microsoft.com/office/drawing/2014/main" id="{9D5FD4EF-5BAF-E0FD-CD5E-4E1866A9F53B}"/>
+              </a:ext>
+            </a:extLst>
+          </p:cNvPr>
+          <p:cNvCxnSpPr>
+            <a:cxnSpLocks/>
+          </p:cNvCxnSpPr>
+          <p:nvPr/>
+        </p:nvCxnSpPr>
+        <p:spPr>
+          <a:xfrm>
+            <a:off x="14321880" y="24982067"/>
+            <a:ext cx="0" cy="5052594"/>
+          </a:xfrm>
+          <a:prstGeom prst="line">
+            <a:avLst/>
+          </a:prstGeom>
+          <a:ln>
             <a:solidFill>
-              <a:schemeClr val="bg2">
-                <a:lumMod val="25000"/>
-              </a:schemeClr>
+              <a:srgbClr val="C00000"/>
             </a:solidFill>
-          </p:spPr>
-          <p:style>
-            <a:lnRef idx="2">
-              <a:schemeClr val="accent3">
-                <a:shade val="15000"/>
-              </a:schemeClr>
-            </a:lnRef>
-            <a:fillRef idx="1">
-              <a:schemeClr val="accent3"/>
-            </a:fillRef>
-            <a:effectRef idx="0">
-              <a:schemeClr val="accent3"/>
-            </a:effectRef>
-            <a:fontRef idx="minor">
-              <a:schemeClr val="lt1"/>
-            </a:fontRef>
-          </p:style>
-          <p:txBody>
-            <a:bodyPr rtlCol="0" anchor="ctr"/>
-            <a:lstStyle/>
-            <a:p>
-              <a:pPr algn="ctr"/>
-              <a:r>
-                <a:rPr lang="en-US" sz="5100" dirty="0"/>
-                <a:t>OM Projection</a:t>
-              </a:r>
-            </a:p>
-          </p:txBody>
-        </p:sp>
-        <p:cxnSp>
-          <p:nvCxnSpPr>
-            <p:cNvPr id="53" name="Straight Connector 52">
-              <a:extLst>
-                <a:ext uri="{FF2B5EF4-FFF2-40B4-BE49-F238E27FC236}">
-                  <a16:creationId xmlns:a16="http://schemas.microsoft.com/office/drawing/2014/main" id="{DEAF0888-FE5B-7AA1-E544-29A110F87912}"/>
-                </a:ext>
-              </a:extLst>
-            </p:cNvPr>
-            <p:cNvCxnSpPr>
-              <a:cxnSpLocks/>
-            </p:cNvCxnSpPr>
-            <p:nvPr/>
-          </p:nvCxnSpPr>
-          <p:spPr>
-            <a:xfrm>
-              <a:off x="16836534" y="26070425"/>
-              <a:ext cx="0" cy="3237103"/>
-            </a:xfrm>
-            <a:prstGeom prst="line">
-              <a:avLst/>
-            </a:prstGeom>
-            <a:ln>
-              <a:solidFill>
-                <a:srgbClr val="C00000"/>
-              </a:solidFill>
-            </a:ln>
-          </p:spPr>
-          <p:style>
-            <a:lnRef idx="2">
-              <a:schemeClr val="accent1"/>
-            </a:lnRef>
-            <a:fillRef idx="0">
-              <a:schemeClr val="accent1"/>
-            </a:fillRef>
-            <a:effectRef idx="1">
-              <a:schemeClr val="accent1"/>
-            </a:effectRef>
-            <a:fontRef idx="minor">
-              <a:schemeClr val="tx1"/>
-            </a:fontRef>
-          </p:style>
-        </p:cxnSp>
-        <p:cxnSp>
-          <p:nvCxnSpPr>
-            <p:cNvPr id="54" name="Straight Connector 53">
-              <a:extLst>
-                <a:ext uri="{FF2B5EF4-FFF2-40B4-BE49-F238E27FC236}">
-                  <a16:creationId xmlns:a16="http://schemas.microsoft.com/office/drawing/2014/main" id="{9D5FD4EF-5BAF-E0FD-CD5E-4E1866A9F53B}"/>
-                </a:ext>
-              </a:extLst>
-            </p:cNvPr>
-            <p:cNvCxnSpPr>
-              <a:cxnSpLocks/>
-            </p:cNvCxnSpPr>
-            <p:nvPr/>
-          </p:nvCxnSpPr>
-          <p:spPr>
-            <a:xfrm>
-              <a:off x="11325673" y="26070425"/>
-              <a:ext cx="0" cy="3237103"/>
-            </a:xfrm>
-            <a:prstGeom prst="line">
-              <a:avLst/>
-            </a:prstGeom>
-            <a:ln>
-              <a:solidFill>
-                <a:srgbClr val="C00000"/>
-              </a:solidFill>
-            </a:ln>
-          </p:spPr>
-          <p:style>
-            <a:lnRef idx="2">
-              <a:schemeClr val="accent1"/>
-            </a:lnRef>
-            <a:fillRef idx="0">
-              <a:schemeClr val="accent1"/>
-            </a:fillRef>
-            <a:effectRef idx="1">
-              <a:schemeClr val="accent1"/>
-            </a:effectRef>
-            <a:fontRef idx="minor">
-              <a:schemeClr val="tx1"/>
-            </a:fontRef>
-          </p:style>
-        </p:cxnSp>
-        <p:sp>
-          <p:nvSpPr>
-            <p:cNvPr id="55" name="TextBox 54">
-              <a:extLst>
-                <a:ext uri="{FF2B5EF4-FFF2-40B4-BE49-F238E27FC236}">
-                  <a16:creationId xmlns:a16="http://schemas.microsoft.com/office/drawing/2014/main" id="{AD676246-EDAF-47D6-9095-1A5A69FF49AE}"/>
-                </a:ext>
-              </a:extLst>
-            </p:cNvPr>
-            <p:cNvSpPr txBox="1"/>
-            <p:nvPr/>
-          </p:nvSpPr>
-          <p:spPr>
-            <a:xfrm>
-              <a:off x="9792479" y="25462198"/>
-              <a:ext cx="4583306" cy="877163"/>
-            </a:xfrm>
-            <a:prstGeom prst="rect">
-              <a:avLst/>
-            </a:prstGeom>
-            <a:noFill/>
-          </p:spPr>
-          <p:txBody>
-            <a:bodyPr wrap="none" rtlCol="0">
-              <a:spAutoFit/>
-            </a:bodyPr>
-            <a:lstStyle/>
-            <a:p>
-              <a:r>
-                <a:rPr lang="en-US" sz="5100" dirty="0"/>
-                <a:t>EM Projections</a:t>
-              </a:r>
-            </a:p>
-          </p:txBody>
-        </p:sp>
-      </p:grpSp>
+          </a:ln>
+        </p:spPr>
+        <p:style>
+          <a:lnRef idx="2">
+            <a:schemeClr val="accent1"/>
+          </a:lnRef>
+          <a:fillRef idx="0">
+            <a:schemeClr val="accent1"/>
+          </a:fillRef>
+          <a:effectRef idx="1">
+            <a:schemeClr val="accent1"/>
+          </a:effectRef>
+          <a:fontRef idx="minor">
+            <a:schemeClr val="tx1"/>
+          </a:fontRef>
+        </p:style>
+      </p:cxnSp>
       <p:sp>
         <p:nvSpPr>
           <p:cNvPr id="2" name="Text Placeholder 248">
@@ -13114,8 +9363,8 @@
         </p:nvSpPr>
         <p:spPr>
           <a:xfrm>
-            <a:off x="335632" y="14885095"/>
-            <a:ext cx="13137237" cy="12049452"/>
+            <a:off x="100439" y="14560296"/>
+            <a:ext cx="13137237" cy="8688532"/>
           </a:xfrm>
           <a:prstGeom prst="rect">
             <a:avLst/>
@@ -13291,7 +9540,7 @@
             </a:r>
             <a:r>
               <a:rPr lang="en-US" sz="3600" dirty="0"/>
-              <a:t> – “Stock Assessment” Model. Estimates stock health based off information given by the OM. Alters catch based on perceived stock health, harvest control rules, and MSE decisions.</a:t>
+              <a:t> – “Stock Assessment” Model. Simulates stock assessments to estimate stock status and incorporates management changes from the management model.</a:t>
             </a:r>
             <a:endParaRPr lang="en-US" sz="3600" b="1" dirty="0"/>
           </a:p>
@@ -13302,180 +9551,16 @@
             </a:pPr>
             <a:r>
               <a:rPr lang="en-US" sz="3600" b="1" dirty="0"/>
-              <a:t>MSE</a:t>
+              <a:t>Evaluation</a:t>
             </a:r>
             <a:r>
               <a:rPr lang="en-US" sz="3600" dirty="0"/>
-              <a:t> – “Management” Model. Compiles stock health metrics such as Catch, SSB, F, etc. and makes management recommendations. In this project, we are changing the MSE process such that at each MSE step, the most recent temperature data is incorporated into the assessment.</a:t>
-            </a:r>
-            <a:endParaRPr lang="en-US" sz="3000" dirty="0"/>
-          </a:p>
-          <a:p>
-            <a:pPr marL="457200" indent="-457200">
-              <a:buFont typeface="Arial" panose="020B0604020202020204" pitchFamily="34" charset="0"/>
-              <a:buChar char="•"/>
-            </a:pPr>
-            <a:endParaRPr lang="en-US" sz="3000" dirty="0"/>
-          </a:p>
-          <a:p>
-            <a:pPr marL="457200" indent="-457200">
-              <a:buFont typeface="Arial" panose="020B0604020202020204" pitchFamily="34" charset="0"/>
-              <a:buChar char="•"/>
-            </a:pPr>
-            <a:endParaRPr lang="en-US" sz="3000" dirty="0"/>
-          </a:p>
-          <a:p>
-            <a:endParaRPr lang="en-US" sz="3000" dirty="0"/>
-          </a:p>
-          <a:p>
-            <a:endParaRPr lang="en-US" sz="3000" dirty="0"/>
-          </a:p>
-          <a:p>
-            <a:endParaRPr lang="en-US" sz="3400" dirty="0"/>
-          </a:p>
-          <a:p>
+              <a:t> – “Management” Model. Compiles stock health metrics such as Catch, SSB, F, etc. and implements simulated management decisions. In this project, we are changing the MSE process such that at each MSE step, the most recent temperature data is incorporated into the assessment.</a:t>
+            </a:r>
             <a:endParaRPr lang="en-US" dirty="0"/>
           </a:p>
         </p:txBody>
       </p:sp>
-      <p:cxnSp>
-        <p:nvCxnSpPr>
-          <p:cNvPr id="5" name="Connector: Curved 4">
-            <a:extLst>
-              <a:ext uri="{FF2B5EF4-FFF2-40B4-BE49-F238E27FC236}">
-                <a16:creationId xmlns:a16="http://schemas.microsoft.com/office/drawing/2014/main" id="{2BC0269A-845D-D684-D943-19A0D1B42045}"/>
-              </a:ext>
-            </a:extLst>
-          </p:cNvPr>
-          <p:cNvCxnSpPr>
-            <a:cxnSpLocks/>
-          </p:cNvCxnSpPr>
-          <p:nvPr/>
-        </p:nvCxnSpPr>
-        <p:spPr>
-          <a:xfrm flipV="1">
-            <a:off x="503875" y="28002600"/>
-            <a:ext cx="6812993" cy="3240304"/>
-          </a:xfrm>
-          <a:prstGeom prst="curvedConnector3">
-            <a:avLst>
-              <a:gd name="adj1" fmla="val 66472"/>
-            </a:avLst>
-          </a:prstGeom>
-          <a:ln w="127000">
-            <a:solidFill>
-              <a:srgbClr val="C00000"/>
-            </a:solidFill>
-            <a:tailEnd type="triangle"/>
-          </a:ln>
-        </p:spPr>
-        <p:style>
-          <a:lnRef idx="1">
-            <a:schemeClr val="accent1"/>
-          </a:lnRef>
-          <a:fillRef idx="0">
-            <a:schemeClr val="accent1"/>
-          </a:fillRef>
-          <a:effectRef idx="0">
-            <a:schemeClr val="accent1"/>
-          </a:effectRef>
-          <a:fontRef idx="minor">
-            <a:schemeClr val="tx1"/>
-          </a:fontRef>
-        </p:style>
-      </p:cxnSp>
-      <p:cxnSp>
-        <p:nvCxnSpPr>
-          <p:cNvPr id="18" name="Connector: Curved 17">
-            <a:extLst>
-              <a:ext uri="{FF2B5EF4-FFF2-40B4-BE49-F238E27FC236}">
-                <a16:creationId xmlns:a16="http://schemas.microsoft.com/office/drawing/2014/main" id="{C720E019-387E-D95A-BFF2-DA84C90404BC}"/>
-              </a:ext>
-            </a:extLst>
-          </p:cNvPr>
-          <p:cNvCxnSpPr>
-            <a:cxnSpLocks/>
-          </p:cNvCxnSpPr>
-          <p:nvPr/>
-        </p:nvCxnSpPr>
-        <p:spPr>
-          <a:xfrm flipV="1">
-            <a:off x="7552265" y="27985219"/>
-            <a:ext cx="6812993" cy="3240304"/>
-          </a:xfrm>
-          <a:prstGeom prst="curvedConnector3">
-            <a:avLst>
-              <a:gd name="adj1" fmla="val 66472"/>
-            </a:avLst>
-          </a:prstGeom>
-          <a:ln w="127000">
-            <a:solidFill>
-              <a:srgbClr val="C00000"/>
-            </a:solidFill>
-            <a:tailEnd type="triangle"/>
-          </a:ln>
-        </p:spPr>
-        <p:style>
-          <a:lnRef idx="1">
-            <a:schemeClr val="accent1"/>
-          </a:lnRef>
-          <a:fillRef idx="0">
-            <a:schemeClr val="accent1"/>
-          </a:fillRef>
-          <a:effectRef idx="0">
-            <a:schemeClr val="accent1"/>
-          </a:effectRef>
-          <a:fontRef idx="minor">
-            <a:schemeClr val="tx1"/>
-          </a:fontRef>
-        </p:style>
-      </p:cxnSp>
-      <p:cxnSp>
-        <p:nvCxnSpPr>
-          <p:cNvPr id="20" name="Connector: Curved 19">
-            <a:extLst>
-              <a:ext uri="{FF2B5EF4-FFF2-40B4-BE49-F238E27FC236}">
-                <a16:creationId xmlns:a16="http://schemas.microsoft.com/office/drawing/2014/main" id="{43FAD376-40C9-B642-273A-2E4BA14A28DD}"/>
-              </a:ext>
-            </a:extLst>
-          </p:cNvPr>
-          <p:cNvCxnSpPr>
-            <a:cxnSpLocks/>
-          </p:cNvCxnSpPr>
-          <p:nvPr/>
-        </p:nvCxnSpPr>
-        <p:spPr>
-          <a:xfrm flipV="1">
-            <a:off x="14488509" y="28068472"/>
-            <a:ext cx="6812993" cy="3240304"/>
-          </a:xfrm>
-          <a:prstGeom prst="curvedConnector3">
-            <a:avLst>
-              <a:gd name="adj1" fmla="val 66472"/>
-            </a:avLst>
-          </a:prstGeom>
-          <a:ln w="127000">
-            <a:solidFill>
-              <a:srgbClr val="C00000"/>
-            </a:solidFill>
-            <a:tailEnd type="triangle"/>
-          </a:ln>
-        </p:spPr>
-        <p:style>
-          <a:lnRef idx="1">
-            <a:schemeClr val="accent1"/>
-          </a:lnRef>
-          <a:fillRef idx="0">
-            <a:schemeClr val="accent1"/>
-          </a:fillRef>
-          <a:effectRef idx="0">
-            <a:schemeClr val="accent1"/>
-          </a:effectRef>
-          <a:fontRef idx="minor">
-            <a:schemeClr val="tx1"/>
-          </a:fontRef>
-        </p:style>
-      </p:cxnSp>
       <p:sp>
         <p:nvSpPr>
           <p:cNvPr id="4" name="Text Placeholder 13">
@@ -13658,6 +9743,779 @@
       </p:sp>
       <p:sp>
         <p:nvSpPr>
+          <p:cNvPr id="55" name="TextBox 54">
+            <a:extLst>
+              <a:ext uri="{FF2B5EF4-FFF2-40B4-BE49-F238E27FC236}">
+                <a16:creationId xmlns:a16="http://schemas.microsoft.com/office/drawing/2014/main" id="{AD676246-EDAF-47D6-9095-1A5A69FF49AE}"/>
+              </a:ext>
+            </a:extLst>
+          </p:cNvPr>
+          <p:cNvSpPr txBox="1"/>
+          <p:nvPr/>
+        </p:nvSpPr>
+        <p:spPr>
+          <a:xfrm>
+            <a:off x="10031499" y="24104904"/>
+            <a:ext cx="8619667" cy="877163"/>
+          </a:xfrm>
+          <a:prstGeom prst="rect">
+            <a:avLst/>
+          </a:prstGeom>
+          <a:noFill/>
+        </p:spPr>
+        <p:txBody>
+          <a:bodyPr wrap="none" rtlCol="0">
+            <a:spAutoFit/>
+          </a:bodyPr>
+          <a:lstStyle/>
+          <a:p>
+            <a:r>
+              <a:rPr lang="en-US" sz="5100" dirty="0"/>
+              <a:t>Estimation Model Projections</a:t>
+            </a:r>
+          </a:p>
+        </p:txBody>
+      </p:sp>
+      <p:cxnSp>
+        <p:nvCxnSpPr>
+          <p:cNvPr id="1025" name="Straight Connector 1024">
+            <a:extLst>
+              <a:ext uri="{FF2B5EF4-FFF2-40B4-BE49-F238E27FC236}">
+                <a16:creationId xmlns:a16="http://schemas.microsoft.com/office/drawing/2014/main" id="{FB37DE70-942A-E419-E63B-E2030EC76AB4}"/>
+              </a:ext>
+            </a:extLst>
+          </p:cNvPr>
+          <p:cNvCxnSpPr>
+            <a:cxnSpLocks/>
+          </p:cNvCxnSpPr>
+          <p:nvPr/>
+        </p:nvCxnSpPr>
+        <p:spPr>
+          <a:xfrm>
+            <a:off x="21172795" y="24113739"/>
+            <a:ext cx="0" cy="5913832"/>
+          </a:xfrm>
+          <a:prstGeom prst="line">
+            <a:avLst/>
+          </a:prstGeom>
+          <a:ln>
+            <a:solidFill>
+              <a:srgbClr val="C00000"/>
+            </a:solidFill>
+          </a:ln>
+        </p:spPr>
+        <p:style>
+          <a:lnRef idx="2">
+            <a:schemeClr val="accent1"/>
+          </a:lnRef>
+          <a:fillRef idx="0">
+            <a:schemeClr val="accent1"/>
+          </a:fillRef>
+          <a:effectRef idx="1">
+            <a:schemeClr val="accent1"/>
+          </a:effectRef>
+          <a:fontRef idx="minor">
+            <a:schemeClr val="tx1"/>
+          </a:fontRef>
+        </p:style>
+      </p:cxnSp>
+      <p:cxnSp>
+        <p:nvCxnSpPr>
+          <p:cNvPr id="1027" name="Straight Connector 1026">
+            <a:extLst>
+              <a:ext uri="{FF2B5EF4-FFF2-40B4-BE49-F238E27FC236}">
+                <a16:creationId xmlns:a16="http://schemas.microsoft.com/office/drawing/2014/main" id="{29077F67-F048-A562-D4EA-B68F365A7E27}"/>
+              </a:ext>
+            </a:extLst>
+          </p:cNvPr>
+          <p:cNvCxnSpPr>
+            <a:cxnSpLocks/>
+          </p:cNvCxnSpPr>
+          <p:nvPr/>
+        </p:nvCxnSpPr>
+        <p:spPr>
+          <a:xfrm>
+            <a:off x="7322106" y="24138547"/>
+            <a:ext cx="0" cy="5913832"/>
+          </a:xfrm>
+          <a:prstGeom prst="line">
+            <a:avLst/>
+          </a:prstGeom>
+          <a:ln>
+            <a:solidFill>
+              <a:srgbClr val="C00000"/>
+            </a:solidFill>
+          </a:ln>
+        </p:spPr>
+        <p:style>
+          <a:lnRef idx="2">
+            <a:schemeClr val="accent1"/>
+          </a:lnRef>
+          <a:fillRef idx="0">
+            <a:schemeClr val="accent1"/>
+          </a:fillRef>
+          <a:effectRef idx="1">
+            <a:schemeClr val="accent1"/>
+          </a:effectRef>
+          <a:fontRef idx="minor">
+            <a:schemeClr val="tx1"/>
+          </a:fontRef>
+        </p:style>
+      </p:cxnSp>
+      <p:sp>
+        <p:nvSpPr>
+          <p:cNvPr id="1028" name="Rectangle: Rounded Corners 1027">
+            <a:extLst>
+              <a:ext uri="{FF2B5EF4-FFF2-40B4-BE49-F238E27FC236}">
+                <a16:creationId xmlns:a16="http://schemas.microsoft.com/office/drawing/2014/main" id="{EE377307-0FEA-936D-DE09-63F84B4C8D0D}"/>
+              </a:ext>
+            </a:extLst>
+          </p:cNvPr>
+          <p:cNvSpPr/>
+          <p:nvPr/>
+        </p:nvSpPr>
+        <p:spPr>
+          <a:xfrm>
+            <a:off x="1139439" y="26917929"/>
+            <a:ext cx="5657915" cy="3112416"/>
+          </a:xfrm>
+          <a:prstGeom prst="roundRect">
+            <a:avLst/>
+          </a:prstGeom>
+          <a:solidFill>
+            <a:schemeClr val="accent5">
+              <a:lumMod val="90000"/>
+            </a:schemeClr>
+          </a:solidFill>
+          <a:ln>
+            <a:noFill/>
+          </a:ln>
+        </p:spPr>
+        <p:style>
+          <a:lnRef idx="2">
+            <a:schemeClr val="accent1">
+              <a:shade val="15000"/>
+            </a:schemeClr>
+          </a:lnRef>
+          <a:fillRef idx="1">
+            <a:schemeClr val="accent1"/>
+          </a:fillRef>
+          <a:effectRef idx="0">
+            <a:schemeClr val="accent1"/>
+          </a:effectRef>
+          <a:fontRef idx="minor">
+            <a:schemeClr val="lt1"/>
+          </a:fontRef>
+        </p:style>
+        <p:txBody>
+          <a:bodyPr rtlCol="0" anchor="t"/>
+          <a:lstStyle/>
+          <a:p>
+            <a:pPr marL="0" marR="0" lvl="0" indent="0" algn="ctr" defTabSz="914400" eaLnBrk="1" fontAlgn="auto" latinLnBrk="0" hangingPunct="1">
+              <a:lnSpc>
+                <a:spcPct val="100000"/>
+              </a:lnSpc>
+              <a:spcBef>
+                <a:spcPts val="0"/>
+              </a:spcBef>
+              <a:spcAft>
+                <a:spcPts val="0"/>
+              </a:spcAft>
+              <a:buClrTx/>
+              <a:buSzTx/>
+              <a:buFontTx/>
+              <a:buNone/>
+              <a:tabLst/>
+              <a:defRPr/>
+            </a:pPr>
+            <a:r>
+              <a:rPr kumimoji="0" lang="en-US" sz="6000" b="0" i="0" u="none" strike="noStrike" kern="0" cap="none" spc="0" normalizeH="0" baseline="0" noProof="0" dirty="0">
+                <a:ln>
+                  <a:noFill/>
+                </a:ln>
+                <a:solidFill>
+                  <a:schemeClr val="bg1"/>
+                </a:solidFill>
+                <a:effectLst/>
+                <a:uLnTx/>
+                <a:uFillTx/>
+              </a:rPr>
+              <a:t>Evaluation 0</a:t>
+            </a:r>
+          </a:p>
+          <a:p>
+            <a:pPr marL="0" marR="0" lvl="1" indent="0" defTabSz="914400" eaLnBrk="1" fontAlgn="auto" latinLnBrk="0" hangingPunct="1">
+              <a:lnSpc>
+                <a:spcPct val="100000"/>
+              </a:lnSpc>
+              <a:spcBef>
+                <a:spcPts val="0"/>
+              </a:spcBef>
+              <a:spcAft>
+                <a:spcPts val="0"/>
+              </a:spcAft>
+              <a:buClrTx/>
+              <a:buSzTx/>
+              <a:buFontTx/>
+              <a:buNone/>
+              <a:tabLst/>
+              <a:defRPr/>
+            </a:pPr>
+            <a:r>
+              <a:rPr kumimoji="0" lang="en-US" sz="3600" b="0" i="0" u="none" strike="noStrike" kern="0" cap="none" spc="0" normalizeH="0" baseline="0" noProof="0" dirty="0">
+                <a:ln>
+                  <a:noFill/>
+                </a:ln>
+                <a:solidFill>
+                  <a:schemeClr val="bg1"/>
+                </a:solidFill>
+                <a:effectLst/>
+                <a:uLnTx/>
+                <a:uFillTx/>
+              </a:rPr>
+              <a:t>Model fit to historical temperature data</a:t>
+            </a:r>
+          </a:p>
+        </p:txBody>
+      </p:sp>
+      <p:sp>
+        <p:nvSpPr>
+          <p:cNvPr id="1029" name="Arrow: Right 1028">
+            <a:extLst>
+              <a:ext uri="{FF2B5EF4-FFF2-40B4-BE49-F238E27FC236}">
+                <a16:creationId xmlns:a16="http://schemas.microsoft.com/office/drawing/2014/main" id="{756F73E7-13D5-F48F-E3FA-27E63C54E905}"/>
+              </a:ext>
+            </a:extLst>
+          </p:cNvPr>
+          <p:cNvSpPr/>
+          <p:nvPr/>
+        </p:nvSpPr>
+        <p:spPr>
+          <a:xfrm>
+            <a:off x="5136273" y="29070422"/>
+            <a:ext cx="9218247" cy="1212112"/>
+          </a:xfrm>
+          <a:prstGeom prst="rightArrow">
+            <a:avLst/>
+          </a:prstGeom>
+          <a:solidFill>
+            <a:schemeClr val="accent5">
+              <a:lumMod val="90000"/>
+            </a:schemeClr>
+          </a:solidFill>
+          <a:ln>
+            <a:noFill/>
+          </a:ln>
+        </p:spPr>
+        <p:style>
+          <a:lnRef idx="2">
+            <a:schemeClr val="accent1">
+              <a:shade val="15000"/>
+            </a:schemeClr>
+          </a:lnRef>
+          <a:fillRef idx="1">
+            <a:schemeClr val="accent1"/>
+          </a:fillRef>
+          <a:effectRef idx="0">
+            <a:schemeClr val="accent1"/>
+          </a:effectRef>
+          <a:fontRef idx="minor">
+            <a:schemeClr val="lt1"/>
+          </a:fontRef>
+        </p:style>
+        <p:txBody>
+          <a:bodyPr rtlCol="0" anchor="ctr"/>
+          <a:lstStyle/>
+          <a:p>
+            <a:pPr algn="ctr"/>
+            <a:r>
+              <a:rPr lang="en-US" sz="3600" dirty="0"/>
+              <a:t>EM projects catch advice 2022-2025</a:t>
+            </a:r>
+          </a:p>
+        </p:txBody>
+      </p:sp>
+      <p:grpSp>
+        <p:nvGrpSpPr>
+          <p:cNvPr id="1038" name="Group 1037">
+            <a:extLst>
+              <a:ext uri="{FF2B5EF4-FFF2-40B4-BE49-F238E27FC236}">
+                <a16:creationId xmlns:a16="http://schemas.microsoft.com/office/drawing/2014/main" id="{B8100D52-ABDF-41FA-F98F-B22299D97105}"/>
+              </a:ext>
+            </a:extLst>
+          </p:cNvPr>
+          <p:cNvGrpSpPr/>
+          <p:nvPr/>
+        </p:nvGrpSpPr>
+        <p:grpSpPr>
+          <a:xfrm>
+            <a:off x="8000168" y="26209526"/>
+            <a:ext cx="13215081" cy="3364605"/>
+            <a:chOff x="1011105" y="26966244"/>
+            <a:chExt cx="13215081" cy="3364605"/>
+          </a:xfrm>
+          <a:solidFill>
+            <a:schemeClr val="accent5">
+              <a:lumMod val="90000"/>
+            </a:schemeClr>
+          </a:solidFill>
+        </p:grpSpPr>
+        <p:sp>
+          <p:nvSpPr>
+            <p:cNvPr id="1039" name="Rectangle: Rounded Corners 1038">
+              <a:extLst>
+                <a:ext uri="{FF2B5EF4-FFF2-40B4-BE49-F238E27FC236}">
+                  <a16:creationId xmlns:a16="http://schemas.microsoft.com/office/drawing/2014/main" id="{C6CB5910-7EF2-74F1-42F9-DC2AFC5EABA8}"/>
+                </a:ext>
+              </a:extLst>
+            </p:cNvPr>
+            <p:cNvSpPr/>
+            <p:nvPr/>
+          </p:nvSpPr>
+          <p:spPr>
+            <a:xfrm>
+              <a:off x="1011105" y="26966244"/>
+              <a:ext cx="5657915" cy="3112416"/>
+            </a:xfrm>
+            <a:prstGeom prst="roundRect">
+              <a:avLst/>
+            </a:prstGeom>
+            <a:solidFill>
+              <a:schemeClr val="accent5">
+                <a:lumMod val="75000"/>
+              </a:schemeClr>
+            </a:solidFill>
+            <a:ln>
+              <a:noFill/>
+            </a:ln>
+          </p:spPr>
+          <p:style>
+            <a:lnRef idx="2">
+              <a:schemeClr val="accent1">
+                <a:shade val="15000"/>
+              </a:schemeClr>
+            </a:lnRef>
+            <a:fillRef idx="1">
+              <a:schemeClr val="accent1"/>
+            </a:fillRef>
+            <a:effectRef idx="0">
+              <a:schemeClr val="accent1"/>
+            </a:effectRef>
+            <a:fontRef idx="minor">
+              <a:schemeClr val="lt1"/>
+            </a:fontRef>
+          </p:style>
+          <p:txBody>
+            <a:bodyPr rtlCol="0" anchor="ctr"/>
+            <a:lstStyle/>
+            <a:p>
+              <a:pPr lvl="0" algn="ctr" defTabSz="914400">
+                <a:defRPr/>
+              </a:pPr>
+              <a:r>
+                <a:rPr lang="en-US" sz="6000" kern="0" dirty="0">
+                  <a:solidFill>
+                    <a:schemeClr val="bg1"/>
+                  </a:solidFill>
+                </a:rPr>
+                <a:t>Evaluation 1</a:t>
+              </a:r>
+            </a:p>
+            <a:p>
+              <a:pPr marL="0" lvl="1" defTabSz="914400">
+                <a:defRPr/>
+              </a:pPr>
+              <a:r>
+                <a:rPr lang="en-US" sz="3600" kern="0" dirty="0">
+                  <a:solidFill>
+                    <a:schemeClr val="bg1"/>
+                  </a:solidFill>
+                </a:rPr>
+                <a:t>2022-2025 temperature data incorporated from om</a:t>
+              </a:r>
+            </a:p>
+          </p:txBody>
+        </p:sp>
+        <p:sp>
+          <p:nvSpPr>
+            <p:cNvPr id="1040" name="Arrow: Right 1039">
+              <a:extLst>
+                <a:ext uri="{FF2B5EF4-FFF2-40B4-BE49-F238E27FC236}">
+                  <a16:creationId xmlns:a16="http://schemas.microsoft.com/office/drawing/2014/main" id="{2F61907A-1111-937B-8FF4-6B88F15BC019}"/>
+                </a:ext>
+              </a:extLst>
+            </p:cNvPr>
+            <p:cNvSpPr/>
+            <p:nvPr/>
+          </p:nvSpPr>
+          <p:spPr>
+            <a:xfrm>
+              <a:off x="5007939" y="29118737"/>
+              <a:ext cx="9218247" cy="1212112"/>
+            </a:xfrm>
+            <a:prstGeom prst="rightArrow">
+              <a:avLst/>
+            </a:prstGeom>
+            <a:solidFill>
+              <a:schemeClr val="accent5">
+                <a:lumMod val="75000"/>
+              </a:schemeClr>
+            </a:solidFill>
+            <a:ln>
+              <a:noFill/>
+            </a:ln>
+          </p:spPr>
+          <p:style>
+            <a:lnRef idx="2">
+              <a:schemeClr val="accent1">
+                <a:shade val="15000"/>
+              </a:schemeClr>
+            </a:lnRef>
+            <a:fillRef idx="1">
+              <a:schemeClr val="accent1"/>
+            </a:fillRef>
+            <a:effectRef idx="0">
+              <a:schemeClr val="accent1"/>
+            </a:effectRef>
+            <a:fontRef idx="minor">
+              <a:schemeClr val="lt1"/>
+            </a:fontRef>
+          </p:style>
+          <p:txBody>
+            <a:bodyPr rtlCol="0" anchor="ctr"/>
+            <a:lstStyle/>
+            <a:p>
+              <a:pPr marL="0" marR="0" lvl="0" indent="0" algn="ctr" defTabSz="4388166" rtl="0" eaLnBrk="1" fontAlgn="auto" latinLnBrk="0" hangingPunct="1">
+                <a:lnSpc>
+                  <a:spcPct val="100000"/>
+                </a:lnSpc>
+                <a:spcBef>
+                  <a:spcPts val="0"/>
+                </a:spcBef>
+                <a:spcAft>
+                  <a:spcPts val="0"/>
+                </a:spcAft>
+                <a:buClrTx/>
+                <a:buSzTx/>
+                <a:buFontTx/>
+                <a:buNone/>
+                <a:tabLst/>
+                <a:defRPr/>
+              </a:pPr>
+              <a:r>
+                <a:rPr kumimoji="0" lang="en-US" sz="3600" b="0" i="0" u="none" strike="noStrike" kern="1200" cap="none" spc="0" normalizeH="0" baseline="0" noProof="0" dirty="0">
+                  <a:ln>
+                    <a:noFill/>
+                  </a:ln>
+                  <a:solidFill>
+                    <a:srgbClr val="FFFFFF"/>
+                  </a:solidFill>
+                  <a:effectLst/>
+                  <a:uLnTx/>
+                  <a:uFillTx/>
+                  <a:latin typeface="Arial"/>
+                  <a:ea typeface="+mn-ea"/>
+                  <a:cs typeface="+mn-cs"/>
+                </a:rPr>
+                <a:t>EM projects catch advice 2022-2025</a:t>
+              </a:r>
+            </a:p>
+          </p:txBody>
+        </p:sp>
+      </p:grpSp>
+      <p:grpSp>
+        <p:nvGrpSpPr>
+          <p:cNvPr id="1041" name="Group 1040">
+            <a:extLst>
+              <a:ext uri="{FF2B5EF4-FFF2-40B4-BE49-F238E27FC236}">
+                <a16:creationId xmlns:a16="http://schemas.microsoft.com/office/drawing/2014/main" id="{DD88E3F4-811E-1112-70D5-7D2D652A3932}"/>
+              </a:ext>
+            </a:extLst>
+          </p:cNvPr>
+          <p:cNvGrpSpPr/>
+          <p:nvPr/>
+        </p:nvGrpSpPr>
+        <p:grpSpPr>
+          <a:xfrm>
+            <a:off x="14909446" y="25494199"/>
+            <a:ext cx="13215081" cy="3364605"/>
+            <a:chOff x="1011105" y="26924680"/>
+            <a:chExt cx="13215081" cy="3364605"/>
+          </a:xfrm>
+          <a:solidFill>
+            <a:schemeClr val="bg2">
+              <a:lumMod val="50000"/>
+            </a:schemeClr>
+          </a:solidFill>
+        </p:grpSpPr>
+        <p:sp>
+          <p:nvSpPr>
+            <p:cNvPr id="1042" name="Rectangle: Rounded Corners 1041">
+              <a:extLst>
+                <a:ext uri="{FF2B5EF4-FFF2-40B4-BE49-F238E27FC236}">
+                  <a16:creationId xmlns:a16="http://schemas.microsoft.com/office/drawing/2014/main" id="{7E44691A-E911-7D73-FAB3-0CD4EE18C4E8}"/>
+                </a:ext>
+              </a:extLst>
+            </p:cNvPr>
+            <p:cNvSpPr/>
+            <p:nvPr/>
+          </p:nvSpPr>
+          <p:spPr>
+            <a:xfrm>
+              <a:off x="1011105" y="26924680"/>
+              <a:ext cx="5657915" cy="3112416"/>
+            </a:xfrm>
+            <a:prstGeom prst="roundRect">
+              <a:avLst/>
+            </a:prstGeom>
+            <a:grpFill/>
+            <a:ln>
+              <a:noFill/>
+            </a:ln>
+          </p:spPr>
+          <p:style>
+            <a:lnRef idx="2">
+              <a:schemeClr val="accent1">
+                <a:shade val="15000"/>
+              </a:schemeClr>
+            </a:lnRef>
+            <a:fillRef idx="1">
+              <a:schemeClr val="accent1"/>
+            </a:fillRef>
+            <a:effectRef idx="0">
+              <a:schemeClr val="accent1"/>
+            </a:effectRef>
+            <a:fontRef idx="minor">
+              <a:schemeClr val="lt1"/>
+            </a:fontRef>
+          </p:style>
+          <p:txBody>
+            <a:bodyPr rtlCol="0" anchor="ctr"/>
+            <a:lstStyle/>
+            <a:p>
+              <a:pPr lvl="0" algn="ctr" defTabSz="914400">
+                <a:defRPr/>
+              </a:pPr>
+              <a:r>
+                <a:rPr lang="en-US" sz="6000" kern="0" dirty="0">
+                  <a:solidFill>
+                    <a:schemeClr val="bg1"/>
+                  </a:solidFill>
+                </a:rPr>
+                <a:t>Evaluation 2</a:t>
+              </a:r>
+            </a:p>
+            <a:p>
+              <a:pPr marL="0" lvl="1" defTabSz="914400">
+                <a:defRPr/>
+              </a:pPr>
+              <a:r>
+                <a:rPr lang="en-US" sz="3600" kern="0" dirty="0">
+                  <a:solidFill>
+                    <a:schemeClr val="bg1"/>
+                  </a:solidFill>
+                </a:rPr>
+                <a:t>2025-2028 temperature data incorporated from om</a:t>
+              </a:r>
+            </a:p>
+          </p:txBody>
+        </p:sp>
+        <p:sp>
+          <p:nvSpPr>
+            <p:cNvPr id="1043" name="Arrow: Right 1042">
+              <a:extLst>
+                <a:ext uri="{FF2B5EF4-FFF2-40B4-BE49-F238E27FC236}">
+                  <a16:creationId xmlns:a16="http://schemas.microsoft.com/office/drawing/2014/main" id="{ECF6C77F-C261-B6E7-8F23-19B52770E43A}"/>
+                </a:ext>
+              </a:extLst>
+            </p:cNvPr>
+            <p:cNvSpPr/>
+            <p:nvPr/>
+          </p:nvSpPr>
+          <p:spPr>
+            <a:xfrm>
+              <a:off x="5007939" y="29077173"/>
+              <a:ext cx="9218247" cy="1212112"/>
+            </a:xfrm>
+            <a:prstGeom prst="rightArrow">
+              <a:avLst/>
+            </a:prstGeom>
+            <a:grpFill/>
+            <a:ln>
+              <a:noFill/>
+            </a:ln>
+          </p:spPr>
+          <p:style>
+            <a:lnRef idx="2">
+              <a:schemeClr val="accent1">
+                <a:shade val="15000"/>
+              </a:schemeClr>
+            </a:lnRef>
+            <a:fillRef idx="1">
+              <a:schemeClr val="accent1"/>
+            </a:fillRef>
+            <a:effectRef idx="0">
+              <a:schemeClr val="accent1"/>
+            </a:effectRef>
+            <a:fontRef idx="minor">
+              <a:schemeClr val="lt1"/>
+            </a:fontRef>
+          </p:style>
+          <p:txBody>
+            <a:bodyPr rtlCol="0" anchor="ctr"/>
+            <a:lstStyle/>
+            <a:p>
+              <a:pPr algn="ctr"/>
+              <a:r>
+                <a:rPr lang="en-US" sz="3600" dirty="0">
+                  <a:solidFill>
+                    <a:srgbClr val="FFFFFF"/>
+                  </a:solidFill>
+                </a:rPr>
+                <a:t>EM projects catch advice 2022-2025</a:t>
+              </a:r>
+            </a:p>
+          </p:txBody>
+        </p:sp>
+      </p:grpSp>
+      <p:sp>
+        <p:nvSpPr>
+          <p:cNvPr id="1045" name="Rectangle: Rounded Corners 1044">
+            <a:extLst>
+              <a:ext uri="{FF2B5EF4-FFF2-40B4-BE49-F238E27FC236}">
+                <a16:creationId xmlns:a16="http://schemas.microsoft.com/office/drawing/2014/main" id="{B46EB768-C7B2-A710-8FCF-0E439A257412}"/>
+              </a:ext>
+            </a:extLst>
+          </p:cNvPr>
+          <p:cNvSpPr/>
+          <p:nvPr/>
+        </p:nvSpPr>
+        <p:spPr>
+          <a:xfrm>
+            <a:off x="21802128" y="24797160"/>
+            <a:ext cx="5657915" cy="3112416"/>
+          </a:xfrm>
+          <a:prstGeom prst="roundRect">
+            <a:avLst/>
+          </a:prstGeom>
+          <a:solidFill>
+            <a:schemeClr val="bg2">
+              <a:lumMod val="75000"/>
+            </a:schemeClr>
+          </a:solidFill>
+          <a:ln>
+            <a:noFill/>
+          </a:ln>
+        </p:spPr>
+        <p:style>
+          <a:lnRef idx="2">
+            <a:schemeClr val="accent1">
+              <a:shade val="15000"/>
+            </a:schemeClr>
+          </a:lnRef>
+          <a:fillRef idx="1">
+            <a:schemeClr val="accent1"/>
+          </a:fillRef>
+          <a:effectRef idx="0">
+            <a:schemeClr val="accent1"/>
+          </a:effectRef>
+          <a:fontRef idx="minor">
+            <a:schemeClr val="lt1"/>
+          </a:fontRef>
+        </p:style>
+        <p:txBody>
+          <a:bodyPr rtlCol="0" anchor="ctr"/>
+          <a:lstStyle/>
+          <a:p>
+            <a:pPr lvl="0" algn="ctr" defTabSz="914400">
+              <a:defRPr/>
+            </a:pPr>
+            <a:r>
+              <a:rPr lang="en-US" sz="6000" kern="0" dirty="0">
+                <a:solidFill>
+                  <a:schemeClr val="bg1"/>
+                </a:solidFill>
+              </a:rPr>
+              <a:t>Evaluation Continued…</a:t>
+            </a:r>
+          </a:p>
+        </p:txBody>
+      </p:sp>
+      <p:pic>
+        <p:nvPicPr>
+          <p:cNvPr id="1052" name="Picture 1051">
+            <a:extLst>
+              <a:ext uri="{FF2B5EF4-FFF2-40B4-BE49-F238E27FC236}">
+                <a16:creationId xmlns:a16="http://schemas.microsoft.com/office/drawing/2014/main" id="{EA66B52D-CE3D-F4CF-A059-5DC0ACAAF2D5}"/>
+              </a:ext>
+            </a:extLst>
+          </p:cNvPr>
+          <p:cNvPicPr>
+            <a:picLocks noChangeAspect="1"/>
+          </p:cNvPicPr>
+          <p:nvPr/>
+        </p:nvPicPr>
+        <p:blipFill>
+          <a:blip r:embed="rId4"/>
+          <a:stretch>
+            <a:fillRect/>
+          </a:stretch>
+        </p:blipFill>
+        <p:spPr>
+          <a:xfrm>
+            <a:off x="28089376" y="6556252"/>
+            <a:ext cx="14711678" cy="9469832"/>
+          </a:xfrm>
+          <a:prstGeom prst="rect">
+            <a:avLst/>
+          </a:prstGeom>
+        </p:spPr>
+      </p:pic>
+      <p:cxnSp>
+        <p:nvCxnSpPr>
+          <p:cNvPr id="21" name="Straight Connector 20">
+            <a:extLst>
+              <a:ext uri="{FF2B5EF4-FFF2-40B4-BE49-F238E27FC236}">
+                <a16:creationId xmlns:a16="http://schemas.microsoft.com/office/drawing/2014/main" id="{FD1501CA-F393-EA63-4E64-9C77AAA4EEFA}"/>
+              </a:ext>
+            </a:extLst>
+          </p:cNvPr>
+          <p:cNvCxnSpPr>
+            <a:cxnSpLocks/>
+          </p:cNvCxnSpPr>
+          <p:nvPr/>
+        </p:nvCxnSpPr>
+        <p:spPr>
+          <a:xfrm>
+            <a:off x="34686290" y="6265845"/>
+            <a:ext cx="0" cy="8817355"/>
+          </a:xfrm>
+          <a:prstGeom prst="line">
+            <a:avLst/>
+          </a:prstGeom>
+          <a:ln w="57150">
+            <a:solidFill>
+              <a:srgbClr val="C00000"/>
+            </a:solidFill>
+          </a:ln>
+        </p:spPr>
+        <p:style>
+          <a:lnRef idx="1">
+            <a:schemeClr val="accent1"/>
+          </a:lnRef>
+          <a:fillRef idx="0">
+            <a:schemeClr val="accent1"/>
+          </a:fillRef>
+          <a:effectRef idx="0">
+            <a:schemeClr val="accent1"/>
+          </a:effectRef>
+          <a:fontRef idx="minor">
+            <a:schemeClr val="tx1"/>
+          </a:fontRef>
+        </p:style>
+      </p:cxnSp>
+      <p:sp>
+        <p:nvSpPr>
           <p:cNvPr id="6" name="Text Placeholder 13">
             <a:extLst>
               <a:ext uri="{FF2B5EF4-FFF2-40B4-BE49-F238E27FC236}">
@@ -13672,8 +10530,8 @@
         </p:nvSpPr>
         <p:spPr>
           <a:xfrm>
-            <a:off x="27000395" y="16231280"/>
-            <a:ext cx="15690771" cy="600164"/>
+            <a:off x="27172370" y="15793462"/>
+            <a:ext cx="15690771" cy="1154162"/>
           </a:xfrm>
           <a:prstGeom prst="rect">
             <a:avLst/>
@@ -13823,7 +10681,7 @@
           <a:p>
             <a:r>
               <a:rPr lang="en-US" sz="3600" dirty="0"/>
-              <a:t>Figure 3: Temperature Projections that will be used in the analysis</a:t>
+              <a:t>Figure 3: Example temperature Projections that will be used by each EM in each Evaluation Event</a:t>
             </a:r>
           </a:p>
         </p:txBody>

--- a/Presentations/WulfingPoster_ICES.pptx
+++ b/Presentations/WulfingPoster_ICES.pptx
@@ -224,7 +224,7 @@
             <a:fld id="{0158C5BC-9A70-462C-B28D-9600239EAC64}" type="datetimeFigureOut">
               <a:rPr lang="en-US" smtClean="0"/>
               <a:pPr/>
-              <a:t>8/20/2025</a:t>
+              <a:t>8/23/2025</a:t>
             </a:fld>
             <a:endParaRPr lang="en-US"/>
           </a:p>
@@ -391,7 +391,7 @@
             <a:fld id="{E6CC2317-6751-4CD4-9995-8782DD78E936}" type="datetimeFigureOut">
               <a:rPr lang="en-US" smtClean="0"/>
               <a:pPr/>
-              <a:t>8/20/2025</a:t>
+              <a:t>8/23/2025</a:t>
             </a:fld>
             <a:endParaRPr lang="en-US" dirty="0"/>
           </a:p>
@@ -7473,60 +7473,36 @@
           <a:chExt cx="0" cy="0"/>
         </a:xfrm>
       </p:grpSpPr>
-      <p:sp>
-        <p:nvSpPr>
-          <p:cNvPr id="59" name="Oval 58">
+      <p:pic>
+        <p:nvPicPr>
+          <p:cNvPr id="7" name="Picture 6">
             <a:extLst>
               <a:ext uri="{FF2B5EF4-FFF2-40B4-BE49-F238E27FC236}">
-                <a16:creationId xmlns:a16="http://schemas.microsoft.com/office/drawing/2014/main" id="{46C898C3-2BD5-7E94-4AA5-1BF5CAFF36FE}"/>
+                <a16:creationId xmlns:a16="http://schemas.microsoft.com/office/drawing/2014/main" id="{32C92FEF-A183-840A-BD10-F974A96819C5}"/>
               </a:ext>
             </a:extLst>
           </p:cNvPr>
-          <p:cNvSpPr/>
+          <p:cNvPicPr>
+            <a:picLocks noChangeAspect="1"/>
+          </p:cNvPicPr>
           <p:nvPr/>
-        </p:nvSpPr>
+        </p:nvPicPr>
+        <p:blipFill>
+          <a:blip r:embed="rId2"/>
+          <a:stretch>
+            <a:fillRect/>
+          </a:stretch>
+        </p:blipFill>
         <p:spPr>
           <a:xfrm>
-            <a:off x="32788971" y="160586"/>
-            <a:ext cx="9902195" cy="4668793"/>
+            <a:off x="483323" y="13298510"/>
+            <a:ext cx="14061226" cy="7796876"/>
           </a:xfrm>
-          <a:prstGeom prst="ellipse">
+          <a:prstGeom prst="rect">
             <a:avLst/>
           </a:prstGeom>
-          <a:solidFill>
-            <a:schemeClr val="bg1"/>
-          </a:solidFill>
-          <a:ln>
-            <a:solidFill>
-              <a:schemeClr val="tx1"/>
-            </a:solidFill>
-          </a:ln>
         </p:spPr>
-        <p:style>
-          <a:lnRef idx="2">
-            <a:schemeClr val="accent1">
-              <a:shade val="15000"/>
-            </a:schemeClr>
-          </a:lnRef>
-          <a:fillRef idx="1">
-            <a:schemeClr val="accent1"/>
-          </a:fillRef>
-          <a:effectRef idx="0">
-            <a:schemeClr val="accent1"/>
-          </a:effectRef>
-          <a:fontRef idx="minor">
-            <a:schemeClr val="lt1"/>
-          </a:fontRef>
-        </p:style>
-        <p:txBody>
-          <a:bodyPr rtlCol="0" anchor="ctr"/>
-          <a:lstStyle/>
-          <a:p>
-            <a:pPr algn="ctr"/>
-            <a:endParaRPr lang="en-US"/>
-          </a:p>
-        </p:txBody>
-      </p:sp>
+      </p:pic>
       <p:sp>
         <p:nvSpPr>
           <p:cNvPr id="248" name="Text Placeholder 247">
@@ -7545,7 +7521,7 @@
         </p:nvSpPr>
         <p:spPr>
           <a:xfrm>
-            <a:off x="349488" y="5497684"/>
+            <a:off x="692780" y="5539712"/>
             <a:ext cx="13446799" cy="830997"/>
           </a:xfrm>
         </p:spPr>
@@ -7578,15 +7554,26 @@
         </p:nvSpPr>
         <p:spPr>
           <a:xfrm>
-            <a:off x="271793" y="5806618"/>
-            <a:ext cx="13137237" cy="7026539"/>
+            <a:off x="582245" y="6370709"/>
+            <a:ext cx="13137237" cy="6361742"/>
           </a:xfrm>
         </p:spPr>
         <p:txBody>
           <a:bodyPr/>
           <a:lstStyle/>
           <a:p>
-            <a:endParaRPr lang="en-US" sz="3600" b="1" dirty="0"/>
+            <a:pPr marL="571500" indent="-571500">
+              <a:buFont typeface="Arial" panose="020B0604020202020204" pitchFamily="34" charset="0"/>
+              <a:buChar char="•"/>
+            </a:pPr>
+            <a:r>
+              <a:rPr lang="en-US" sz="3600" b="1" dirty="0"/>
+              <a:t>Stock-specific responses to climate change creates challenges</a:t>
+            </a:r>
+            <a:r>
+              <a:rPr lang="en-US" sz="3600" dirty="0"/>
+              <a:t> for stock assessors and the fishing industry and a need to forecast effects of climate change on fish stocks. </a:t>
+            </a:r>
           </a:p>
           <a:p>
             <a:pPr marL="457200" indent="-457200">
@@ -7595,11 +7582,11 @@
             </a:pPr>
             <a:r>
               <a:rPr lang="en-US" sz="3600" b="1" dirty="0"/>
-              <a:t>Different fish stocks have been shown to respond differently to climate change </a:t>
+              <a:t>Management Strategy Evaluation (MSE) </a:t>
             </a:r>
             <a:r>
               <a:rPr lang="en-US" sz="3600" dirty="0"/>
-              <a:t>creating challenges for stock assessors and the fishing industry and a need to forecast effects of climate change on fish stocks. </a:t>
+              <a:t>is a modeling framework that simulates the outcomes of management decisions.</a:t>
             </a:r>
           </a:p>
           <a:p>
@@ -7608,28 +7595,17 @@
               <a:buChar char="•"/>
             </a:pPr>
             <a:r>
+              <a:rPr lang="en-US" sz="3600" dirty="0"/>
+              <a:t>This study’s objectives are to test how </a:t>
+            </a:r>
+            <a:r>
               <a:rPr lang="en-US" sz="3600" b="1" dirty="0"/>
-              <a:t>Management Strategy Evaluation (MSE) </a:t>
+              <a:t>different choices for projecting environmental covariates </a:t>
             </a:r>
             <a:r>
               <a:rPr lang="en-US" sz="3600" dirty="0"/>
-              <a:t>is a modeling framework that simulates the outcomes of management decisions.</a:t>
-            </a:r>
-          </a:p>
-          <a:p>
-            <a:pPr marL="457200" indent="-457200">
-              <a:buFont typeface="Arial" panose="020B0604020202020204" pitchFamily="34" charset="0"/>
-              <a:buChar char="•"/>
-            </a:pPr>
-            <a:r>
-              <a:rPr lang="en-US" sz="3600" dirty="0"/>
-              <a:t>This study’s objectives are to test </a:t>
-            </a:r>
-            <a:r>
-              <a:rPr lang="en-US" sz="3600" b="1" dirty="0"/>
-              <a:t>how different projections of environmental covariates in stock assessment affect long-term fishery outcomes.</a:t>
-            </a:r>
-            <a:endParaRPr lang="en-US" dirty="0"/>
+              <a:t>within stock assessment affect long-term fishery outcomes.</a:t>
+            </a:r>
           </a:p>
         </p:txBody>
       </p:sp>
@@ -7651,8 +7627,8 @@
         </p:nvSpPr>
         <p:spPr>
           <a:xfrm>
-            <a:off x="13845567" y="6523468"/>
-            <a:ext cx="13064653" cy="6915739"/>
+            <a:off x="14807352" y="16274725"/>
+            <a:ext cx="13277374" cy="7469737"/>
           </a:xfrm>
         </p:spPr>
         <p:txBody>
@@ -7676,29 +7652,18 @@
               <a:t>(</a:t>
             </a:r>
             <a:r>
-              <a:rPr lang="en-US" sz="3600" i="1" dirty="0" err="1"/>
-              <a:t>Limanda</a:t>
-            </a:r>
-            <a:r>
               <a:rPr lang="en-US" sz="3600" i="1" dirty="0"/>
-              <a:t> </a:t>
-            </a:r>
-            <a:r>
-              <a:rPr lang="en-US" sz="3600" i="1" dirty="0" err="1"/>
-              <a:t>ferruginea</a:t>
+              <a:t>Limanda ferruginea</a:t>
             </a:r>
             <a:r>
               <a:rPr lang="en-US" sz="3600" dirty="0"/>
-              <a:t>) as a case study, this stock is currently overfished and their recruitment is known to be sensitive to bottom temperature </a:t>
-            </a:r>
-            <a:r>
-              <a:rPr lang="en-US" sz="3600" dirty="0">
-                <a:highlight>
-                  <a:srgbClr val="FFFF00"/>
-                </a:highlight>
-              </a:rPr>
-              <a:t>(CITE).</a:t>
-            </a:r>
+              <a:t>) as a case study, this stock is currently overfished, and their recruitment is known to be sensitive to bottom temperature (Hyun et al 2014; Chen et al 2024).</a:t>
+            </a:r>
+            <a:endParaRPr lang="en-US" sz="3600" dirty="0">
+              <a:highlight>
+                <a:srgbClr val="FFFF00"/>
+              </a:highlight>
+            </a:endParaRPr>
           </a:p>
           <a:p>
             <a:pPr marL="457200" indent="-457200">
@@ -7714,16 +7679,8 @@
               <a:t>temperature forecasts from the Modular Ocean Model (MOM6) </a:t>
             </a:r>
             <a:r>
-              <a:rPr lang="en-US" sz="3600" dirty="0">
-                <a:highlight>
-                  <a:srgbClr val="FFFF00"/>
-                </a:highlight>
-              </a:rPr>
-              <a:t>(CITE) </a:t>
-            </a:r>
-            <a:r>
               <a:rPr lang="en-US" sz="3600" dirty="0"/>
-              <a:t>to use as our OM environmental covariate.</a:t>
+              <a:t>(Ross et al 2021) to use as our OM environmental covariate.</a:t>
             </a:r>
             <a:endParaRPr lang="en-US" sz="3600" dirty="0">
               <a:highlight>
@@ -7742,35 +7699,11 @@
             </a:r>
             <a:r>
               <a:rPr lang="en-US" sz="3600" b="1" dirty="0"/>
-              <a:t>Wood’s Hole Assessment Model (WHAM) and the </a:t>
-            </a:r>
-            <a:r>
-              <a:rPr lang="en-US" sz="3600" b="1" dirty="0" err="1"/>
-              <a:t>whamMSE</a:t>
-            </a:r>
-            <a:r>
-              <a:rPr lang="en-US" sz="3600" b="1" dirty="0"/>
-              <a:t> R package </a:t>
-            </a:r>
-            <a:r>
-              <a:rPr lang="en-US" sz="3600" b="1" dirty="0">
-                <a:highlight>
-                  <a:srgbClr val="FFFF00"/>
-                </a:highlight>
-              </a:rPr>
-              <a:t>(CITE)</a:t>
-            </a:r>
-            <a:r>
-              <a:rPr lang="en-US" sz="3600" dirty="0">
-                <a:highlight>
-                  <a:srgbClr val="FFFF00"/>
-                </a:highlight>
-              </a:rPr>
-              <a:t> </a:t>
+              <a:t>Wood’s Hole Assessment Model (WHAM) and the whamMSE R package </a:t>
             </a:r>
             <a:r>
               <a:rPr lang="en-US" sz="3600" dirty="0"/>
-              <a:t>We will update these packages such that new temperature data is incorporated with each MSE period, simulating periodic stock assessments.</a:t>
+              <a:t>(Stock &amp; Miller 2021; Li 2025). We will update these packages such that new temperature data is incorporated with each MSE period, simulating periodic stock assessments.</a:t>
             </a:r>
             <a:endParaRPr lang="en-US" sz="3000" dirty="0"/>
           </a:p>
@@ -7794,7 +7727,7 @@
         </p:nvSpPr>
         <p:spPr>
           <a:xfrm>
-            <a:off x="28405252" y="5276219"/>
+            <a:off x="29372822" y="5422098"/>
             <a:ext cx="13478796" cy="830997"/>
           </a:xfrm>
         </p:spPr>
@@ -7827,7 +7760,7 @@
         </p:nvSpPr>
         <p:spPr>
           <a:xfrm>
-            <a:off x="326994" y="14487494"/>
+            <a:off x="29372822" y="20084732"/>
             <a:ext cx="13979748" cy="830997"/>
           </a:xfrm>
         </p:spPr>
@@ -7837,40 +7770,7 @@
           <a:p>
             <a:r>
               <a:rPr lang="en-US" sz="4800" dirty="0"/>
-              <a:t>METHODS – MSE PROCESS</a:t>
-            </a:r>
-          </a:p>
-        </p:txBody>
-      </p:sp>
-      <p:sp>
-        <p:nvSpPr>
-          <p:cNvPr id="260" name="Text Placeholder 259">
-            <a:extLst>
-              <a:ext uri="{FF2B5EF4-FFF2-40B4-BE49-F238E27FC236}">
-                <a16:creationId xmlns:a16="http://schemas.microsoft.com/office/drawing/2014/main" id="{2B9AEA34-511C-4D46-A919-4AEAF57293A1}"/>
-              </a:ext>
-            </a:extLst>
-          </p:cNvPr>
-          <p:cNvSpPr>
-            <a:spLocks noGrp="1"/>
-          </p:cNvSpPr>
-          <p:nvPr>
-            <p:ph type="body" sz="quarter" idx="193"/>
-          </p:nvPr>
-        </p:nvSpPr>
-        <p:spPr>
-          <a:xfrm>
-            <a:off x="45287477" y="2964670"/>
-            <a:ext cx="9534959" cy="830997"/>
-          </a:xfrm>
-        </p:spPr>
-        <p:txBody>
-          <a:bodyPr/>
-          <a:lstStyle/>
-          <a:p>
-            <a:r>
-              <a:rPr lang="en-US" sz="4800" dirty="0"/>
-              <a:t>Discussion and future work </a:t>
+              <a:t>NEXT STEPS</a:t>
             </a:r>
           </a:p>
         </p:txBody>
@@ -7932,7 +7832,7 @@
         <p:spPr>
           <a:xfrm>
             <a:off x="1011105" y="493858"/>
-            <a:ext cx="34297711" cy="2317750"/>
+            <a:ext cx="37934260" cy="2317750"/>
           </a:xfrm>
         </p:spPr>
         <p:txBody>
@@ -7972,7 +7872,7 @@
         </p:spPr>
         <p:txBody>
           <a:bodyPr>
-            <a:normAutofit/>
+            <a:normAutofit fontScale="92500" lnSpcReduction="20000"/>
           </a:bodyPr>
           <a:lstStyle/>
           <a:p>
@@ -8026,6 +7926,12 @@
             <a:r>
               <a:rPr lang="en-US" sz="3600" dirty="0"/>
               <a:t>NOAA Northeast Fisheries Science Center</a:t>
+            </a:r>
+          </a:p>
+          <a:p>
+            <a:r>
+              <a:rPr lang="en-US" sz="3600" dirty="0"/>
+              <a:t>Contact: swulfing@umassd.edu</a:t>
             </a:r>
           </a:p>
         </p:txBody>
@@ -8046,7 +7952,7 @@
         </p:nvSpPr>
         <p:spPr>
           <a:xfrm>
-            <a:off x="29253487" y="27993527"/>
+            <a:off x="29372822" y="26941352"/>
             <a:ext cx="13437679" cy="1717393"/>
           </a:xfrm>
           <a:prstGeom prst="rect">
@@ -8224,8 +8130,8 @@
         </p:nvSpPr>
         <p:spPr>
           <a:xfrm>
-            <a:off x="503874" y="31621164"/>
-            <a:ext cx="26406345" cy="600164"/>
+            <a:off x="593114" y="31096744"/>
+            <a:ext cx="26406345" cy="1154162"/>
           </a:xfrm>
         </p:spPr>
         <p:txBody>
@@ -8233,42 +8139,16 @@
           <a:lstStyle/>
           <a:p>
             <a:r>
-              <a:rPr lang="en-US" sz="3600" dirty="0"/>
-              <a:t>Figure 2: Visualization of the MSE process used in our analysis</a:t>
+              <a:rPr lang="en-US" sz="4000" b="1" dirty="0"/>
+              <a:t>↑</a:t>
+            </a:r>
+            <a:r>
+              <a:rPr lang="en-US" sz="3200" dirty="0"/>
+              <a:t> Figure 2: Visualization of the MSE process used in our analysis where at each evaluation, the Estimation Model (EM) incorporates the previous three years of temperature data into its assessment and catch advice for the next three years.</a:t>
             </a:r>
           </a:p>
         </p:txBody>
       </p:sp>
-      <p:pic>
-        <p:nvPicPr>
-          <p:cNvPr id="8" name="Picture 7">
-            <a:extLst>
-              <a:ext uri="{FF2B5EF4-FFF2-40B4-BE49-F238E27FC236}">
-                <a16:creationId xmlns:a16="http://schemas.microsoft.com/office/drawing/2014/main" id="{A4784467-29C4-A30F-CEF3-C647BD148C38}"/>
-              </a:ext>
-            </a:extLst>
-          </p:cNvPr>
-          <p:cNvPicPr>
-            <a:picLocks noChangeAspect="1"/>
-          </p:cNvPicPr>
-          <p:nvPr/>
-        </p:nvPicPr>
-        <p:blipFill>
-          <a:blip r:embed="rId2"/>
-          <a:stretch>
-            <a:fillRect/>
-          </a:stretch>
-        </p:blipFill>
-        <p:spPr>
-          <a:xfrm>
-            <a:off x="14306742" y="14496826"/>
-            <a:ext cx="12471141" cy="8105438"/>
-          </a:xfrm>
-          <a:prstGeom prst="rect">
-            <a:avLst/>
-          </a:prstGeom>
-        </p:spPr>
-      </p:pic>
       <p:sp>
         <p:nvSpPr>
           <p:cNvPr id="3" name="Text Placeholder 2">
@@ -8287,7 +8167,7 @@
         </p:nvSpPr>
         <p:spPr>
           <a:xfrm>
-            <a:off x="14053621" y="5472926"/>
+            <a:off x="14706761" y="15357166"/>
             <a:ext cx="13478557" cy="830997"/>
           </a:xfrm>
         </p:spPr>
@@ -8318,7 +8198,7 @@
         </p:nvSpPr>
         <p:spPr>
           <a:xfrm>
-            <a:off x="28595752" y="17026924"/>
+            <a:off x="29439999" y="8758743"/>
             <a:ext cx="13064653" cy="11126123"/>
           </a:xfrm>
           <a:prstGeom prst="rect">
@@ -8492,23 +8372,7 @@
             </a:r>
             <a:r>
               <a:rPr lang="en-US" sz="3600" dirty="0"/>
-              <a:t> – </a:t>
-            </a:r>
-            <a:r>
-              <a:rPr lang="en-US" sz="3600" dirty="0" err="1"/>
-              <a:t>AutoRegressive</a:t>
-            </a:r>
-            <a:r>
-              <a:rPr lang="en-US" sz="3600" dirty="0"/>
-              <a:t>(1) estimation process uses a linear regression of the current values of the time series on the previous value. This is an automatic setting in the </a:t>
-            </a:r>
-            <a:r>
-              <a:rPr lang="en-US" sz="3600" dirty="0" err="1"/>
-              <a:t>WhamMSE</a:t>
-            </a:r>
-            <a:r>
-              <a:rPr lang="en-US" sz="3600" dirty="0"/>
-              <a:t> package.</a:t>
+              <a:t> – AutoRegressive(1) estimation process uses a linear regression of the current values of the time series on the previous value. This is an automatic setting in the WhamMSE package.</a:t>
             </a:r>
           </a:p>
           <a:p>
@@ -8518,11 +8382,11 @@
             </a:pPr>
             <a:r>
               <a:rPr lang="en-US" sz="3600" b="1" dirty="0" err="1"/>
-              <a:t>RecWind</a:t>
+              <a:t>NewWind</a:t>
             </a:r>
             <a:r>
               <a:rPr lang="en-US" sz="3600" dirty="0"/>
-              <a:t> – Recent Window. This projection uses the average temperature from the last five years as its projection</a:t>
+              <a:t> – Newest Window. This projection uses the average temperature from the last five years as its projection</a:t>
             </a:r>
             <a:endParaRPr lang="en-US" sz="3600" b="1" dirty="0"/>
           </a:p>
@@ -8548,11 +8412,11 @@
             </a:pPr>
             <a:r>
               <a:rPr lang="en-US" sz="3600" b="1" dirty="0" err="1"/>
-              <a:t>RecTrend</a:t>
+              <a:t>NewTrend</a:t>
             </a:r>
             <a:r>
               <a:rPr lang="en-US" sz="3600" dirty="0"/>
-              <a:t> – Recent Trend. This projection uses the linear regression of last five years of temperature data to project temperature.</a:t>
+              <a:t> – Newest Trend. This projection uses the linear regression of last five years of temperature data to project temperature.</a:t>
             </a:r>
             <a:endParaRPr lang="en-US" sz="3600" b="1" dirty="0"/>
           </a:p>
@@ -8569,36 +8433,6 @@
               <a:rPr lang="en-US" sz="3600" dirty="0"/>
               <a:t> – No temperature (not pictured). No Environmental covariate is used in this projection.</a:t>
             </a:r>
-          </a:p>
-        </p:txBody>
-      </p:sp>
-      <p:sp>
-        <p:nvSpPr>
-          <p:cNvPr id="19" name="Text Placeholder 18">
-            <a:extLst>
-              <a:ext uri="{FF2B5EF4-FFF2-40B4-BE49-F238E27FC236}">
-                <a16:creationId xmlns:a16="http://schemas.microsoft.com/office/drawing/2014/main" id="{DAF6EF70-63F4-4B39-46B1-01755D6FABBA}"/>
-              </a:ext>
-            </a:extLst>
-          </p:cNvPr>
-          <p:cNvSpPr>
-            <a:spLocks noGrp="1"/>
-          </p:cNvSpPr>
-          <p:nvPr>
-            <p:ph type="body" sz="quarter" idx="187"/>
-          </p:nvPr>
-        </p:nvSpPr>
-        <p:spPr>
-          <a:xfrm>
-            <a:off x="503875" y="24081596"/>
-            <a:ext cx="13433269" cy="646331"/>
-          </a:xfrm>
-        </p:spPr>
-        <p:txBody>
-          <a:bodyPr/>
-          <a:lstStyle/>
-          <a:p>
-            <a:endParaRPr lang="en-US" dirty="0"/>
           </a:p>
         </p:txBody>
       </p:sp>
@@ -8616,8 +8450,8 @@
         </p:nvSpPr>
         <p:spPr>
           <a:xfrm>
-            <a:off x="30951604" y="5846986"/>
-            <a:ext cx="2642903" cy="646331"/>
+            <a:off x="15624564" y="5063867"/>
+            <a:ext cx="5563431" cy="1200329"/>
           </a:xfrm>
           <a:prstGeom prst="rect">
             <a:avLst/>
@@ -8625,16 +8459,17 @@
           <a:noFill/>
         </p:spPr>
         <p:txBody>
-          <a:bodyPr wrap="none" rtlCol="0">
+          <a:bodyPr wrap="square" rtlCol="0">
             <a:spAutoFit/>
           </a:bodyPr>
           <a:lstStyle/>
           <a:p>
+            <a:pPr algn="ctr"/>
             <a:r>
               <a:rPr lang="en-US" sz="3600" dirty="0">
                 <a:latin typeface="Avenir Next LT Pro" panose="020B0504020202020204" pitchFamily="34" charset="0"/>
               </a:rPr>
-              <a:t>Data Period</a:t>
+              <a:t>Assessment Estimate Period</a:t>
             </a:r>
           </a:p>
         </p:txBody>
@@ -8653,8 +8488,8 @@
         </p:nvSpPr>
         <p:spPr>
           <a:xfrm>
-            <a:off x="36239593" y="5846986"/>
-            <a:ext cx="3766287" cy="646331"/>
+            <a:off x="21187995" y="5278418"/>
+            <a:ext cx="5563430" cy="646331"/>
           </a:xfrm>
           <a:prstGeom prst="rect">
             <a:avLst/>
@@ -8662,11 +8497,12 @@
           <a:noFill/>
         </p:spPr>
         <p:txBody>
-          <a:bodyPr wrap="none" rtlCol="0">
+          <a:bodyPr wrap="square" rtlCol="0">
             <a:spAutoFit/>
           </a:bodyPr>
           <a:lstStyle/>
           <a:p>
+            <a:pPr algn="ctr"/>
             <a:r>
               <a:rPr lang="en-US" sz="3600" dirty="0">
                 <a:latin typeface="Avenir Next LT Pro" panose="020B0504020202020204" pitchFamily="34" charset="0"/>
@@ -8676,521 +8512,6 @@
           </a:p>
         </p:txBody>
       </p:sp>
-      <p:sp>
-        <p:nvSpPr>
-          <p:cNvPr id="26" name="Text Placeholder 260">
-            <a:extLst>
-              <a:ext uri="{FF2B5EF4-FFF2-40B4-BE49-F238E27FC236}">
-                <a16:creationId xmlns:a16="http://schemas.microsoft.com/office/drawing/2014/main" id="{20B8A20B-326A-DC3E-D441-EC955DB80FAD}"/>
-              </a:ext>
-            </a:extLst>
-          </p:cNvPr>
-          <p:cNvSpPr txBox="1">
-            <a:spLocks/>
-          </p:cNvSpPr>
-          <p:nvPr/>
-        </p:nvSpPr>
-        <p:spPr>
-          <a:xfrm>
-            <a:off x="29068471" y="28600232"/>
-            <a:ext cx="12815577" cy="3671774"/>
-          </a:xfrm>
-          <a:prstGeom prst="rect">
-            <a:avLst/>
-          </a:prstGeom>
-        </p:spPr>
-        <p:txBody>
-          <a:bodyPr wrap="square" lIns="91440" tIns="45720" rIns="91440" bIns="0">
-            <a:spAutoFit/>
-          </a:bodyPr>
-          <a:lstStyle>
-            <a:lvl1pPr marL="0" indent="0" algn="l" defTabSz="4388166" rtl="0" eaLnBrk="1" latinLnBrk="0" hangingPunct="1">
-              <a:spcBef>
-                <a:spcPct val="20000"/>
-              </a:spcBef>
-              <a:buFontTx/>
-              <a:buNone/>
-              <a:defRPr sz="2800" b="0" kern="1200" spc="198" baseline="0">
-                <a:solidFill>
-                  <a:schemeClr val="tx1"/>
-                </a:solidFill>
-                <a:latin typeface="Avenir Next LT Pro" panose="020B0504020202020204" pitchFamily="34" charset="0"/>
-                <a:ea typeface="+mn-ea"/>
-                <a:cs typeface="Arial" panose="020B0604020202020204" pitchFamily="34" charset="0"/>
-              </a:defRPr>
-            </a:lvl1pPr>
-            <a:lvl2pPr marL="667227" indent="-248603" algn="l" defTabSz="4388166" rtl="0" eaLnBrk="1" latinLnBrk="0" hangingPunct="1">
-              <a:spcBef>
-                <a:spcPct val="20000"/>
-              </a:spcBef>
-              <a:buFont typeface="Arial" panose="020B0604020202020204" pitchFamily="34" charset="0"/>
-              <a:buChar char="•"/>
-              <a:defRPr sz="2800" b="0" kern="1200" spc="198" baseline="0">
-                <a:solidFill>
-                  <a:schemeClr val="tx1"/>
-                </a:solidFill>
-                <a:latin typeface="Avenir Next LT Pro" panose="020B0504020202020204" pitchFamily="34" charset="0"/>
-                <a:ea typeface="+mn-ea"/>
-                <a:cs typeface="Arial" panose="020B0604020202020204" pitchFamily="34" charset="0"/>
-              </a:defRPr>
-            </a:lvl2pPr>
-            <a:lvl3pPr marL="1132999" indent="-201454" algn="l" defTabSz="4388166" rtl="0" eaLnBrk="1" latinLnBrk="0" hangingPunct="1">
-              <a:spcBef>
-                <a:spcPct val="20000"/>
-              </a:spcBef>
-              <a:buFont typeface="Arial" panose="020B0604020202020204" pitchFamily="34" charset="0"/>
-              <a:buChar char="•"/>
-              <a:defRPr sz="2800" b="0" kern="1200" spc="198" baseline="0">
-                <a:solidFill>
-                  <a:schemeClr val="tx1"/>
-                </a:solidFill>
-                <a:latin typeface="Avenir Next LT Pro" panose="020B0504020202020204" pitchFamily="34" charset="0"/>
-                <a:ea typeface="+mn-ea"/>
-                <a:cs typeface="Arial" panose="020B0604020202020204" pitchFamily="34" charset="0"/>
-              </a:defRPr>
-            </a:lvl3pPr>
-            <a:lvl4pPr marL="1754505" indent="-311468" algn="l" defTabSz="4388166" rtl="0" eaLnBrk="1" latinLnBrk="0" hangingPunct="1">
-              <a:spcBef>
-                <a:spcPct val="20000"/>
-              </a:spcBef>
-              <a:buFont typeface="Arial" panose="020B0604020202020204" pitchFamily="34" charset="0"/>
-              <a:buChar char="•"/>
-              <a:defRPr sz="2400" b="0" kern="1200" spc="198" baseline="0">
-                <a:solidFill>
-                  <a:schemeClr val="tx1"/>
-                </a:solidFill>
-                <a:latin typeface="Avenir Next LT Pro" panose="020B0504020202020204" pitchFamily="34" charset="0"/>
-                <a:ea typeface="+mn-ea"/>
-                <a:cs typeface="Arial" panose="020B0604020202020204" pitchFamily="34" charset="0"/>
-              </a:defRPr>
-            </a:lvl4pPr>
-            <a:lvl5pPr marL="2313147" indent="-285750" algn="l" defTabSz="4388166" rtl="0" eaLnBrk="1" latinLnBrk="0" hangingPunct="1">
-              <a:spcBef>
-                <a:spcPct val="20000"/>
-              </a:spcBef>
-              <a:buFont typeface="Arial" panose="020B0604020202020204" pitchFamily="34" charset="0"/>
-              <a:buChar char="•"/>
-              <a:defRPr sz="2400" b="0" kern="1200" spc="198" baseline="0">
-                <a:solidFill>
-                  <a:schemeClr val="tx1"/>
-                </a:solidFill>
-                <a:latin typeface="Avenir Next LT Pro" panose="020B0504020202020204" pitchFamily="34" charset="0"/>
-                <a:ea typeface="+mn-ea"/>
-                <a:cs typeface="Arial" panose="020B0604020202020204" pitchFamily="34" charset="0"/>
-              </a:defRPr>
-            </a:lvl5pPr>
-            <a:lvl6pPr marL="12067458" indent="-1097042" algn="l" defTabSz="4388166" rtl="0" eaLnBrk="1" latinLnBrk="0" hangingPunct="1">
-              <a:spcBef>
-                <a:spcPct val="20000"/>
-              </a:spcBef>
-              <a:buFont typeface="Arial" pitchFamily="34" charset="0"/>
-              <a:buChar char="•"/>
-              <a:defRPr sz="9600" kern="1200">
-                <a:solidFill>
-                  <a:schemeClr val="tx1"/>
-                </a:solidFill>
-                <a:latin typeface="+mn-lt"/>
-                <a:ea typeface="+mn-ea"/>
-                <a:cs typeface="+mn-cs"/>
-              </a:defRPr>
-            </a:lvl6pPr>
-            <a:lvl7pPr marL="14261540" indent="-1097042" algn="l" defTabSz="4388166" rtl="0" eaLnBrk="1" latinLnBrk="0" hangingPunct="1">
-              <a:spcBef>
-                <a:spcPct val="20000"/>
-              </a:spcBef>
-              <a:buFont typeface="Arial" pitchFamily="34" charset="0"/>
-              <a:buChar char="•"/>
-              <a:defRPr sz="9600" kern="1200">
-                <a:solidFill>
-                  <a:schemeClr val="tx1"/>
-                </a:solidFill>
-                <a:latin typeface="+mn-lt"/>
-                <a:ea typeface="+mn-ea"/>
-                <a:cs typeface="+mn-cs"/>
-              </a:defRPr>
-            </a:lvl7pPr>
-            <a:lvl8pPr marL="16455624" indent="-1097042" algn="l" defTabSz="4388166" rtl="0" eaLnBrk="1" latinLnBrk="0" hangingPunct="1">
-              <a:spcBef>
-                <a:spcPct val="20000"/>
-              </a:spcBef>
-              <a:buFont typeface="Arial" pitchFamily="34" charset="0"/>
-              <a:buChar char="•"/>
-              <a:defRPr sz="9600" kern="1200">
-                <a:solidFill>
-                  <a:schemeClr val="tx1"/>
-                </a:solidFill>
-                <a:latin typeface="+mn-lt"/>
-                <a:ea typeface="+mn-ea"/>
-                <a:cs typeface="+mn-cs"/>
-              </a:defRPr>
-            </a:lvl8pPr>
-            <a:lvl9pPr marL="18649706" indent="-1097042" algn="l" defTabSz="4388166" rtl="0" eaLnBrk="1" latinLnBrk="0" hangingPunct="1">
-              <a:spcBef>
-                <a:spcPct val="20000"/>
-              </a:spcBef>
-              <a:buFont typeface="Arial" pitchFamily="34" charset="0"/>
-              <a:buChar char="•"/>
-              <a:defRPr sz="9600" kern="1200">
-                <a:solidFill>
-                  <a:schemeClr val="tx1"/>
-                </a:solidFill>
-                <a:latin typeface="+mn-lt"/>
-                <a:ea typeface="+mn-ea"/>
-                <a:cs typeface="+mn-cs"/>
-              </a:defRPr>
-            </a:lvl9pPr>
-          </a:lstStyle>
-          <a:p>
-            <a:endParaRPr lang="en-US" sz="1400" dirty="0">
-              <a:solidFill>
-                <a:srgbClr val="000000"/>
-              </a:solidFill>
-              <a:highlight>
-                <a:srgbClr val="FFFF00"/>
-              </a:highlight>
-              <a:latin typeface="Avenir Next LT Pro" panose="020B0504020202020204" pitchFamily="34" charset="77"/>
-            </a:endParaRPr>
-          </a:p>
-          <a:p>
-            <a:pPr marL="457200" indent="-457200">
-              <a:buFont typeface="Arial" panose="020B0604020202020204" pitchFamily="34" charset="0"/>
-              <a:buChar char="•"/>
-            </a:pPr>
-            <a:r>
-              <a:rPr lang="en-US" sz="1400" dirty="0">
-                <a:highlight>
-                  <a:srgbClr val="FFFF00"/>
-                </a:highlight>
-              </a:rPr>
-              <a:t>Carr‐Harris, A. (2022). Summer Flounder recreational demand model: Overview, data, and methods.</a:t>
-            </a:r>
-            <a:r>
-              <a:rPr lang="en-US" sz="1400" dirty="0">
-                <a:solidFill>
-                  <a:srgbClr val="000000"/>
-                </a:solidFill>
-                <a:highlight>
-                  <a:srgbClr val="FFFF00"/>
-                </a:highlight>
-                <a:latin typeface="Avenir Next LT Pro" panose="020B0504020202020204" pitchFamily="34" charset="77"/>
-              </a:rPr>
-              <a:t> </a:t>
-            </a:r>
-          </a:p>
-          <a:p>
-            <a:pPr marL="457200" indent="-457200">
-              <a:buFont typeface="Arial" panose="020B0604020202020204" pitchFamily="34" charset="0"/>
-              <a:buChar char="•"/>
-            </a:pPr>
-            <a:r>
-              <a:rPr lang="en-US" sz="1400" dirty="0">
-                <a:solidFill>
-                  <a:srgbClr val="000000"/>
-                </a:solidFill>
-                <a:highlight>
-                  <a:srgbClr val="FFFF00"/>
-                </a:highlight>
-                <a:latin typeface="Avenir Next LT Pro" panose="020B0504020202020204" pitchFamily="34" charset="77"/>
-              </a:rPr>
-              <a:t>Moore, C. M. (2022). EAFM Recreational Summer Flounder Management Strategy Evaluation. Mid-Atlantic Fishery Management Council </a:t>
-            </a:r>
-            <a:r>
-              <a:rPr lang="en-US" sz="1400" dirty="0">
-                <a:highlight>
-                  <a:srgbClr val="FFFF00"/>
-                </a:highlight>
-                <a:latin typeface="Avenir Next LT Pro" panose="020B0504020202020204" pitchFamily="34" charset="77"/>
-              </a:rPr>
-              <a:t> </a:t>
-            </a:r>
-          </a:p>
-          <a:p>
-            <a:pPr marL="457200" indent="-457200">
-              <a:buFont typeface="Arial" panose="020B0604020202020204" pitchFamily="34" charset="0"/>
-              <a:buChar char="•"/>
-            </a:pPr>
-            <a:r>
-              <a:rPr lang="en-US" sz="1400" dirty="0">
-                <a:highlight>
-                  <a:srgbClr val="FFFF00"/>
-                </a:highlight>
-                <a:latin typeface="Avenir Next LT Pro" panose="020B0504020202020204" pitchFamily="34" charset="77"/>
-              </a:rPr>
-              <a:t>Muffley, B., </a:t>
-            </a:r>
-            <a:r>
-              <a:rPr lang="en-US" sz="1400" dirty="0" err="1">
-                <a:highlight>
-                  <a:srgbClr val="FFFF00"/>
-                </a:highlight>
-                <a:latin typeface="Avenir Next LT Pro" panose="020B0504020202020204" pitchFamily="34" charset="77"/>
-              </a:rPr>
-              <a:t>Gaichas</a:t>
-            </a:r>
-            <a:r>
-              <a:rPr lang="en-US" sz="1400" dirty="0">
-                <a:highlight>
-                  <a:srgbClr val="FFFF00"/>
-                </a:highlight>
-                <a:latin typeface="Avenir Next LT Pro" panose="020B0504020202020204" pitchFamily="34" charset="77"/>
-              </a:rPr>
-              <a:t>, S., </a:t>
-            </a:r>
-            <a:r>
-              <a:rPr lang="en-US" sz="1400" dirty="0" err="1">
-                <a:highlight>
-                  <a:srgbClr val="FFFF00"/>
-                </a:highlight>
-                <a:latin typeface="Avenir Next LT Pro" panose="020B0504020202020204" pitchFamily="34" charset="77"/>
-              </a:rPr>
-              <a:t>DePiper</a:t>
-            </a:r>
-            <a:r>
-              <a:rPr lang="en-US" sz="1400" dirty="0">
-                <a:highlight>
-                  <a:srgbClr val="FFFF00"/>
-                </a:highlight>
-                <a:latin typeface="Avenir Next LT Pro" panose="020B0504020202020204" pitchFamily="34" charset="77"/>
-              </a:rPr>
-              <a:t>, G., Seagraves, R., &amp; Lucey, S. (2021). There is no I in EAFM adapting integrated ecosystem assessment for mid-</a:t>
-            </a:r>
-            <a:r>
-              <a:rPr lang="en-US" sz="1400" dirty="0" err="1">
-                <a:highlight>
-                  <a:srgbClr val="FFFF00"/>
-                </a:highlight>
-                <a:latin typeface="Avenir Next LT Pro" panose="020B0504020202020204" pitchFamily="34" charset="77"/>
-              </a:rPr>
-              <a:t>atlantic</a:t>
-            </a:r>
-            <a:r>
-              <a:rPr lang="en-US" sz="1400" dirty="0">
-                <a:highlight>
-                  <a:srgbClr val="FFFF00"/>
-                </a:highlight>
-                <a:latin typeface="Avenir Next LT Pro" panose="020B0504020202020204" pitchFamily="34" charset="77"/>
-              </a:rPr>
-              <a:t> fisheries management. </a:t>
-            </a:r>
-            <a:r>
-              <a:rPr lang="en-US" sz="1400" i="1" dirty="0">
-                <a:highlight>
-                  <a:srgbClr val="FFFF00"/>
-                </a:highlight>
-                <a:latin typeface="Avenir Next LT Pro" panose="020B0504020202020204" pitchFamily="34" charset="77"/>
-              </a:rPr>
-              <a:t>Coastal management</a:t>
-            </a:r>
-            <a:r>
-              <a:rPr lang="en-US" sz="1400" dirty="0">
-                <a:highlight>
-                  <a:srgbClr val="FFFF00"/>
-                </a:highlight>
-                <a:latin typeface="Avenir Next LT Pro" panose="020B0504020202020204" pitchFamily="34" charset="77"/>
-              </a:rPr>
-              <a:t>, </a:t>
-            </a:r>
-            <a:r>
-              <a:rPr lang="en-US" sz="1400" i="1" dirty="0">
-                <a:highlight>
-                  <a:srgbClr val="FFFF00"/>
-                </a:highlight>
-                <a:latin typeface="Avenir Next LT Pro" panose="020B0504020202020204" pitchFamily="34" charset="77"/>
-              </a:rPr>
-              <a:t>49</a:t>
-            </a:r>
-            <a:r>
-              <a:rPr lang="en-US" sz="1400" dirty="0">
-                <a:highlight>
-                  <a:srgbClr val="FFFF00"/>
-                </a:highlight>
-                <a:latin typeface="Avenir Next LT Pro" panose="020B0504020202020204" pitchFamily="34" charset="77"/>
-              </a:rPr>
-              <a:t>(1), 90-106.</a:t>
-            </a:r>
-          </a:p>
-          <a:p>
-            <a:pPr marL="457200" indent="-457200">
-              <a:buFont typeface="Arial" panose="020B0604020202020204" pitchFamily="34" charset="0"/>
-              <a:buChar char="•"/>
-            </a:pPr>
-            <a:r>
-              <a:rPr lang="en-US" sz="1400" dirty="0">
-                <a:highlight>
-                  <a:srgbClr val="FFFF00"/>
-                </a:highlight>
-              </a:rPr>
-              <a:t>Pedersen, E. J., Miller, D. L., Simpson, G. L., &amp; Ross, N. (2019). Hierarchical generalized additive models in ecology: an introduction with </a:t>
-            </a:r>
-            <a:r>
-              <a:rPr lang="en-US" sz="1400" dirty="0" err="1">
-                <a:highlight>
-                  <a:srgbClr val="FFFF00"/>
-                </a:highlight>
-              </a:rPr>
-              <a:t>mgcv</a:t>
-            </a:r>
-            <a:r>
-              <a:rPr lang="en-US" sz="1400" dirty="0">
-                <a:highlight>
-                  <a:srgbClr val="FFFF00"/>
-                </a:highlight>
-              </a:rPr>
-              <a:t>. </a:t>
-            </a:r>
-            <a:r>
-              <a:rPr lang="en-US" sz="1400" i="1" dirty="0" err="1">
-                <a:highlight>
-                  <a:srgbClr val="FFFF00"/>
-                </a:highlight>
-              </a:rPr>
-              <a:t>PeerJ</a:t>
-            </a:r>
-            <a:r>
-              <a:rPr lang="en-US" sz="1400" dirty="0">
-                <a:highlight>
-                  <a:srgbClr val="FFFF00"/>
-                </a:highlight>
-              </a:rPr>
-              <a:t>, </a:t>
-            </a:r>
-            <a:r>
-              <a:rPr lang="en-US" sz="1400" i="1" dirty="0">
-                <a:highlight>
-                  <a:srgbClr val="FFFF00"/>
-                </a:highlight>
-              </a:rPr>
-              <a:t>7</a:t>
-            </a:r>
-            <a:r>
-              <a:rPr lang="en-US" sz="1400" dirty="0">
-                <a:highlight>
-                  <a:srgbClr val="FFFF00"/>
-                </a:highlight>
-              </a:rPr>
-              <a:t>, e6876.</a:t>
-            </a:r>
-            <a:endParaRPr lang="en-US" sz="1400" dirty="0">
-              <a:highlight>
-                <a:srgbClr val="FFFF00"/>
-              </a:highlight>
-              <a:latin typeface="Avenir Next LT Pro" panose="020B0504020202020204" pitchFamily="34" charset="77"/>
-            </a:endParaRPr>
-          </a:p>
-          <a:p>
-            <a:pPr marL="457200" indent="-457200">
-              <a:buFont typeface="Arial" panose="020B0604020202020204" pitchFamily="34" charset="0"/>
-              <a:buChar char="•"/>
-            </a:pPr>
-            <a:r>
-              <a:rPr lang="en-US" sz="1400" dirty="0">
-                <a:highlight>
-                  <a:srgbClr val="FFFF00"/>
-                </a:highlight>
-                <a:latin typeface="Avenir Next LT Pro" panose="020B0504020202020204" pitchFamily="34" charset="77"/>
-              </a:rPr>
-              <a:t>Punt, A. E., Butterworth, D. S., de Moor, C. L., De Oliveira, J. A., &amp; Haddon, M. (2016). Management strategy evaluation: best practices. </a:t>
-            </a:r>
-            <a:r>
-              <a:rPr lang="en-US" sz="1400" i="1" dirty="0">
-                <a:highlight>
-                  <a:srgbClr val="FFFF00"/>
-                </a:highlight>
-                <a:latin typeface="Avenir Next LT Pro" panose="020B0504020202020204" pitchFamily="34" charset="77"/>
-              </a:rPr>
-              <a:t>Fish and fisheries</a:t>
-            </a:r>
-            <a:r>
-              <a:rPr lang="en-US" sz="1400" dirty="0">
-                <a:highlight>
-                  <a:srgbClr val="FFFF00"/>
-                </a:highlight>
-                <a:latin typeface="Avenir Next LT Pro" panose="020B0504020202020204" pitchFamily="34" charset="77"/>
-              </a:rPr>
-              <a:t>, </a:t>
-            </a:r>
-            <a:r>
-              <a:rPr lang="en-US" sz="1400" i="1" dirty="0">
-                <a:highlight>
-                  <a:srgbClr val="FFFF00"/>
-                </a:highlight>
-                <a:latin typeface="Avenir Next LT Pro" panose="020B0504020202020204" pitchFamily="34" charset="77"/>
-              </a:rPr>
-              <a:t>17</a:t>
-            </a:r>
-            <a:r>
-              <a:rPr lang="en-US" sz="1400" dirty="0">
-                <a:highlight>
-                  <a:srgbClr val="FFFF00"/>
-                </a:highlight>
-                <a:latin typeface="Avenir Next LT Pro" panose="020B0504020202020204" pitchFamily="34" charset="77"/>
-              </a:rPr>
-              <a:t>(2), 303-334.</a:t>
-            </a:r>
-          </a:p>
-          <a:p>
-            <a:pPr marL="457200" indent="-457200">
-              <a:buFont typeface="Arial" panose="020B0604020202020204" pitchFamily="34" charset="0"/>
-              <a:buChar char="•"/>
-            </a:pPr>
-            <a:endParaRPr lang="en-US" sz="3400" dirty="0"/>
-          </a:p>
-          <a:p>
-            <a:pPr marL="457200" indent="-457200">
-              <a:buFont typeface="Arial" panose="020B0604020202020204" pitchFamily="34" charset="0"/>
-              <a:buChar char="•"/>
-            </a:pPr>
-            <a:endParaRPr lang="en-US" sz="3400" dirty="0"/>
-          </a:p>
-        </p:txBody>
-      </p:sp>
-      <p:pic>
-        <p:nvPicPr>
-          <p:cNvPr id="1026" name="Picture 2" descr="Right-facing, right-eyed yellowtail flounder fish illustration. This flatfish has a reddish brown body with rusty red spots and yellow fins. Credit: NOAA Fisheries/Jack Hornady">
-            <a:extLst>
-              <a:ext uri="{FF2B5EF4-FFF2-40B4-BE49-F238E27FC236}">
-                <a16:creationId xmlns:a16="http://schemas.microsoft.com/office/drawing/2014/main" id="{7DB3728C-3AB4-937A-5A08-62986E8C40F3}"/>
-              </a:ext>
-            </a:extLst>
-          </p:cNvPr>
-          <p:cNvPicPr>
-            <a:picLocks noChangeAspect="1" noChangeArrowheads="1"/>
-          </p:cNvPicPr>
-          <p:nvPr/>
-        </p:nvPicPr>
-        <p:blipFill>
-          <a:blip r:embed="rId3">
-            <a:extLst>
-              <a:ext uri="{28A0092B-C50C-407E-A947-70E740481C1C}">
-                <a14:useLocalDpi xmlns:a14="http://schemas.microsoft.com/office/drawing/2010/main" val="0"/>
-              </a:ext>
-            </a:extLst>
-          </a:blip>
-          <a:srcRect/>
-          <a:stretch>
-            <a:fillRect/>
-          </a:stretch>
-        </p:blipFill>
-        <p:spPr bwMode="auto">
-          <a:xfrm>
-            <a:off x="33063561" y="-538221"/>
-            <a:ext cx="8585516" cy="5730832"/>
-          </a:xfrm>
-          <a:prstGeom prst="rect">
-            <a:avLst/>
-          </a:prstGeom>
-          <a:noFill/>
-          <a:extLst>
-            <a:ext uri="{909E8E84-426E-40DD-AFC4-6F175D3DCCD1}">
-              <a14:hiddenFill xmlns:a14="http://schemas.microsoft.com/office/drawing/2010/main">
-                <a:solidFill>
-                  <a:srgbClr val="FFFFFF"/>
-                </a:solidFill>
-              </a14:hiddenFill>
-            </a:ext>
-          </a:extLst>
-        </p:spPr>
-      </p:pic>
       <p:sp>
         <p:nvSpPr>
           <p:cNvPr id="46" name="Rectangle 45">
@@ -9205,7 +8526,7 @@
         </p:nvSpPr>
         <p:spPr>
           <a:xfrm>
-            <a:off x="539026" y="24111600"/>
+            <a:off x="539026" y="23937428"/>
             <a:ext cx="27550350" cy="5967060"/>
           </a:xfrm>
           <a:prstGeom prst="rect">
@@ -9264,7 +8585,7 @@
         </p:nvSpPr>
         <p:spPr>
           <a:xfrm>
-            <a:off x="413056" y="29781499"/>
+            <a:off x="413056" y="29389612"/>
             <a:ext cx="27787373" cy="2240109"/>
           </a:xfrm>
           <a:prstGeom prst="rightArrow">
@@ -9299,7 +8620,7 @@
             <a:pPr algn="ctr"/>
             <a:r>
               <a:rPr lang="en-US" sz="5100" dirty="0"/>
-              <a:t>OM Projection</a:t>
+              <a:t>Operating Model Projection</a:t>
             </a:r>
           </a:p>
         </p:txBody>
@@ -9320,7 +8641,7 @@
         </p:nvCxnSpPr>
         <p:spPr>
           <a:xfrm>
-            <a:off x="14321880" y="24982067"/>
+            <a:off x="14321880" y="24807895"/>
             <a:ext cx="0" cy="5052594"/>
           </a:xfrm>
           <a:prstGeom prst="line">
@@ -9363,8 +8684,8 @@
         </p:nvSpPr>
         <p:spPr>
           <a:xfrm>
-            <a:off x="100439" y="14560296"/>
-            <a:ext cx="13137237" cy="8688532"/>
+            <a:off x="29372822" y="20984966"/>
+            <a:ext cx="13088287" cy="5696944"/>
           </a:xfrm>
           <a:prstGeom prst="rect">
             <a:avLst/>
@@ -9512,52 +8833,29 @@
             </a:lvl9pPr>
           </a:lstStyle>
           <a:p>
-            <a:endParaRPr lang="en-US" sz="3600" b="1" dirty="0"/>
-          </a:p>
-          <a:p>
-            <a:pPr marL="457200" indent="-457200">
+            <a:pPr marL="571500" indent="-571500">
               <a:buFont typeface="Arial" panose="020B0604020202020204" pitchFamily="34" charset="0"/>
               <a:buChar char="•"/>
             </a:pPr>
             <a:r>
-              <a:rPr lang="en-US" sz="3600" b="1" dirty="0"/>
-              <a:t>Operating Model (OM)</a:t>
-            </a:r>
-            <a:r>
               <a:rPr lang="en-US" sz="3600" dirty="0"/>
-              <a:t> – “Fish Stock” Model. Simulates environmental conditions and fish stock dynamics under fishing pressures and management regimes used by the EM. </a:t>
-            </a:r>
-            <a:endParaRPr lang="en-US" sz="3600" b="1" dirty="0"/>
-          </a:p>
-          <a:p>
-            <a:pPr marL="457200" indent="-457200">
+              <a:t>Once the whamMSE package has been properly updated, we will create a series of tradeoff plots to assess the benefits and disadvantages of the catch advice created in the Evaluations</a:t>
+            </a:r>
+          </a:p>
+          <a:p>
+            <a:pPr marL="571500" indent="-571500">
               <a:buFont typeface="Arial" panose="020B0604020202020204" pitchFamily="34" charset="0"/>
               <a:buChar char="•"/>
             </a:pPr>
             <a:r>
-              <a:rPr lang="en-US" sz="3600" b="1" dirty="0"/>
-              <a:t>Estimation Model (EM)</a:t>
-            </a:r>
-            <a:r>
               <a:rPr lang="en-US" sz="3600" dirty="0"/>
-              <a:t> – “Stock Assessment” Model. Simulates stock assessments to estimate stock status and incorporates management changes from the management model.</a:t>
-            </a:r>
-            <a:endParaRPr lang="en-US" sz="3600" b="1" dirty="0"/>
-          </a:p>
-          <a:p>
-            <a:pPr marL="457200" indent="-457200">
-              <a:buFont typeface="Arial" panose="020B0604020202020204" pitchFamily="34" charset="0"/>
-              <a:buChar char="•"/>
-            </a:pPr>
-            <a:r>
-              <a:rPr lang="en-US" sz="3600" b="1" dirty="0"/>
-              <a:t>Evaluation</a:t>
-            </a:r>
-            <a:r>
-              <a:rPr lang="en-US" sz="3600" dirty="0"/>
-              <a:t> – “Management” Model. Compiles stock health metrics such as Catch, SSB, F, etc. and implements simulated management decisions. In this project, we are changing the MSE process such that at each MSE step, the most recent temperature data is incorporated into the assessment.</a:t>
-            </a:r>
-            <a:endParaRPr lang="en-US" dirty="0"/>
+              <a:t>This research then can be expanded to additional species which have been shown to exhibit different responses beyond recruitment (e.g. growth, natural mortality) or species that respond to different environmental covariates (e.g. Cold Pool Indices, seasonal oscillations)</a:t>
+            </a:r>
+            <a:endParaRPr lang="en-US" sz="3600" dirty="0">
+              <a:highlight>
+                <a:srgbClr val="FFFF00"/>
+              </a:highlight>
+            </a:endParaRPr>
           </a:p>
         </p:txBody>
       </p:sp>
@@ -9577,8 +8875,8 @@
         </p:nvSpPr>
         <p:spPr>
           <a:xfrm>
-            <a:off x="14428848" y="22625318"/>
-            <a:ext cx="12481372" cy="600164"/>
+            <a:off x="252280" y="21226823"/>
+            <a:ext cx="13797165" cy="1154162"/>
           </a:xfrm>
           <a:prstGeom prst="rect">
             <a:avLst/>
@@ -9727,16 +9025,20 @@
           </a:lstStyle>
           <a:p>
             <a:r>
-              <a:rPr lang="en-US" sz="3600" dirty="0"/>
-              <a:t>Figure 1: Extent of Georges Bank stock </a:t>
-            </a:r>
-            <a:r>
-              <a:rPr lang="en-US" sz="3600" dirty="0">
-                <a:highlight>
-                  <a:srgbClr val="FFFF00"/>
-                </a:highlight>
-              </a:rPr>
-              <a:t>cite</a:t>
+              <a:rPr lang="en-US" sz="4000" b="1" dirty="0"/>
+              <a:t>↑</a:t>
+            </a:r>
+            <a:r>
+              <a:rPr lang="en-US" sz="3200" dirty="0"/>
+              <a:t> </a:t>
+            </a:r>
+            <a:r>
+              <a:rPr lang="en-US" dirty="0"/>
+              <a:t> </a:t>
+            </a:r>
+            <a:r>
+              <a:rPr lang="en-US" sz="3200" dirty="0"/>
+              <a:t>Figure 1: Example of bottom temperature data from MOM6. The Yellowtail Georges Bank Stock Area is outlined in red</a:t>
             </a:r>
           </a:p>
         </p:txBody>
@@ -9755,7 +9057,7 @@
         </p:nvSpPr>
         <p:spPr>
           <a:xfrm>
-            <a:off x="10031499" y="24104904"/>
+            <a:off x="10031499" y="23930732"/>
             <a:ext cx="8619667" cy="877163"/>
           </a:xfrm>
           <a:prstGeom prst="rect">
@@ -9792,7 +9094,7 @@
         </p:nvCxnSpPr>
         <p:spPr>
           <a:xfrm>
-            <a:off x="21172795" y="24113739"/>
+            <a:off x="21172795" y="23939567"/>
             <a:ext cx="0" cy="5913832"/>
           </a:xfrm>
           <a:prstGeom prst="line">
@@ -9835,7 +9137,7 @@
         </p:nvCxnSpPr>
         <p:spPr>
           <a:xfrm>
-            <a:off x="7322106" y="24138547"/>
+            <a:off x="7322106" y="23964375"/>
             <a:ext cx="0" cy="5913832"/>
           </a:xfrm>
           <a:prstGeom prst="line">
@@ -9864,10 +9166,10 @@
       </p:cxnSp>
       <p:sp>
         <p:nvSpPr>
-          <p:cNvPr id="1028" name="Rectangle: Rounded Corners 1027">
+          <p:cNvPr id="1045" name="Rectangle: Rounded Corners 1044">
             <a:extLst>
               <a:ext uri="{FF2B5EF4-FFF2-40B4-BE49-F238E27FC236}">
-                <a16:creationId xmlns:a16="http://schemas.microsoft.com/office/drawing/2014/main" id="{EE377307-0FEA-936D-DE09-63F84B4C8D0D}"/>
+                <a16:creationId xmlns:a16="http://schemas.microsoft.com/office/drawing/2014/main" id="{B46EB768-C7B2-A710-8FCF-0E439A257412}"/>
               </a:ext>
             </a:extLst>
           </p:cNvPr>
@@ -9876,131 +9178,15 @@
         </p:nvSpPr>
         <p:spPr>
           <a:xfrm>
-            <a:off x="1139439" y="26917929"/>
-            <a:ext cx="5657915" cy="3112416"/>
+            <a:off x="21751328" y="25170350"/>
+            <a:ext cx="5657915" cy="3987454"/>
           </a:xfrm>
           <a:prstGeom prst="roundRect">
             <a:avLst/>
           </a:prstGeom>
           <a:solidFill>
-            <a:schemeClr val="accent5">
-              <a:lumMod val="90000"/>
-            </a:schemeClr>
-          </a:solidFill>
-          <a:ln>
-            <a:noFill/>
-          </a:ln>
-        </p:spPr>
-        <p:style>
-          <a:lnRef idx="2">
-            <a:schemeClr val="accent1">
-              <a:shade val="15000"/>
-            </a:schemeClr>
-          </a:lnRef>
-          <a:fillRef idx="1">
-            <a:schemeClr val="accent1"/>
-          </a:fillRef>
-          <a:effectRef idx="0">
-            <a:schemeClr val="accent1"/>
-          </a:effectRef>
-          <a:fontRef idx="minor">
-            <a:schemeClr val="lt1"/>
-          </a:fontRef>
-        </p:style>
-        <p:txBody>
-          <a:bodyPr rtlCol="0" anchor="t"/>
-          <a:lstStyle/>
-          <a:p>
-            <a:pPr marL="0" marR="0" lvl="0" indent="0" algn="ctr" defTabSz="914400" eaLnBrk="1" fontAlgn="auto" latinLnBrk="0" hangingPunct="1">
-              <a:lnSpc>
-                <a:spcPct val="100000"/>
-              </a:lnSpc>
-              <a:spcBef>
-                <a:spcPts val="0"/>
-              </a:spcBef>
-              <a:spcAft>
-                <a:spcPts val="0"/>
-              </a:spcAft>
-              <a:buClrTx/>
-              <a:buSzTx/>
-              <a:buFontTx/>
-              <a:buNone/>
-              <a:tabLst/>
-              <a:defRPr/>
-            </a:pPr>
-            <a:r>
-              <a:rPr kumimoji="0" lang="en-US" sz="6000" b="0" i="0" u="none" strike="noStrike" kern="0" cap="none" spc="0" normalizeH="0" baseline="0" noProof="0" dirty="0">
-                <a:ln>
-                  <a:noFill/>
-                </a:ln>
-                <a:solidFill>
-                  <a:schemeClr val="bg1"/>
-                </a:solidFill>
-                <a:effectLst/>
-                <a:uLnTx/>
-                <a:uFillTx/>
-              </a:rPr>
-              <a:t>Evaluation 0</a:t>
-            </a:r>
-          </a:p>
-          <a:p>
-            <a:pPr marL="0" marR="0" lvl="1" indent="0" defTabSz="914400" eaLnBrk="1" fontAlgn="auto" latinLnBrk="0" hangingPunct="1">
-              <a:lnSpc>
-                <a:spcPct val="100000"/>
-              </a:lnSpc>
-              <a:spcBef>
-                <a:spcPts val="0"/>
-              </a:spcBef>
-              <a:spcAft>
-                <a:spcPts val="0"/>
-              </a:spcAft>
-              <a:buClrTx/>
-              <a:buSzTx/>
-              <a:buFontTx/>
-              <a:buNone/>
-              <a:tabLst/>
-              <a:defRPr/>
-            </a:pPr>
-            <a:r>
-              <a:rPr kumimoji="0" lang="en-US" sz="3600" b="0" i="0" u="none" strike="noStrike" kern="0" cap="none" spc="0" normalizeH="0" baseline="0" noProof="0" dirty="0">
-                <a:ln>
-                  <a:noFill/>
-                </a:ln>
-                <a:solidFill>
-                  <a:schemeClr val="bg1"/>
-                </a:solidFill>
-                <a:effectLst/>
-                <a:uLnTx/>
-                <a:uFillTx/>
-              </a:rPr>
-              <a:t>Model fit to historical temperature data</a:t>
-            </a:r>
-          </a:p>
-        </p:txBody>
-      </p:sp>
-      <p:sp>
-        <p:nvSpPr>
-          <p:cNvPr id="1029" name="Arrow: Right 1028">
-            <a:extLst>
-              <a:ext uri="{FF2B5EF4-FFF2-40B4-BE49-F238E27FC236}">
-                <a16:creationId xmlns:a16="http://schemas.microsoft.com/office/drawing/2014/main" id="{756F73E7-13D5-F48F-E3FA-27E63C54E905}"/>
-              </a:ext>
-            </a:extLst>
-          </p:cNvPr>
-          <p:cNvSpPr/>
-          <p:nvPr/>
-        </p:nvSpPr>
-        <p:spPr>
-          <a:xfrm>
-            <a:off x="5136273" y="29070422"/>
-            <a:ext cx="9218247" cy="1212112"/>
-          </a:xfrm>
-          <a:prstGeom prst="rightArrow">
-            <a:avLst/>
-          </a:prstGeom>
-          <a:solidFill>
-            <a:schemeClr val="accent5">
-              <a:lumMod val="90000"/>
+            <a:schemeClr val="bg2">
+              <a:lumMod val="75000"/>
             </a:schemeClr>
           </a:solidFill>
           <a:ln>
@@ -10027,20 +9213,341 @@
           <a:bodyPr rtlCol="0" anchor="ctr"/>
           <a:lstStyle/>
           <a:p>
+            <a:pPr lvl="0" algn="ctr" defTabSz="914400">
+              <a:defRPr/>
+            </a:pPr>
+            <a:r>
+              <a:rPr lang="en-US" sz="6000" kern="0" dirty="0">
+                <a:solidFill>
+                  <a:schemeClr val="bg1"/>
+                </a:solidFill>
+              </a:rPr>
+              <a:t>Evaluation Continued…</a:t>
+            </a:r>
+          </a:p>
+        </p:txBody>
+      </p:sp>
+      <p:pic>
+        <p:nvPicPr>
+          <p:cNvPr id="1052" name="Picture 1051">
+            <a:extLst>
+              <a:ext uri="{FF2B5EF4-FFF2-40B4-BE49-F238E27FC236}">
+                <a16:creationId xmlns:a16="http://schemas.microsoft.com/office/drawing/2014/main" id="{EA66B52D-CE3D-F4CF-A059-5DC0ACAAF2D5}"/>
+              </a:ext>
+            </a:extLst>
+          </p:cNvPr>
+          <p:cNvPicPr>
+            <a:picLocks noChangeAspect="1"/>
+          </p:cNvPicPr>
+          <p:nvPr/>
+        </p:nvPicPr>
+        <p:blipFill>
+          <a:blip r:embed="rId3"/>
+          <a:stretch>
+            <a:fillRect/>
+          </a:stretch>
+        </p:blipFill>
+        <p:spPr>
+          <a:xfrm>
+            <a:off x="14605806" y="6119840"/>
+            <a:ext cx="14711678" cy="9469832"/>
+          </a:xfrm>
+          <a:prstGeom prst="rect">
+            <a:avLst/>
+          </a:prstGeom>
+        </p:spPr>
+      </p:pic>
+      <p:cxnSp>
+        <p:nvCxnSpPr>
+          <p:cNvPr id="21" name="Straight Connector 20">
+            <a:extLst>
+              <a:ext uri="{FF2B5EF4-FFF2-40B4-BE49-F238E27FC236}">
+                <a16:creationId xmlns:a16="http://schemas.microsoft.com/office/drawing/2014/main" id="{FD1501CA-F393-EA63-4E64-9C77AAA4EEFA}"/>
+              </a:ext>
+            </a:extLst>
+          </p:cNvPr>
+          <p:cNvCxnSpPr>
+            <a:cxnSpLocks/>
+          </p:cNvCxnSpPr>
+          <p:nvPr/>
+        </p:nvCxnSpPr>
+        <p:spPr>
+          <a:xfrm>
+            <a:off x="20083723" y="6048133"/>
+            <a:ext cx="0" cy="8817355"/>
+          </a:xfrm>
+          <a:prstGeom prst="line">
+            <a:avLst/>
+          </a:prstGeom>
+          <a:ln w="57150">
+            <a:solidFill>
+              <a:srgbClr val="C00000"/>
+            </a:solidFill>
+          </a:ln>
+        </p:spPr>
+        <p:style>
+          <a:lnRef idx="1">
+            <a:schemeClr val="accent1"/>
+          </a:lnRef>
+          <a:fillRef idx="0">
+            <a:schemeClr val="accent1"/>
+          </a:fillRef>
+          <a:effectRef idx="0">
+            <a:schemeClr val="accent1"/>
+          </a:effectRef>
+          <a:fontRef idx="minor">
+            <a:schemeClr val="tx1"/>
+          </a:fontRef>
+        </p:style>
+      </p:cxnSp>
+      <p:sp>
+        <p:nvSpPr>
+          <p:cNvPr id="6" name="Text Placeholder 13">
+            <a:extLst>
+              <a:ext uri="{FF2B5EF4-FFF2-40B4-BE49-F238E27FC236}">
+                <a16:creationId xmlns:a16="http://schemas.microsoft.com/office/drawing/2014/main" id="{F24D0BCB-00CD-B7AD-EB8D-C62DDE3FDE91}"/>
+              </a:ext>
+            </a:extLst>
+          </p:cNvPr>
+          <p:cNvSpPr txBox="1">
+            <a:spLocks/>
+          </p:cNvSpPr>
+          <p:nvPr/>
+        </p:nvSpPr>
+        <p:spPr>
+          <a:xfrm>
+            <a:off x="28352829" y="6367322"/>
+            <a:ext cx="15690771" cy="2139047"/>
+          </a:xfrm>
+          <a:prstGeom prst="rect">
+            <a:avLst/>
+          </a:prstGeom>
+        </p:spPr>
+        <p:txBody>
+          <a:bodyPr wrap="square" lIns="91440" tIns="45720" rIns="91440" bIns="0">
+            <a:spAutoFit/>
+          </a:bodyPr>
+          <a:lstStyle>
+            <a:lvl1pPr marL="0" indent="0" algn="l" defTabSz="4388166" rtl="0" eaLnBrk="1" latinLnBrk="0" hangingPunct="1">
+              <a:spcBef>
+                <a:spcPct val="20000"/>
+              </a:spcBef>
+              <a:buFontTx/>
+              <a:buNone/>
+              <a:defRPr sz="2800" b="0" kern="1200" spc="198" baseline="0">
+                <a:solidFill>
+                  <a:schemeClr val="tx1"/>
+                </a:solidFill>
+                <a:latin typeface="Avenir Next LT Pro" panose="020B0504020202020204" pitchFamily="34" charset="0"/>
+                <a:ea typeface="+mn-ea"/>
+                <a:cs typeface="Arial" panose="020B0604020202020204" pitchFamily="34" charset="0"/>
+              </a:defRPr>
+            </a:lvl1pPr>
+            <a:lvl2pPr marL="667227" indent="-248603" algn="l" defTabSz="4388166" rtl="0" eaLnBrk="1" latinLnBrk="0" hangingPunct="1">
+              <a:spcBef>
+                <a:spcPct val="20000"/>
+              </a:spcBef>
+              <a:buFont typeface="Arial" panose="020B0604020202020204" pitchFamily="34" charset="0"/>
+              <a:buChar char="•"/>
+              <a:defRPr sz="2800" b="0" kern="1200" spc="198" baseline="0">
+                <a:solidFill>
+                  <a:schemeClr val="tx1"/>
+                </a:solidFill>
+                <a:latin typeface="Avenir Next LT Pro" panose="020B0504020202020204" pitchFamily="34" charset="0"/>
+                <a:ea typeface="+mn-ea"/>
+                <a:cs typeface="Arial" panose="020B0604020202020204" pitchFamily="34" charset="0"/>
+              </a:defRPr>
+            </a:lvl2pPr>
+            <a:lvl3pPr marL="1132999" indent="-201454" algn="l" defTabSz="4388166" rtl="0" eaLnBrk="1" latinLnBrk="0" hangingPunct="1">
+              <a:spcBef>
+                <a:spcPct val="20000"/>
+              </a:spcBef>
+              <a:buFont typeface="Arial" panose="020B0604020202020204" pitchFamily="34" charset="0"/>
+              <a:buChar char="•"/>
+              <a:defRPr sz="2800" b="0" kern="1200" spc="198" baseline="0">
+                <a:solidFill>
+                  <a:schemeClr val="tx1"/>
+                </a:solidFill>
+                <a:latin typeface="Avenir Next LT Pro" panose="020B0504020202020204" pitchFamily="34" charset="0"/>
+                <a:ea typeface="+mn-ea"/>
+                <a:cs typeface="Arial" panose="020B0604020202020204" pitchFamily="34" charset="0"/>
+              </a:defRPr>
+            </a:lvl3pPr>
+            <a:lvl4pPr marL="1754505" indent="-311468" algn="l" defTabSz="4388166" rtl="0" eaLnBrk="1" latinLnBrk="0" hangingPunct="1">
+              <a:spcBef>
+                <a:spcPct val="20000"/>
+              </a:spcBef>
+              <a:buFont typeface="Arial" panose="020B0604020202020204" pitchFamily="34" charset="0"/>
+              <a:buChar char="•"/>
+              <a:defRPr sz="2400" b="0" kern="1200" spc="198" baseline="0">
+                <a:solidFill>
+                  <a:schemeClr val="tx1"/>
+                </a:solidFill>
+                <a:latin typeface="Avenir Next LT Pro" panose="020B0504020202020204" pitchFamily="34" charset="0"/>
+                <a:ea typeface="+mn-ea"/>
+                <a:cs typeface="Arial" panose="020B0604020202020204" pitchFamily="34" charset="0"/>
+              </a:defRPr>
+            </a:lvl4pPr>
+            <a:lvl5pPr marL="2313147" indent="-285750" algn="l" defTabSz="4388166" rtl="0" eaLnBrk="1" latinLnBrk="0" hangingPunct="1">
+              <a:spcBef>
+                <a:spcPct val="20000"/>
+              </a:spcBef>
+              <a:buFont typeface="Arial" panose="020B0604020202020204" pitchFamily="34" charset="0"/>
+              <a:buChar char="•"/>
+              <a:defRPr sz="2400" b="0" kern="1200" spc="198" baseline="0">
+                <a:solidFill>
+                  <a:schemeClr val="tx1"/>
+                </a:solidFill>
+                <a:latin typeface="Avenir Next LT Pro" panose="020B0504020202020204" pitchFamily="34" charset="0"/>
+                <a:ea typeface="+mn-ea"/>
+                <a:cs typeface="Arial" panose="020B0604020202020204" pitchFamily="34" charset="0"/>
+              </a:defRPr>
+            </a:lvl5pPr>
+            <a:lvl6pPr marL="12067458" indent="-1097042" algn="l" defTabSz="4388166" rtl="0" eaLnBrk="1" latinLnBrk="0" hangingPunct="1">
+              <a:spcBef>
+                <a:spcPct val="20000"/>
+              </a:spcBef>
+              <a:buFont typeface="Arial" pitchFamily="34" charset="0"/>
+              <a:buChar char="•"/>
+              <a:defRPr sz="9600" kern="1200">
+                <a:solidFill>
+                  <a:schemeClr val="tx1"/>
+                </a:solidFill>
+                <a:latin typeface="+mn-lt"/>
+                <a:ea typeface="+mn-ea"/>
+                <a:cs typeface="+mn-cs"/>
+              </a:defRPr>
+            </a:lvl6pPr>
+            <a:lvl7pPr marL="14261540" indent="-1097042" algn="l" defTabSz="4388166" rtl="0" eaLnBrk="1" latinLnBrk="0" hangingPunct="1">
+              <a:spcBef>
+                <a:spcPct val="20000"/>
+              </a:spcBef>
+              <a:buFont typeface="Arial" pitchFamily="34" charset="0"/>
+              <a:buChar char="•"/>
+              <a:defRPr sz="9600" kern="1200">
+                <a:solidFill>
+                  <a:schemeClr val="tx1"/>
+                </a:solidFill>
+                <a:latin typeface="+mn-lt"/>
+                <a:ea typeface="+mn-ea"/>
+                <a:cs typeface="+mn-cs"/>
+              </a:defRPr>
+            </a:lvl7pPr>
+            <a:lvl8pPr marL="16455624" indent="-1097042" algn="l" defTabSz="4388166" rtl="0" eaLnBrk="1" latinLnBrk="0" hangingPunct="1">
+              <a:spcBef>
+                <a:spcPct val="20000"/>
+              </a:spcBef>
+              <a:buFont typeface="Arial" pitchFamily="34" charset="0"/>
+              <a:buChar char="•"/>
+              <a:defRPr sz="9600" kern="1200">
+                <a:solidFill>
+                  <a:schemeClr val="tx1"/>
+                </a:solidFill>
+                <a:latin typeface="+mn-lt"/>
+                <a:ea typeface="+mn-ea"/>
+                <a:cs typeface="+mn-cs"/>
+              </a:defRPr>
+            </a:lvl8pPr>
+            <a:lvl9pPr marL="18649706" indent="-1097042" algn="l" defTabSz="4388166" rtl="0" eaLnBrk="1" latinLnBrk="0" hangingPunct="1">
+              <a:spcBef>
+                <a:spcPct val="20000"/>
+              </a:spcBef>
+              <a:buFont typeface="Arial" pitchFamily="34" charset="0"/>
+              <a:buChar char="•"/>
+              <a:defRPr sz="9600" kern="1200">
+                <a:solidFill>
+                  <a:schemeClr val="tx1"/>
+                </a:solidFill>
+                <a:latin typeface="+mn-lt"/>
+                <a:ea typeface="+mn-ea"/>
+                <a:cs typeface="+mn-cs"/>
+              </a:defRPr>
+            </a:lvl9pPr>
+          </a:lstStyle>
+          <a:p>
+            <a:r>
+              <a:rPr lang="en-US" dirty="0"/>
+              <a:t> </a:t>
+            </a:r>
+            <a:r>
+              <a:rPr lang="en-US" sz="4000" b="1" dirty="0"/>
+              <a:t>←</a:t>
+            </a:r>
+            <a:r>
+              <a:rPr lang="en-US" sz="3200" b="1" dirty="0"/>
+              <a:t> </a:t>
+            </a:r>
+            <a:r>
+              <a:rPr lang="en-US" sz="3200" dirty="0"/>
+              <a:t>Figure 3: Example temperature Projections that will be used by each EM in each Evaluation Event. The red line denotes the first evaluation event, where they models now rely on temperature projections for the environmental covariate</a:t>
+            </a:r>
+          </a:p>
+        </p:txBody>
+      </p:sp>
+      <p:sp>
+        <p:nvSpPr>
+          <p:cNvPr id="5" name="Arrow: Right 4">
+            <a:extLst>
+              <a:ext uri="{FF2B5EF4-FFF2-40B4-BE49-F238E27FC236}">
+                <a16:creationId xmlns:a16="http://schemas.microsoft.com/office/drawing/2014/main" id="{BE0C819D-021B-C18D-9847-5BFFBBABCBF6}"/>
+              </a:ext>
+            </a:extLst>
+          </p:cNvPr>
+          <p:cNvSpPr/>
+          <p:nvPr/>
+        </p:nvSpPr>
+        <p:spPr>
+          <a:xfrm>
+            <a:off x="26636288" y="27907045"/>
+            <a:ext cx="1564141" cy="1212112"/>
+          </a:xfrm>
+          <a:prstGeom prst="rightArrow">
+            <a:avLst/>
+          </a:prstGeom>
+          <a:solidFill>
+            <a:schemeClr val="bg2">
+              <a:lumMod val="75000"/>
+            </a:schemeClr>
+          </a:solidFill>
+          <a:ln>
+            <a:noFill/>
+          </a:ln>
+        </p:spPr>
+        <p:style>
+          <a:lnRef idx="2">
+            <a:schemeClr val="accent1">
+              <a:shade val="15000"/>
+            </a:schemeClr>
+          </a:lnRef>
+          <a:fillRef idx="1">
+            <a:schemeClr val="accent1"/>
+          </a:fillRef>
+          <a:effectRef idx="0">
+            <a:schemeClr val="accent1"/>
+          </a:effectRef>
+          <a:fontRef idx="minor">
+            <a:schemeClr val="lt1"/>
+          </a:fontRef>
+        </p:style>
+        <p:txBody>
+          <a:bodyPr rtlCol="0" anchor="ctr"/>
+          <a:lstStyle/>
+          <a:p>
             <a:pPr algn="ctr"/>
-            <a:r>
-              <a:rPr lang="en-US" sz="3600" dirty="0"/>
-              <a:t>EM projects catch advice 2022-2025</a:t>
-            </a:r>
+            <a:endParaRPr lang="en-US" sz="3600" dirty="0">
+              <a:solidFill>
+                <a:srgbClr val="FFFFFF"/>
+              </a:solidFill>
+            </a:endParaRPr>
           </a:p>
         </p:txBody>
       </p:sp>
       <p:grpSp>
         <p:nvGrpSpPr>
-          <p:cNvPr id="1038" name="Group 1037">
+          <p:cNvPr id="35" name="Group 34">
             <a:extLst>
               <a:ext uri="{FF2B5EF4-FFF2-40B4-BE49-F238E27FC236}">
-                <a16:creationId xmlns:a16="http://schemas.microsoft.com/office/drawing/2014/main" id="{B8100D52-ABDF-41FA-F98F-B22299D97105}"/>
+                <a16:creationId xmlns:a16="http://schemas.microsoft.com/office/drawing/2014/main" id="{9153974E-5917-5578-F681-77ABC8C057FC}"/>
               </a:ext>
             </a:extLst>
           </p:cNvPr>
@@ -10049,16 +9556,11 @@
         </p:nvGrpSpPr>
         <p:grpSpPr>
           <a:xfrm>
-            <a:off x="8000168" y="26209526"/>
-            <a:ext cx="13215081" cy="3364605"/>
-            <a:chOff x="1011105" y="26966244"/>
-            <a:chExt cx="13215081" cy="3364605"/>
+            <a:off x="8000168" y="25170350"/>
+            <a:ext cx="13172628" cy="5347209"/>
+            <a:chOff x="8000168" y="25344522"/>
+            <a:chExt cx="13172628" cy="5347209"/>
           </a:xfrm>
-          <a:solidFill>
-            <a:schemeClr val="accent5">
-              <a:lumMod val="90000"/>
-            </a:schemeClr>
-          </a:solidFill>
         </p:grpSpPr>
         <p:sp>
           <p:nvSpPr>
@@ -10074,8 +9576,8 @@
           </p:nvSpPr>
           <p:spPr>
             <a:xfrm>
-              <a:off x="1011105" y="26966244"/>
-              <a:ext cx="5657915" cy="3112416"/>
+              <a:off x="8000168" y="25344522"/>
+              <a:ext cx="5657915" cy="3977420"/>
             </a:xfrm>
             <a:prstGeom prst="roundRect">
               <a:avLst/>
@@ -10118,11 +9620,21 @@
                     <a:schemeClr val="bg1"/>
                   </a:solidFill>
                 </a:rPr>
-                <a:t>Evaluation 1</a:t>
+                <a:t>Evaluation 2</a:t>
               </a:r>
             </a:p>
             <a:p>
-              <a:pPr marL="0" lvl="1" defTabSz="914400">
+              <a:pPr marL="0" lvl="1" algn="ctr" defTabSz="914400">
+                <a:defRPr/>
+              </a:pPr>
+              <a:endParaRPr lang="en-US" sz="3600" kern="0" dirty="0">
+                <a:solidFill>
+                  <a:schemeClr val="bg1"/>
+                </a:solidFill>
+              </a:endParaRPr>
+            </a:p>
+            <a:p>
+              <a:pPr marL="0" lvl="1" algn="ctr" defTabSz="914400">
                 <a:defRPr/>
               </a:pPr>
               <a:r>
@@ -10133,6 +9645,184 @@
                 </a:rPr>
                 <a:t>2022-2025 temperature data incorporated from om</a:t>
               </a:r>
+            </a:p>
+          </p:txBody>
+        </p:sp>
+        <p:sp>
+          <p:nvSpPr>
+            <p:cNvPr id="10" name="Block Arc 9">
+              <a:extLst>
+                <a:ext uri="{FF2B5EF4-FFF2-40B4-BE49-F238E27FC236}">
+                  <a16:creationId xmlns:a16="http://schemas.microsoft.com/office/drawing/2014/main" id="{50E536F5-5D43-CEF4-2A37-94FE76341F2F}"/>
+                </a:ext>
+              </a:extLst>
+            </p:cNvPr>
+            <p:cNvSpPr/>
+            <p:nvPr/>
+          </p:nvSpPr>
+          <p:spPr>
+            <a:xfrm rot="5400000">
+              <a:off x="11998859" y="27291648"/>
+              <a:ext cx="2350274" cy="2280410"/>
+            </a:xfrm>
+            <a:prstGeom prst="blockArc">
+              <a:avLst>
+                <a:gd name="adj1" fmla="val 10800000"/>
+                <a:gd name="adj2" fmla="val 16523304"/>
+                <a:gd name="adj3" fmla="val 25964"/>
+              </a:avLst>
+            </a:prstGeom>
+            <a:solidFill>
+              <a:schemeClr val="accent5">
+                <a:lumMod val="75000"/>
+              </a:schemeClr>
+            </a:solidFill>
+            <a:ln>
+              <a:noFill/>
+            </a:ln>
+          </p:spPr>
+          <p:style>
+            <a:lnRef idx="2">
+              <a:schemeClr val="accent1">
+                <a:shade val="15000"/>
+              </a:schemeClr>
+            </a:lnRef>
+            <a:fillRef idx="1">
+              <a:schemeClr val="accent1"/>
+            </a:fillRef>
+            <a:effectRef idx="0">
+              <a:schemeClr val="accent1"/>
+            </a:effectRef>
+            <a:fontRef idx="minor">
+              <a:schemeClr val="lt1"/>
+            </a:fontRef>
+          </p:style>
+          <p:txBody>
+            <a:bodyPr rtlCol="0" anchor="ctr"/>
+            <a:lstStyle/>
+            <a:p>
+              <a:pPr algn="ctr"/>
+              <a:endParaRPr lang="en-US">
+                <a:solidFill>
+                  <a:schemeClr val="tx1"/>
+                </a:solidFill>
+              </a:endParaRPr>
+            </a:p>
+          </p:txBody>
+        </p:sp>
+        <p:sp>
+          <p:nvSpPr>
+            <p:cNvPr id="13" name="Block Arc 12">
+              <a:extLst>
+                <a:ext uri="{FF2B5EF4-FFF2-40B4-BE49-F238E27FC236}">
+                  <a16:creationId xmlns:a16="http://schemas.microsoft.com/office/drawing/2014/main" id="{9D93AFFF-1FCD-DD0F-CBDB-58B11C3767AB}"/>
+                </a:ext>
+              </a:extLst>
+            </p:cNvPr>
+            <p:cNvSpPr/>
+            <p:nvPr/>
+          </p:nvSpPr>
+          <p:spPr>
+            <a:xfrm rot="16200000">
+              <a:off x="13750991" y="28028940"/>
+              <a:ext cx="2316910" cy="2375716"/>
+            </a:xfrm>
+            <a:prstGeom prst="blockArc">
+              <a:avLst>
+                <a:gd name="adj1" fmla="val 10800000"/>
+                <a:gd name="adj2" fmla="val 16497482"/>
+                <a:gd name="adj3" fmla="val 25418"/>
+              </a:avLst>
+            </a:prstGeom>
+            <a:solidFill>
+              <a:schemeClr val="accent5">
+                <a:lumMod val="75000"/>
+              </a:schemeClr>
+            </a:solidFill>
+            <a:ln>
+              <a:noFill/>
+            </a:ln>
+          </p:spPr>
+          <p:style>
+            <a:lnRef idx="2">
+              <a:schemeClr val="accent1">
+                <a:shade val="15000"/>
+              </a:schemeClr>
+            </a:lnRef>
+            <a:fillRef idx="1">
+              <a:schemeClr val="accent1"/>
+            </a:fillRef>
+            <a:effectRef idx="0">
+              <a:schemeClr val="accent1"/>
+            </a:effectRef>
+            <a:fontRef idx="minor">
+              <a:schemeClr val="lt1"/>
+            </a:fontRef>
+          </p:style>
+          <p:txBody>
+            <a:bodyPr rtlCol="0" anchor="ctr"/>
+            <a:lstStyle/>
+            <a:p>
+              <a:pPr algn="ctr"/>
+              <a:endParaRPr lang="en-US">
+                <a:solidFill>
+                  <a:schemeClr val="tx1"/>
+                </a:solidFill>
+              </a:endParaRPr>
+            </a:p>
+          </p:txBody>
+        </p:sp>
+        <p:sp>
+          <p:nvSpPr>
+            <p:cNvPr id="16" name="Rectangle 15">
+              <a:extLst>
+                <a:ext uri="{FF2B5EF4-FFF2-40B4-BE49-F238E27FC236}">
+                  <a16:creationId xmlns:a16="http://schemas.microsoft.com/office/drawing/2014/main" id="{1A0A0322-492B-09DB-C9AF-96D6511AC7B4}"/>
+                </a:ext>
+              </a:extLst>
+            </p:cNvPr>
+            <p:cNvSpPr/>
+            <p:nvPr/>
+          </p:nvSpPr>
+          <p:spPr>
+            <a:xfrm>
+              <a:off x="13719482" y="28264422"/>
+              <a:ext cx="597230" cy="956804"/>
+            </a:xfrm>
+            <a:prstGeom prst="rect">
+              <a:avLst/>
+            </a:prstGeom>
+            <a:solidFill>
+              <a:schemeClr val="accent5">
+                <a:lumMod val="75000"/>
+              </a:schemeClr>
+            </a:solidFill>
+            <a:ln>
+              <a:noFill/>
+            </a:ln>
+          </p:spPr>
+          <p:style>
+            <a:lnRef idx="2">
+              <a:schemeClr val="accent1">
+                <a:shade val="15000"/>
+              </a:schemeClr>
+            </a:lnRef>
+            <a:fillRef idx="1">
+              <a:schemeClr val="accent1"/>
+            </a:fillRef>
+            <a:effectRef idx="0">
+              <a:schemeClr val="accent1"/>
+            </a:effectRef>
+            <a:fontRef idx="minor">
+              <a:schemeClr val="lt1"/>
+            </a:fontRef>
+          </p:style>
+          <p:txBody>
+            <a:bodyPr rtlCol="0" anchor="ctr"/>
+            <a:lstStyle/>
+            <a:p>
+              <a:pPr algn="ctr"/>
+              <a:endParaRPr lang="en-US"/>
             </a:p>
           </p:txBody>
         </p:sp>
@@ -10150,8 +9840,8 @@
           </p:nvSpPr>
           <p:spPr>
             <a:xfrm>
-              <a:off x="5007939" y="29118737"/>
-              <a:ext cx="9218247" cy="1212112"/>
+              <a:off x="14874389" y="29479619"/>
+              <a:ext cx="6298407" cy="1212112"/>
             </a:xfrm>
             <a:prstGeom prst="rightArrow">
               <a:avLst/>
@@ -10203,7 +9893,7 @@
                 <a:defRPr/>
               </a:pPr>
               <a:r>
-                <a:rPr kumimoji="0" lang="en-US" sz="3600" b="0" i="0" u="none" strike="noStrike" kern="1200" cap="none" spc="0" normalizeH="0" baseline="0" noProof="0" dirty="0">
+                <a:rPr kumimoji="0" lang="en-US" sz="2800" b="0" i="0" u="none" strike="noStrike" kern="1200" cap="none" spc="0" normalizeH="0" baseline="0" noProof="0" dirty="0">
                   <a:ln>
                     <a:noFill/>
                   </a:ln>
@@ -10217,7 +9907,7 @@
                   <a:ea typeface="+mn-ea"/>
                   <a:cs typeface="+mn-cs"/>
                 </a:rPr>
-                <a:t>EM projects catch advice 2022-2025</a:t>
+                <a:t>EM projects catch advice 2025-2028</a:t>
               </a:r>
             </a:p>
           </p:txBody>
@@ -10225,10 +9915,10 @@
       </p:grpSp>
       <p:grpSp>
         <p:nvGrpSpPr>
-          <p:cNvPr id="1041" name="Group 1040">
+          <p:cNvPr id="36" name="Group 35">
             <a:extLst>
               <a:ext uri="{FF2B5EF4-FFF2-40B4-BE49-F238E27FC236}">
-                <a16:creationId xmlns:a16="http://schemas.microsoft.com/office/drawing/2014/main" id="{DD88E3F4-811E-1112-70D5-7D2D652A3932}"/>
+                <a16:creationId xmlns:a16="http://schemas.microsoft.com/office/drawing/2014/main" id="{BEA8D1A8-BD3B-0DCB-0B40-55092F7806CA}"/>
               </a:ext>
             </a:extLst>
           </p:cNvPr>
@@ -10237,23 +9927,23 @@
         </p:nvGrpSpPr>
         <p:grpSpPr>
           <a:xfrm>
-            <a:off x="14909446" y="25494199"/>
-            <a:ext cx="13215081" cy="3364605"/>
-            <a:chOff x="1011105" y="26924680"/>
-            <a:chExt cx="13215081" cy="3364605"/>
+            <a:off x="989768" y="25170350"/>
+            <a:ext cx="13172628" cy="5347209"/>
+            <a:chOff x="8000168" y="25344522"/>
+            <a:chExt cx="13172628" cy="5347209"/>
           </a:xfrm>
           <a:solidFill>
-            <a:schemeClr val="bg2">
-              <a:lumMod val="50000"/>
+            <a:schemeClr val="accent5">
+              <a:lumMod val="90000"/>
             </a:schemeClr>
           </a:solidFill>
         </p:grpSpPr>
         <p:sp>
           <p:nvSpPr>
-            <p:cNvPr id="1042" name="Rectangle: Rounded Corners 1041">
+            <p:cNvPr id="37" name="Rectangle: Rounded Corners 36">
               <a:extLst>
                 <a:ext uri="{FF2B5EF4-FFF2-40B4-BE49-F238E27FC236}">
-                  <a16:creationId xmlns:a16="http://schemas.microsoft.com/office/drawing/2014/main" id="{7E44691A-E911-7D73-FAB3-0CD4EE18C4E8}"/>
+                  <a16:creationId xmlns:a16="http://schemas.microsoft.com/office/drawing/2014/main" id="{41AF50E5-C083-404F-9FB7-63991AF0DF8F}"/>
                 </a:ext>
               </a:extLst>
             </p:cNvPr>
@@ -10262,8 +9952,8 @@
           </p:nvSpPr>
           <p:spPr>
             <a:xfrm>
-              <a:off x="1011105" y="26924680"/>
-              <a:ext cx="5657915" cy="3112416"/>
+              <a:off x="8000168" y="25344522"/>
+              <a:ext cx="5657915" cy="3977420"/>
             </a:xfrm>
             <a:prstGeom prst="roundRect">
               <a:avLst/>
@@ -10302,11 +9992,21 @@
                     <a:schemeClr val="bg1"/>
                   </a:solidFill>
                 </a:rPr>
-                <a:t>Evaluation 2</a:t>
+                <a:t>Evaluation 1</a:t>
               </a:r>
             </a:p>
             <a:p>
-              <a:pPr marL="0" lvl="1" defTabSz="914400">
+              <a:pPr marL="0" lvl="1" algn="ctr" defTabSz="914400">
+                <a:defRPr/>
+              </a:pPr>
+              <a:endParaRPr lang="en-US" sz="3600" kern="0" dirty="0">
+                <a:solidFill>
+                  <a:schemeClr val="bg1"/>
+                </a:solidFill>
+              </a:endParaRPr>
+            </a:p>
+            <a:p>
+              <a:pPr marL="0" lvl="1" algn="ctr" defTabSz="914400">
                 <a:defRPr/>
               </a:pPr>
               <a:r>
@@ -10315,17 +10015,133 @@
                     <a:schemeClr val="bg1"/>
                   </a:solidFill>
                 </a:rPr>
-                <a:t>2025-2028 temperature data incorporated from om</a:t>
+                <a:t>Model fit to historical temperature data</a:t>
               </a:r>
             </a:p>
           </p:txBody>
         </p:sp>
         <p:sp>
           <p:nvSpPr>
-            <p:cNvPr id="1043" name="Arrow: Right 1042">
+            <p:cNvPr id="38" name="Block Arc 37">
               <a:extLst>
                 <a:ext uri="{FF2B5EF4-FFF2-40B4-BE49-F238E27FC236}">
-                  <a16:creationId xmlns:a16="http://schemas.microsoft.com/office/drawing/2014/main" id="{ECF6C77F-C261-B6E7-8F23-19B52770E43A}"/>
+                  <a16:creationId xmlns:a16="http://schemas.microsoft.com/office/drawing/2014/main" id="{7D41787F-3108-941D-A30E-9120ADDD4F71}"/>
+                </a:ext>
+              </a:extLst>
+            </p:cNvPr>
+            <p:cNvSpPr/>
+            <p:nvPr/>
+          </p:nvSpPr>
+          <p:spPr>
+            <a:xfrm rot="5400000">
+              <a:off x="11998859" y="27291648"/>
+              <a:ext cx="2350274" cy="2280410"/>
+            </a:xfrm>
+            <a:prstGeom prst="blockArc">
+              <a:avLst>
+                <a:gd name="adj1" fmla="val 10800000"/>
+                <a:gd name="adj2" fmla="val 16523304"/>
+                <a:gd name="adj3" fmla="val 25964"/>
+              </a:avLst>
+            </a:prstGeom>
+            <a:grpFill/>
+            <a:ln>
+              <a:noFill/>
+            </a:ln>
+          </p:spPr>
+          <p:style>
+            <a:lnRef idx="2">
+              <a:schemeClr val="accent1">
+                <a:shade val="15000"/>
+              </a:schemeClr>
+            </a:lnRef>
+            <a:fillRef idx="1">
+              <a:schemeClr val="accent1"/>
+            </a:fillRef>
+            <a:effectRef idx="0">
+              <a:schemeClr val="accent1"/>
+            </a:effectRef>
+            <a:fontRef idx="minor">
+              <a:schemeClr val="lt1"/>
+            </a:fontRef>
+          </p:style>
+          <p:txBody>
+            <a:bodyPr rtlCol="0" anchor="ctr"/>
+            <a:lstStyle/>
+            <a:p>
+              <a:pPr algn="ctr"/>
+              <a:endParaRPr lang="en-US">
+                <a:solidFill>
+                  <a:schemeClr val="tx1"/>
+                </a:solidFill>
+              </a:endParaRPr>
+            </a:p>
+          </p:txBody>
+        </p:sp>
+        <p:sp>
+          <p:nvSpPr>
+            <p:cNvPr id="39" name="Block Arc 38">
+              <a:extLst>
+                <a:ext uri="{FF2B5EF4-FFF2-40B4-BE49-F238E27FC236}">
+                  <a16:creationId xmlns:a16="http://schemas.microsoft.com/office/drawing/2014/main" id="{BE8207E1-8FF4-1DBB-10E1-1C02AC68908A}"/>
+                </a:ext>
+              </a:extLst>
+            </p:cNvPr>
+            <p:cNvSpPr/>
+            <p:nvPr/>
+          </p:nvSpPr>
+          <p:spPr>
+            <a:xfrm rot="16200000">
+              <a:off x="13750991" y="28028940"/>
+              <a:ext cx="2316910" cy="2375716"/>
+            </a:xfrm>
+            <a:prstGeom prst="blockArc">
+              <a:avLst>
+                <a:gd name="adj1" fmla="val 10800000"/>
+                <a:gd name="adj2" fmla="val 16497482"/>
+                <a:gd name="adj3" fmla="val 25418"/>
+              </a:avLst>
+            </a:prstGeom>
+            <a:grpFill/>
+            <a:ln>
+              <a:noFill/>
+            </a:ln>
+          </p:spPr>
+          <p:style>
+            <a:lnRef idx="2">
+              <a:schemeClr val="accent1">
+                <a:shade val="15000"/>
+              </a:schemeClr>
+            </a:lnRef>
+            <a:fillRef idx="1">
+              <a:schemeClr val="accent1"/>
+            </a:fillRef>
+            <a:effectRef idx="0">
+              <a:schemeClr val="accent1"/>
+            </a:effectRef>
+            <a:fontRef idx="minor">
+              <a:schemeClr val="lt1"/>
+            </a:fontRef>
+          </p:style>
+          <p:txBody>
+            <a:bodyPr rtlCol="0" anchor="ctr"/>
+            <a:lstStyle/>
+            <a:p>
+              <a:pPr algn="ctr"/>
+              <a:endParaRPr lang="en-US">
+                <a:solidFill>
+                  <a:schemeClr val="tx1"/>
+                </a:solidFill>
+              </a:endParaRPr>
+            </a:p>
+          </p:txBody>
+        </p:sp>
+        <p:sp>
+          <p:nvSpPr>
+            <p:cNvPr id="40" name="Rectangle 39">
+              <a:extLst>
+                <a:ext uri="{FF2B5EF4-FFF2-40B4-BE49-F238E27FC236}">
+                  <a16:creationId xmlns:a16="http://schemas.microsoft.com/office/drawing/2014/main" id="{12C7D6CD-778D-86DE-C5E4-604666B284BA}"/>
                 </a:ext>
               </a:extLst>
             </p:cNvPr>
@@ -10334,8 +10150,58 @@
           </p:nvSpPr>
           <p:spPr>
             <a:xfrm>
-              <a:off x="5007939" y="29077173"/>
-              <a:ext cx="9218247" cy="1212112"/>
+              <a:off x="13719482" y="28264422"/>
+              <a:ext cx="597230" cy="956804"/>
+            </a:xfrm>
+            <a:prstGeom prst="rect">
+              <a:avLst/>
+            </a:prstGeom>
+            <a:grpFill/>
+            <a:ln>
+              <a:noFill/>
+            </a:ln>
+          </p:spPr>
+          <p:style>
+            <a:lnRef idx="2">
+              <a:schemeClr val="accent1">
+                <a:shade val="15000"/>
+              </a:schemeClr>
+            </a:lnRef>
+            <a:fillRef idx="1">
+              <a:schemeClr val="accent1"/>
+            </a:fillRef>
+            <a:effectRef idx="0">
+              <a:schemeClr val="accent1"/>
+            </a:effectRef>
+            <a:fontRef idx="minor">
+              <a:schemeClr val="lt1"/>
+            </a:fontRef>
+          </p:style>
+          <p:txBody>
+            <a:bodyPr rtlCol="0" anchor="ctr"/>
+            <a:lstStyle/>
+            <a:p>
+              <a:pPr algn="ctr"/>
+              <a:endParaRPr lang="en-US"/>
+            </a:p>
+          </p:txBody>
+        </p:sp>
+        <p:sp>
+          <p:nvSpPr>
+            <p:cNvPr id="41" name="Arrow: Right 40">
+              <a:extLst>
+                <a:ext uri="{FF2B5EF4-FFF2-40B4-BE49-F238E27FC236}">
+                  <a16:creationId xmlns:a16="http://schemas.microsoft.com/office/drawing/2014/main" id="{6E8F8FAD-D404-956C-1906-2D1EA6F1F3ED}"/>
+                </a:ext>
+              </a:extLst>
+            </p:cNvPr>
+            <p:cNvSpPr/>
+            <p:nvPr/>
+          </p:nvSpPr>
+          <p:spPr>
+            <a:xfrm>
+              <a:off x="14874389" y="29479619"/>
+              <a:ext cx="6298407" cy="1212112"/>
             </a:xfrm>
             <a:prstGeom prst="rightArrow">
               <a:avLst/>
@@ -10365,14 +10231,470 @@
             <a:bodyPr rtlCol="0" anchor="ctr"/>
             <a:lstStyle/>
             <a:p>
-              <a:pPr algn="ctr"/>
+              <a:pPr marL="0" marR="0" lvl="0" indent="0" algn="ctr" defTabSz="4388166" rtl="0" eaLnBrk="1" fontAlgn="auto" latinLnBrk="0" hangingPunct="1">
+                <a:lnSpc>
+                  <a:spcPct val="100000"/>
+                </a:lnSpc>
+                <a:spcBef>
+                  <a:spcPts val="0"/>
+                </a:spcBef>
+                <a:spcAft>
+                  <a:spcPts val="0"/>
+                </a:spcAft>
+                <a:buClrTx/>
+                <a:buSzTx/>
+                <a:buFontTx/>
+                <a:buNone/>
+                <a:tabLst/>
+                <a:defRPr/>
+              </a:pPr>
               <a:r>
-                <a:rPr lang="en-US" sz="3600" dirty="0">
+                <a:rPr kumimoji="0" lang="en-US" sz="2800" b="0" i="0" u="none" strike="noStrike" kern="1200" cap="none" spc="0" normalizeH="0" baseline="0" noProof="0" dirty="0">
+                  <a:ln>
+                    <a:noFill/>
+                  </a:ln>
                   <a:solidFill>
                     <a:srgbClr val="FFFFFF"/>
                   </a:solidFill>
+                  <a:effectLst/>
+                  <a:uLnTx/>
+                  <a:uFillTx/>
+                  <a:latin typeface="Arial"/>
+                  <a:ea typeface="+mn-ea"/>
+                  <a:cs typeface="+mn-cs"/>
                 </a:rPr>
-                <a:t>EM projects catch advice 2022-2025</a:t>
+                <a:t>EM projects catch advice 202</a:t>
+              </a:r>
+              <a:r>
+                <a:rPr lang="en-US" sz="2800" dirty="0">
+                  <a:solidFill>
+                    <a:srgbClr val="FFFFFF"/>
+                  </a:solidFill>
+                  <a:latin typeface="Arial"/>
+                </a:rPr>
+                <a:t>2</a:t>
+              </a:r>
+              <a:r>
+                <a:rPr kumimoji="0" lang="en-US" sz="2800" b="0" i="0" u="none" strike="noStrike" kern="1200" cap="none" spc="0" normalizeH="0" baseline="0" noProof="0" dirty="0">
+                  <a:ln>
+                    <a:noFill/>
+                  </a:ln>
+                  <a:solidFill>
+                    <a:srgbClr val="FFFFFF"/>
+                  </a:solidFill>
+                  <a:effectLst/>
+                  <a:uLnTx/>
+                  <a:uFillTx/>
+                  <a:latin typeface="Arial"/>
+                  <a:ea typeface="+mn-ea"/>
+                  <a:cs typeface="+mn-cs"/>
+                </a:rPr>
+                <a:t>-202</a:t>
+              </a:r>
+              <a:r>
+                <a:rPr lang="en-US" sz="2800" dirty="0">
+                  <a:solidFill>
+                    <a:srgbClr val="FFFFFF"/>
+                  </a:solidFill>
+                  <a:latin typeface="Arial"/>
+                </a:rPr>
+                <a:t>5</a:t>
+              </a:r>
+              <a:endParaRPr kumimoji="0" lang="en-US" sz="2800" b="0" i="0" u="none" strike="noStrike" kern="1200" cap="none" spc="0" normalizeH="0" baseline="0" noProof="0" dirty="0">
+                <a:ln>
+                  <a:noFill/>
+                </a:ln>
+                <a:solidFill>
+                  <a:srgbClr val="FFFFFF"/>
+                </a:solidFill>
+                <a:effectLst/>
+                <a:uLnTx/>
+                <a:uFillTx/>
+                <a:latin typeface="Arial"/>
+                <a:ea typeface="+mn-ea"/>
+                <a:cs typeface="+mn-cs"/>
+              </a:endParaRPr>
+            </a:p>
+          </p:txBody>
+        </p:sp>
+      </p:grpSp>
+      <p:grpSp>
+        <p:nvGrpSpPr>
+          <p:cNvPr id="44" name="Group 43">
+            <a:extLst>
+              <a:ext uri="{FF2B5EF4-FFF2-40B4-BE49-F238E27FC236}">
+                <a16:creationId xmlns:a16="http://schemas.microsoft.com/office/drawing/2014/main" id="{EE55779E-0639-B084-AB82-A85102C3D166}"/>
+              </a:ext>
+            </a:extLst>
+          </p:cNvPr>
+          <p:cNvGrpSpPr/>
+          <p:nvPr/>
+        </p:nvGrpSpPr>
+        <p:grpSpPr>
+          <a:xfrm>
+            <a:off x="14858168" y="25170350"/>
+            <a:ext cx="13172628" cy="5347209"/>
+            <a:chOff x="8000168" y="25344522"/>
+            <a:chExt cx="13172628" cy="5347209"/>
+          </a:xfrm>
+          <a:solidFill>
+            <a:schemeClr val="bg2">
+              <a:lumMod val="50000"/>
+            </a:schemeClr>
+          </a:solidFill>
+        </p:grpSpPr>
+        <p:sp>
+          <p:nvSpPr>
+            <p:cNvPr id="45" name="Rectangle: Rounded Corners 44">
+              <a:extLst>
+                <a:ext uri="{FF2B5EF4-FFF2-40B4-BE49-F238E27FC236}">
+                  <a16:creationId xmlns:a16="http://schemas.microsoft.com/office/drawing/2014/main" id="{992908C7-A987-00ED-69C3-29C23B6F3786}"/>
+                </a:ext>
+              </a:extLst>
+            </p:cNvPr>
+            <p:cNvSpPr/>
+            <p:nvPr/>
+          </p:nvSpPr>
+          <p:spPr>
+            <a:xfrm>
+              <a:off x="8000168" y="25344522"/>
+              <a:ext cx="5657915" cy="3977420"/>
+            </a:xfrm>
+            <a:prstGeom prst="roundRect">
+              <a:avLst/>
+            </a:prstGeom>
+            <a:grpFill/>
+            <a:ln>
+              <a:noFill/>
+            </a:ln>
+          </p:spPr>
+          <p:style>
+            <a:lnRef idx="2">
+              <a:schemeClr val="accent1">
+                <a:shade val="15000"/>
+              </a:schemeClr>
+            </a:lnRef>
+            <a:fillRef idx="1">
+              <a:schemeClr val="accent1"/>
+            </a:fillRef>
+            <a:effectRef idx="0">
+              <a:schemeClr val="accent1"/>
+            </a:effectRef>
+            <a:fontRef idx="minor">
+              <a:schemeClr val="lt1"/>
+            </a:fontRef>
+          </p:style>
+          <p:txBody>
+            <a:bodyPr rtlCol="0" anchor="ctr"/>
+            <a:lstStyle/>
+            <a:p>
+              <a:pPr lvl="0" algn="ctr" defTabSz="914400">
+                <a:defRPr/>
+              </a:pPr>
+              <a:r>
+                <a:rPr lang="en-US" sz="6000" kern="0" dirty="0">
+                  <a:solidFill>
+                    <a:schemeClr val="bg1"/>
+                  </a:solidFill>
+                </a:rPr>
+                <a:t>Evaluation 3</a:t>
+              </a:r>
+            </a:p>
+            <a:p>
+              <a:pPr marL="0" lvl="1" algn="ctr" defTabSz="914400">
+                <a:defRPr/>
+              </a:pPr>
+              <a:endParaRPr lang="en-US" sz="3600" kern="0" dirty="0">
+                <a:solidFill>
+                  <a:schemeClr val="bg1"/>
+                </a:solidFill>
+              </a:endParaRPr>
+            </a:p>
+            <a:p>
+              <a:pPr marL="0" lvl="1" algn="ctr" defTabSz="914400">
+                <a:defRPr/>
+              </a:pPr>
+              <a:r>
+                <a:rPr lang="en-US" sz="3600" kern="0" dirty="0">
+                  <a:solidFill>
+                    <a:schemeClr val="bg1"/>
+                  </a:solidFill>
+                </a:rPr>
+                <a:t>2025-2028 temperature data incorporated from om</a:t>
+              </a:r>
+            </a:p>
+          </p:txBody>
+        </p:sp>
+        <p:sp>
+          <p:nvSpPr>
+            <p:cNvPr id="47" name="Block Arc 46">
+              <a:extLst>
+                <a:ext uri="{FF2B5EF4-FFF2-40B4-BE49-F238E27FC236}">
+                  <a16:creationId xmlns:a16="http://schemas.microsoft.com/office/drawing/2014/main" id="{BE53BD38-43D1-87D6-ECE9-7DA39A629668}"/>
+                </a:ext>
+              </a:extLst>
+            </p:cNvPr>
+            <p:cNvSpPr/>
+            <p:nvPr/>
+          </p:nvSpPr>
+          <p:spPr>
+            <a:xfrm rot="5400000">
+              <a:off x="11998859" y="27291648"/>
+              <a:ext cx="2350274" cy="2280410"/>
+            </a:xfrm>
+            <a:prstGeom prst="blockArc">
+              <a:avLst>
+                <a:gd name="adj1" fmla="val 10800000"/>
+                <a:gd name="adj2" fmla="val 16523304"/>
+                <a:gd name="adj3" fmla="val 25964"/>
+              </a:avLst>
+            </a:prstGeom>
+            <a:grpFill/>
+            <a:ln>
+              <a:noFill/>
+            </a:ln>
+          </p:spPr>
+          <p:style>
+            <a:lnRef idx="2">
+              <a:schemeClr val="accent1">
+                <a:shade val="15000"/>
+              </a:schemeClr>
+            </a:lnRef>
+            <a:fillRef idx="1">
+              <a:schemeClr val="accent1"/>
+            </a:fillRef>
+            <a:effectRef idx="0">
+              <a:schemeClr val="accent1"/>
+            </a:effectRef>
+            <a:fontRef idx="minor">
+              <a:schemeClr val="lt1"/>
+            </a:fontRef>
+          </p:style>
+          <p:txBody>
+            <a:bodyPr rtlCol="0" anchor="ctr"/>
+            <a:lstStyle/>
+            <a:p>
+              <a:pPr algn="ctr"/>
+              <a:endParaRPr lang="en-US">
+                <a:solidFill>
+                  <a:schemeClr val="tx1"/>
+                </a:solidFill>
+              </a:endParaRPr>
+            </a:p>
+          </p:txBody>
+        </p:sp>
+        <p:sp>
+          <p:nvSpPr>
+            <p:cNvPr id="48" name="Block Arc 47">
+              <a:extLst>
+                <a:ext uri="{FF2B5EF4-FFF2-40B4-BE49-F238E27FC236}">
+                  <a16:creationId xmlns:a16="http://schemas.microsoft.com/office/drawing/2014/main" id="{3CD4A95E-78AB-9815-53F5-52E40CD578D0}"/>
+                </a:ext>
+              </a:extLst>
+            </p:cNvPr>
+            <p:cNvSpPr/>
+            <p:nvPr/>
+          </p:nvSpPr>
+          <p:spPr>
+            <a:xfrm rot="16200000">
+              <a:off x="13750991" y="28028940"/>
+              <a:ext cx="2316910" cy="2375716"/>
+            </a:xfrm>
+            <a:prstGeom prst="blockArc">
+              <a:avLst>
+                <a:gd name="adj1" fmla="val 10800000"/>
+                <a:gd name="adj2" fmla="val 16497482"/>
+                <a:gd name="adj3" fmla="val 25418"/>
+              </a:avLst>
+            </a:prstGeom>
+            <a:grpFill/>
+            <a:ln>
+              <a:noFill/>
+            </a:ln>
+          </p:spPr>
+          <p:style>
+            <a:lnRef idx="2">
+              <a:schemeClr val="accent1">
+                <a:shade val="15000"/>
+              </a:schemeClr>
+            </a:lnRef>
+            <a:fillRef idx="1">
+              <a:schemeClr val="accent1"/>
+            </a:fillRef>
+            <a:effectRef idx="0">
+              <a:schemeClr val="accent1"/>
+            </a:effectRef>
+            <a:fontRef idx="minor">
+              <a:schemeClr val="lt1"/>
+            </a:fontRef>
+          </p:style>
+          <p:txBody>
+            <a:bodyPr rtlCol="0" anchor="ctr"/>
+            <a:lstStyle/>
+            <a:p>
+              <a:pPr algn="ctr"/>
+              <a:endParaRPr lang="en-US">
+                <a:solidFill>
+                  <a:schemeClr val="tx1"/>
+                </a:solidFill>
+              </a:endParaRPr>
+            </a:p>
+          </p:txBody>
+        </p:sp>
+        <p:sp>
+          <p:nvSpPr>
+            <p:cNvPr id="49" name="Rectangle 48">
+              <a:extLst>
+                <a:ext uri="{FF2B5EF4-FFF2-40B4-BE49-F238E27FC236}">
+                  <a16:creationId xmlns:a16="http://schemas.microsoft.com/office/drawing/2014/main" id="{3BB5252F-8E10-01DA-F38D-98F4D2C5E90D}"/>
+                </a:ext>
+              </a:extLst>
+            </p:cNvPr>
+            <p:cNvSpPr/>
+            <p:nvPr/>
+          </p:nvSpPr>
+          <p:spPr>
+            <a:xfrm>
+              <a:off x="13719482" y="28264422"/>
+              <a:ext cx="597230" cy="956804"/>
+            </a:xfrm>
+            <a:prstGeom prst="rect">
+              <a:avLst/>
+            </a:prstGeom>
+            <a:grpFill/>
+            <a:ln>
+              <a:noFill/>
+            </a:ln>
+          </p:spPr>
+          <p:style>
+            <a:lnRef idx="2">
+              <a:schemeClr val="accent1">
+                <a:shade val="15000"/>
+              </a:schemeClr>
+            </a:lnRef>
+            <a:fillRef idx="1">
+              <a:schemeClr val="accent1"/>
+            </a:fillRef>
+            <a:effectRef idx="0">
+              <a:schemeClr val="accent1"/>
+            </a:effectRef>
+            <a:fontRef idx="minor">
+              <a:schemeClr val="lt1"/>
+            </a:fontRef>
+          </p:style>
+          <p:txBody>
+            <a:bodyPr rtlCol="0" anchor="ctr"/>
+            <a:lstStyle/>
+            <a:p>
+              <a:pPr algn="ctr"/>
+              <a:endParaRPr lang="en-US"/>
+            </a:p>
+          </p:txBody>
+        </p:sp>
+        <p:sp>
+          <p:nvSpPr>
+            <p:cNvPr id="51" name="Arrow: Right 50">
+              <a:extLst>
+                <a:ext uri="{FF2B5EF4-FFF2-40B4-BE49-F238E27FC236}">
+                  <a16:creationId xmlns:a16="http://schemas.microsoft.com/office/drawing/2014/main" id="{EE76C07C-1CEA-D19B-700D-47F57D3F9629}"/>
+                </a:ext>
+              </a:extLst>
+            </p:cNvPr>
+            <p:cNvSpPr/>
+            <p:nvPr/>
+          </p:nvSpPr>
+          <p:spPr>
+            <a:xfrm>
+              <a:off x="14874389" y="29479619"/>
+              <a:ext cx="6298407" cy="1212112"/>
+            </a:xfrm>
+            <a:prstGeom prst="rightArrow">
+              <a:avLst/>
+            </a:prstGeom>
+            <a:grpFill/>
+            <a:ln>
+              <a:noFill/>
+            </a:ln>
+          </p:spPr>
+          <p:style>
+            <a:lnRef idx="2">
+              <a:schemeClr val="accent1">
+                <a:shade val="15000"/>
+              </a:schemeClr>
+            </a:lnRef>
+            <a:fillRef idx="1">
+              <a:schemeClr val="accent1"/>
+            </a:fillRef>
+            <a:effectRef idx="0">
+              <a:schemeClr val="accent1"/>
+            </a:effectRef>
+            <a:fontRef idx="minor">
+              <a:schemeClr val="lt1"/>
+            </a:fontRef>
+          </p:style>
+          <p:txBody>
+            <a:bodyPr rtlCol="0" anchor="ctr"/>
+            <a:lstStyle/>
+            <a:p>
+              <a:pPr marL="0" marR="0" lvl="0" indent="0" algn="ctr" defTabSz="4388166" rtl="0" eaLnBrk="1" fontAlgn="auto" latinLnBrk="0" hangingPunct="1">
+                <a:lnSpc>
+                  <a:spcPct val="100000"/>
+                </a:lnSpc>
+                <a:spcBef>
+                  <a:spcPts val="0"/>
+                </a:spcBef>
+                <a:spcAft>
+                  <a:spcPts val="0"/>
+                </a:spcAft>
+                <a:buClrTx/>
+                <a:buSzTx/>
+                <a:buFontTx/>
+                <a:buNone/>
+                <a:tabLst/>
+                <a:defRPr/>
+              </a:pPr>
+              <a:r>
+                <a:rPr kumimoji="0" lang="en-US" sz="2800" b="0" i="0" u="none" strike="noStrike" kern="1200" cap="none" spc="0" normalizeH="0" baseline="0" noProof="0" dirty="0">
+                  <a:ln>
+                    <a:noFill/>
+                  </a:ln>
+                  <a:solidFill>
+                    <a:srgbClr val="FFFFFF"/>
+                  </a:solidFill>
+                  <a:effectLst/>
+                  <a:uLnTx/>
+                  <a:uFillTx/>
+                  <a:latin typeface="Arial"/>
+                  <a:ea typeface="+mn-ea"/>
+                  <a:cs typeface="+mn-cs"/>
+                </a:rPr>
+                <a:t>EM projects catch advice 202</a:t>
+              </a:r>
+              <a:r>
+                <a:rPr lang="en-US" sz="2800" dirty="0">
+                  <a:solidFill>
+                    <a:srgbClr val="FFFFFF"/>
+                  </a:solidFill>
+                  <a:latin typeface="Arial"/>
+                </a:rPr>
+                <a:t>8</a:t>
+              </a:r>
+              <a:r>
+                <a:rPr kumimoji="0" lang="en-US" sz="2800" b="0" i="0" u="none" strike="noStrike" kern="1200" cap="none" spc="0" normalizeH="0" baseline="0" noProof="0" dirty="0">
+                  <a:ln>
+                    <a:noFill/>
+                  </a:ln>
+                  <a:solidFill>
+                    <a:srgbClr val="FFFFFF"/>
+                  </a:solidFill>
+                  <a:effectLst/>
+                  <a:uLnTx/>
+                  <a:uFillTx/>
+                  <a:latin typeface="Arial"/>
+                  <a:ea typeface="+mn-ea"/>
+                  <a:cs typeface="+mn-cs"/>
+                </a:rPr>
+                <a:t>-2031</a:t>
               </a:r>
             </a:p>
           </p:txBody>
@@ -10380,312 +10702,368 @@
       </p:grpSp>
       <p:sp>
         <p:nvSpPr>
-          <p:cNvPr id="1045" name="Rectangle: Rounded Corners 1044">
+          <p:cNvPr id="1036" name="TextBox 1035">
             <a:extLst>
               <a:ext uri="{FF2B5EF4-FFF2-40B4-BE49-F238E27FC236}">
-                <a16:creationId xmlns:a16="http://schemas.microsoft.com/office/drawing/2014/main" id="{B46EB768-C7B2-A710-8FCF-0E439A257412}"/>
+                <a16:creationId xmlns:a16="http://schemas.microsoft.com/office/drawing/2014/main" id="{B192A6B5-A5FA-8678-A1EA-A4836EF1EAC2}"/>
               </a:ext>
             </a:extLst>
           </p:cNvPr>
-          <p:cNvSpPr/>
+          <p:cNvSpPr txBox="1"/>
           <p:nvPr/>
         </p:nvSpPr>
         <p:spPr>
           <a:xfrm>
-            <a:off x="21802128" y="24797160"/>
-            <a:ext cx="5657915" cy="3112416"/>
+            <a:off x="29389199" y="27800048"/>
+            <a:ext cx="13021110" cy="4185761"/>
           </a:xfrm>
-          <a:prstGeom prst="roundRect">
+          <a:prstGeom prst="rect">
             <a:avLst/>
           </a:prstGeom>
-          <a:solidFill>
-            <a:schemeClr val="bg2">
-              <a:lumMod val="75000"/>
-            </a:schemeClr>
-          </a:solidFill>
-          <a:ln>
-            <a:noFill/>
-          </a:ln>
+          <a:noFill/>
         </p:spPr>
-        <p:style>
-          <a:lnRef idx="2">
-            <a:schemeClr val="accent1">
-              <a:shade val="15000"/>
-            </a:schemeClr>
-          </a:lnRef>
-          <a:fillRef idx="1">
-            <a:schemeClr val="accent1"/>
-          </a:fillRef>
-          <a:effectRef idx="0">
-            <a:schemeClr val="accent1"/>
-          </a:effectRef>
-          <a:fontRef idx="minor">
-            <a:schemeClr val="lt1"/>
-          </a:fontRef>
-        </p:style>
         <p:txBody>
-          <a:bodyPr rtlCol="0" anchor="ctr"/>
+          <a:bodyPr wrap="square" rtlCol="0">
+            <a:spAutoFit/>
+          </a:bodyPr>
           <a:lstStyle/>
           <a:p>
-            <a:pPr lvl="0" algn="ctr" defTabSz="914400">
-              <a:defRPr/>
-            </a:pPr>
-            <a:r>
-              <a:rPr lang="en-US" sz="6000" kern="0" dirty="0">
-                <a:solidFill>
-                  <a:schemeClr val="bg1"/>
-                </a:solidFill>
+            <a:r>
+              <a:rPr lang="en-US" sz="1400" dirty="0">
+                <a:solidFill>
+                  <a:srgbClr val="000000"/>
+                </a:solidFill>
+                <a:latin typeface="Avenir Next LT Pro" panose="020B0504020202020204" pitchFamily="34" charset="0"/>
               </a:rPr>
-              <a:t>Evaluation Continued…</a:t>
-            </a:r>
+              <a:t>Chen, Y., Maguire, J.J., Dickey-Collas, M., Kempf, A. (2022). Summary Report of the Yellowtail Flounder Research Track Stock Assessment. </a:t>
+            </a:r>
+            <a:r>
+              <a:rPr lang="en-US" sz="1400" dirty="0" err="1">
+                <a:solidFill>
+                  <a:srgbClr val="000000"/>
+                </a:solidFill>
+                <a:latin typeface="Avenir Next LT Pro" panose="020B0504020202020204" pitchFamily="34" charset="0"/>
+              </a:rPr>
+              <a:t>Northesast</a:t>
+            </a:r>
+            <a:r>
+              <a:rPr lang="en-US" sz="1400" dirty="0">
+                <a:solidFill>
+                  <a:srgbClr val="000000"/>
+                </a:solidFill>
+                <a:latin typeface="Avenir Next LT Pro" panose="020B0504020202020204" pitchFamily="34" charset="0"/>
+              </a:rPr>
+              <a:t> Fisheries Science Center, Woods Hole, Massachusetts.</a:t>
+            </a:r>
+          </a:p>
+          <a:p>
+            <a:endParaRPr lang="en-US" sz="1400" dirty="0">
+              <a:solidFill>
+                <a:srgbClr val="000000"/>
+              </a:solidFill>
+              <a:latin typeface="Avenir Next LT Pro" panose="020B0504020202020204" pitchFamily="34" charset="0"/>
+            </a:endParaRPr>
+          </a:p>
+          <a:p>
+            <a:r>
+              <a:rPr lang="en-US" sz="1400" dirty="0">
+                <a:solidFill>
+                  <a:srgbClr val="000000"/>
+                </a:solidFill>
+                <a:latin typeface="Avenir Next LT Pro" panose="020B0504020202020204" pitchFamily="34" charset="0"/>
+              </a:rPr>
+              <a:t>Hyun, S.Y., Cadrin, S.X., Roman, S. (2014). Fixed and mixed effect models for fishery data on depth distribution of Georges Bank yellowtail flounder. Fisheries Research, 157, 186-186.</a:t>
+            </a:r>
+          </a:p>
+          <a:p>
+            <a:endParaRPr lang="en-US" sz="1400" dirty="0">
+              <a:solidFill>
+                <a:srgbClr val="000000"/>
+              </a:solidFill>
+              <a:latin typeface="Avenir Next LT Pro" panose="020B0504020202020204" pitchFamily="34" charset="0"/>
+            </a:endParaRPr>
+          </a:p>
+          <a:p>
+            <a:r>
+              <a:rPr lang="en-US" sz="1400" dirty="0">
+                <a:solidFill>
+                  <a:srgbClr val="000000"/>
+                </a:solidFill>
+                <a:latin typeface="Avenir Next LT Pro" panose="020B0504020202020204" pitchFamily="34" charset="0"/>
+              </a:rPr>
+              <a:t>Li C (2025). _whamMSE: Management Strategy Evaluation Tool of Woods Hole Assessment Model (WHAM)_. R package version 1.0.0, commit 1397998b05eae9b4766c6fa0377114b3e675461e, &lt;https://github.com/lichengxue/whamMSE&gt;.</a:t>
+            </a:r>
+          </a:p>
+          <a:p>
+            <a:endParaRPr lang="en-US" sz="1400" dirty="0">
+              <a:solidFill>
+                <a:srgbClr val="000000"/>
+              </a:solidFill>
+              <a:latin typeface="Avenir Next LT Pro" panose="020B0504020202020204" pitchFamily="34" charset="0"/>
+            </a:endParaRPr>
+          </a:p>
+          <a:p>
+            <a:r>
+              <a:rPr lang="en-US" sz="1400" dirty="0">
+                <a:solidFill>
+                  <a:srgbClr val="000000"/>
+                </a:solidFill>
+                <a:latin typeface="Avenir Next LT Pro" panose="020B0504020202020204" pitchFamily="34" charset="0"/>
+              </a:rPr>
+              <a:t>Ross, A. C., Stock, C. A., </a:t>
+            </a:r>
+            <a:r>
+              <a:rPr lang="en-US" sz="1400" dirty="0" err="1">
+                <a:solidFill>
+                  <a:srgbClr val="000000"/>
+                </a:solidFill>
+                <a:latin typeface="Avenir Next LT Pro" panose="020B0504020202020204" pitchFamily="34" charset="0"/>
+              </a:rPr>
+              <a:t>Adcroft</a:t>
+            </a:r>
+            <a:r>
+              <a:rPr lang="en-US" sz="1400" dirty="0">
+                <a:solidFill>
+                  <a:srgbClr val="000000"/>
+                </a:solidFill>
+                <a:latin typeface="Avenir Next LT Pro" panose="020B0504020202020204" pitchFamily="34" charset="0"/>
+              </a:rPr>
+              <a:t>, A., </a:t>
+            </a:r>
+            <a:r>
+              <a:rPr lang="en-US" sz="1400" dirty="0" err="1">
+                <a:solidFill>
+                  <a:srgbClr val="000000"/>
+                </a:solidFill>
+                <a:latin typeface="Avenir Next LT Pro" panose="020B0504020202020204" pitchFamily="34" charset="0"/>
+              </a:rPr>
+              <a:t>Curchitser</a:t>
+            </a:r>
+            <a:r>
+              <a:rPr lang="en-US" sz="1400" dirty="0">
+                <a:solidFill>
+                  <a:srgbClr val="000000"/>
+                </a:solidFill>
+                <a:latin typeface="Avenir Next LT Pro" panose="020B0504020202020204" pitchFamily="34" charset="0"/>
+              </a:rPr>
+              <a:t>, E., Hallberg, R., Harrison, M. J., Hedstrom, K., Zadeh, N., Alexander, M., Chen, W., </a:t>
+            </a:r>
+            <a:r>
+              <a:rPr lang="en-US" sz="1400" dirty="0" err="1">
+                <a:solidFill>
+                  <a:srgbClr val="000000"/>
+                </a:solidFill>
+                <a:latin typeface="Avenir Next LT Pro" panose="020B0504020202020204" pitchFamily="34" charset="0"/>
+              </a:rPr>
+              <a:t>Drenkard</a:t>
+            </a:r>
+            <a:r>
+              <a:rPr lang="en-US" sz="1400" dirty="0">
+                <a:solidFill>
+                  <a:srgbClr val="000000"/>
+                </a:solidFill>
+                <a:latin typeface="Avenir Next LT Pro" panose="020B0504020202020204" pitchFamily="34" charset="0"/>
+              </a:rPr>
+              <a:t>, E. J., du </a:t>
+            </a:r>
+            <a:r>
+              <a:rPr lang="en-US" sz="1400" dirty="0" err="1">
+                <a:solidFill>
+                  <a:srgbClr val="000000"/>
+                </a:solidFill>
+                <a:latin typeface="Avenir Next LT Pro" panose="020B0504020202020204" pitchFamily="34" charset="0"/>
+              </a:rPr>
+              <a:t>Pontavice</a:t>
+            </a:r>
+            <a:r>
+              <a:rPr lang="en-US" sz="1400" dirty="0">
+                <a:solidFill>
+                  <a:srgbClr val="000000"/>
+                </a:solidFill>
+                <a:latin typeface="Avenir Next LT Pro" panose="020B0504020202020204" pitchFamily="34" charset="0"/>
+              </a:rPr>
+              <a:t>, H., </a:t>
+            </a:r>
+            <a:r>
+              <a:rPr lang="en-US" sz="1400" dirty="0" err="1">
+                <a:solidFill>
+                  <a:srgbClr val="000000"/>
+                </a:solidFill>
+                <a:latin typeface="Avenir Next LT Pro" panose="020B0504020202020204" pitchFamily="34" charset="0"/>
+              </a:rPr>
+              <a:t>Dussin</a:t>
+            </a:r>
+            <a:r>
+              <a:rPr lang="en-US" sz="1400" dirty="0">
+                <a:solidFill>
+                  <a:srgbClr val="000000"/>
+                </a:solidFill>
+                <a:latin typeface="Avenir Next LT Pro" panose="020B0504020202020204" pitchFamily="34" charset="0"/>
+              </a:rPr>
+              <a:t>, R., Gomez, F., John, J. G., Kang, D., Lavoie, D., </a:t>
+            </a:r>
+            <a:r>
+              <a:rPr lang="en-US" sz="1400" dirty="0" err="1">
+                <a:solidFill>
+                  <a:srgbClr val="000000"/>
+                </a:solidFill>
+                <a:latin typeface="Avenir Next LT Pro" panose="020B0504020202020204" pitchFamily="34" charset="0"/>
+              </a:rPr>
+              <a:t>Resplandy</a:t>
+            </a:r>
+            <a:r>
+              <a:rPr lang="en-US" sz="1400" dirty="0">
+                <a:solidFill>
+                  <a:srgbClr val="000000"/>
+                </a:solidFill>
+                <a:latin typeface="Avenir Next LT Pro" panose="020B0504020202020204" pitchFamily="34" charset="0"/>
+              </a:rPr>
+              <a:t>, L., </a:t>
+            </a:r>
+            <a:r>
+              <a:rPr lang="en-US" sz="1400" dirty="0" err="1">
+                <a:solidFill>
+                  <a:srgbClr val="000000"/>
+                </a:solidFill>
+                <a:latin typeface="Avenir Next LT Pro" panose="020B0504020202020204" pitchFamily="34" charset="0"/>
+              </a:rPr>
+              <a:t>Roobaert</a:t>
+            </a:r>
+            <a:r>
+              <a:rPr lang="en-US" sz="1400" dirty="0">
+                <a:solidFill>
+                  <a:srgbClr val="000000"/>
+                </a:solidFill>
+                <a:latin typeface="Avenir Next LT Pro" panose="020B0504020202020204" pitchFamily="34" charset="0"/>
+              </a:rPr>
+              <a:t>, A., Saba, V., Shin, S.-I., Siedlecki, S., and Simkins, J.: A high-resolution physical–biogeochemical model for marine resource applications in the northwest Atlantic (MOM6-COBALT-NWA12 v1.0). (2013). </a:t>
+            </a:r>
+            <a:r>
+              <a:rPr lang="en-US" sz="1400" dirty="0" err="1">
+                <a:solidFill>
+                  <a:srgbClr val="000000"/>
+                </a:solidFill>
+                <a:latin typeface="Avenir Next LT Pro" panose="020B0504020202020204" pitchFamily="34" charset="0"/>
+              </a:rPr>
+              <a:t>Geosci</a:t>
+            </a:r>
+            <a:r>
+              <a:rPr lang="en-US" sz="1400" dirty="0">
+                <a:solidFill>
+                  <a:srgbClr val="000000"/>
+                </a:solidFill>
+                <a:latin typeface="Avenir Next LT Pro" panose="020B0504020202020204" pitchFamily="34" charset="0"/>
+              </a:rPr>
+              <a:t>. Model Dev., 16, 6943–6985, https://doi.org/10.5194/gmd-16-6943-2023.</a:t>
+            </a:r>
+          </a:p>
+          <a:p>
+            <a:endParaRPr lang="en-US" sz="1400" dirty="0">
+              <a:solidFill>
+                <a:srgbClr val="000000"/>
+              </a:solidFill>
+              <a:latin typeface="Avenir Next LT Pro" panose="020B0504020202020204" pitchFamily="34" charset="0"/>
+            </a:endParaRPr>
+          </a:p>
+          <a:p>
+            <a:r>
+              <a:rPr lang="en-US" sz="1400" dirty="0">
+                <a:solidFill>
+                  <a:srgbClr val="000000"/>
+                </a:solidFill>
+                <a:latin typeface="Avenir Next LT Pro" panose="020B0504020202020204" pitchFamily="34" charset="0"/>
+              </a:rPr>
+              <a:t>Stock, B. C., and Miller, T. J. 2021. The Woods Hole Assessment Model (WHAM):</a:t>
+            </a:r>
+          </a:p>
+          <a:p>
+            <a:r>
+              <a:rPr lang="en-US" sz="1400" dirty="0">
+                <a:solidFill>
+                  <a:srgbClr val="000000"/>
+                </a:solidFill>
+                <a:latin typeface="Avenir Next LT Pro" panose="020B0504020202020204" pitchFamily="34" charset="0"/>
+              </a:rPr>
+              <a:t>A general state-space assessment framework that incorporates time- and</a:t>
+            </a:r>
+          </a:p>
+          <a:p>
+            <a:r>
+              <a:rPr lang="en-US" sz="1400" dirty="0">
+                <a:solidFill>
+                  <a:srgbClr val="000000"/>
+                </a:solidFill>
+                <a:latin typeface="Avenir Next LT Pro" panose="020B0504020202020204" pitchFamily="34" charset="0"/>
+              </a:rPr>
+              <a:t>age-varying processes via random effects and links to environmental </a:t>
+            </a:r>
+          </a:p>
+          <a:p>
+            <a:r>
+              <a:rPr lang="en-US" sz="1400" dirty="0">
+                <a:solidFill>
+                  <a:srgbClr val="000000"/>
+                </a:solidFill>
+                <a:latin typeface="Avenir Next LT Pro" panose="020B0504020202020204" pitchFamily="34" charset="0"/>
+              </a:rPr>
+              <a:t>covariates. Fisheries Research, 240: 105967. doi:10.1016/j.fishres.2021.105967</a:t>
+            </a:r>
+            <a:endParaRPr lang="en-US" sz="1400" dirty="0">
+              <a:latin typeface="Avenir Next LT Pro" panose="020B0504020202020204" pitchFamily="34" charset="0"/>
+            </a:endParaRPr>
+          </a:p>
+          <a:p>
+            <a:endParaRPr lang="en-US" sz="1400" dirty="0"/>
           </a:p>
         </p:txBody>
       </p:sp>
       <p:pic>
         <p:nvPicPr>
-          <p:cNvPr id="1052" name="Picture 1051">
+          <p:cNvPr id="1037" name="Picture 12" descr="Sophie Wulfing">
             <a:extLst>
               <a:ext uri="{FF2B5EF4-FFF2-40B4-BE49-F238E27FC236}">
-                <a16:creationId xmlns:a16="http://schemas.microsoft.com/office/drawing/2014/main" id="{EA66B52D-CE3D-F4CF-A059-5DC0ACAAF2D5}"/>
+                <a16:creationId xmlns:a16="http://schemas.microsoft.com/office/drawing/2014/main" id="{1FECA9BA-7166-27C0-36DB-5889916100B0}"/>
               </a:ext>
             </a:extLst>
           </p:cNvPr>
           <p:cNvPicPr>
-            <a:picLocks noChangeAspect="1"/>
+            <a:picLocks noChangeAspect="1" noChangeArrowheads="1"/>
           </p:cNvPicPr>
           <p:nvPr/>
         </p:nvPicPr>
         <p:blipFill>
-          <a:blip r:embed="rId4"/>
+          <a:blip r:embed="rId4">
+            <a:extLst>
+              <a:ext uri="{28A0092B-C50C-407E-A947-70E740481C1C}">
+                <a14:useLocalDpi xmlns:a14="http://schemas.microsoft.com/office/drawing/2010/main" val="0"/>
+              </a:ext>
+            </a:extLst>
+          </a:blip>
+          <a:srcRect/>
           <a:stretch>
             <a:fillRect/>
           </a:stretch>
         </p:blipFill>
-        <p:spPr>
+        <p:spPr bwMode="auto">
           <a:xfrm>
-            <a:off x="28089376" y="6556252"/>
-            <a:ext cx="14711678" cy="9469832"/>
+            <a:off x="37704399" y="-26838"/>
+            <a:ext cx="4945835" cy="4945835"/>
           </a:xfrm>
-          <a:prstGeom prst="rect">
+          <a:prstGeom prst="ellipse">
             <a:avLst/>
           </a:prstGeom>
+          <a:noFill/>
+          <a:extLst>
+            <a:ext uri="{909E8E84-426E-40DD-AFC4-6F175D3DCCD1}">
+              <a14:hiddenFill xmlns:a14="http://schemas.microsoft.com/office/drawing/2010/main">
+                <a:solidFill>
+                  <a:srgbClr val="FFFFFF"/>
+                </a:solidFill>
+              </a14:hiddenFill>
+            </a:ext>
+          </a:extLst>
         </p:spPr>
       </p:pic>
-      <p:cxnSp>
-        <p:nvCxnSpPr>
-          <p:cNvPr id="21" name="Straight Connector 20">
-            <a:extLst>
-              <a:ext uri="{FF2B5EF4-FFF2-40B4-BE49-F238E27FC236}">
-                <a16:creationId xmlns:a16="http://schemas.microsoft.com/office/drawing/2014/main" id="{FD1501CA-F393-EA63-4E64-9C77AAA4EEFA}"/>
-              </a:ext>
-            </a:extLst>
-          </p:cNvPr>
-          <p:cNvCxnSpPr>
-            <a:cxnSpLocks/>
-          </p:cNvCxnSpPr>
-          <p:nvPr/>
-        </p:nvCxnSpPr>
-        <p:spPr>
-          <a:xfrm>
-            <a:off x="34686290" y="6265845"/>
-            <a:ext cx="0" cy="8817355"/>
-          </a:xfrm>
-          <a:prstGeom prst="line">
-            <a:avLst/>
-          </a:prstGeom>
-          <a:ln w="57150">
-            <a:solidFill>
-              <a:srgbClr val="C00000"/>
-            </a:solidFill>
-          </a:ln>
-        </p:spPr>
-        <p:style>
-          <a:lnRef idx="1">
-            <a:schemeClr val="accent1"/>
-          </a:lnRef>
-          <a:fillRef idx="0">
-            <a:schemeClr val="accent1"/>
-          </a:fillRef>
-          <a:effectRef idx="0">
-            <a:schemeClr val="accent1"/>
-          </a:effectRef>
-          <a:fontRef idx="minor">
-            <a:schemeClr val="tx1"/>
-          </a:fontRef>
-        </p:style>
-      </p:cxnSp>
-      <p:sp>
-        <p:nvSpPr>
-          <p:cNvPr id="6" name="Text Placeholder 13">
-            <a:extLst>
-              <a:ext uri="{FF2B5EF4-FFF2-40B4-BE49-F238E27FC236}">
-                <a16:creationId xmlns:a16="http://schemas.microsoft.com/office/drawing/2014/main" id="{F24D0BCB-00CD-B7AD-EB8D-C62DDE3FDE91}"/>
-              </a:ext>
-            </a:extLst>
-          </p:cNvPr>
-          <p:cNvSpPr txBox="1">
-            <a:spLocks/>
-          </p:cNvSpPr>
-          <p:nvPr/>
-        </p:nvSpPr>
-        <p:spPr>
-          <a:xfrm>
-            <a:off x="27172370" y="15793462"/>
-            <a:ext cx="15690771" cy="1154162"/>
-          </a:xfrm>
-          <a:prstGeom prst="rect">
-            <a:avLst/>
-          </a:prstGeom>
-        </p:spPr>
-        <p:txBody>
-          <a:bodyPr wrap="square" lIns="91440" tIns="45720" rIns="91440" bIns="0">
-            <a:spAutoFit/>
-          </a:bodyPr>
-          <a:lstStyle>
-            <a:lvl1pPr marL="0" indent="0" algn="l" defTabSz="4388166" rtl="0" eaLnBrk="1" latinLnBrk="0" hangingPunct="1">
-              <a:spcBef>
-                <a:spcPct val="20000"/>
-              </a:spcBef>
-              <a:buFontTx/>
-              <a:buNone/>
-              <a:defRPr sz="2800" b="0" kern="1200" spc="198" baseline="0">
-                <a:solidFill>
-                  <a:schemeClr val="tx1"/>
-                </a:solidFill>
-                <a:latin typeface="Avenir Next LT Pro" panose="020B0504020202020204" pitchFamily="34" charset="0"/>
-                <a:ea typeface="+mn-ea"/>
-                <a:cs typeface="Arial" panose="020B0604020202020204" pitchFamily="34" charset="0"/>
-              </a:defRPr>
-            </a:lvl1pPr>
-            <a:lvl2pPr marL="667227" indent="-248603" algn="l" defTabSz="4388166" rtl="0" eaLnBrk="1" latinLnBrk="0" hangingPunct="1">
-              <a:spcBef>
-                <a:spcPct val="20000"/>
-              </a:spcBef>
-              <a:buFont typeface="Arial" panose="020B0604020202020204" pitchFamily="34" charset="0"/>
-              <a:buChar char="•"/>
-              <a:defRPr sz="2800" b="0" kern="1200" spc="198" baseline="0">
-                <a:solidFill>
-                  <a:schemeClr val="tx1"/>
-                </a:solidFill>
-                <a:latin typeface="Avenir Next LT Pro" panose="020B0504020202020204" pitchFamily="34" charset="0"/>
-                <a:ea typeface="+mn-ea"/>
-                <a:cs typeface="Arial" panose="020B0604020202020204" pitchFamily="34" charset="0"/>
-              </a:defRPr>
-            </a:lvl2pPr>
-            <a:lvl3pPr marL="1132999" indent="-201454" algn="l" defTabSz="4388166" rtl="0" eaLnBrk="1" latinLnBrk="0" hangingPunct="1">
-              <a:spcBef>
-                <a:spcPct val="20000"/>
-              </a:spcBef>
-              <a:buFont typeface="Arial" panose="020B0604020202020204" pitchFamily="34" charset="0"/>
-              <a:buChar char="•"/>
-              <a:defRPr sz="2800" b="0" kern="1200" spc="198" baseline="0">
-                <a:solidFill>
-                  <a:schemeClr val="tx1"/>
-                </a:solidFill>
-                <a:latin typeface="Avenir Next LT Pro" panose="020B0504020202020204" pitchFamily="34" charset="0"/>
-                <a:ea typeface="+mn-ea"/>
-                <a:cs typeface="Arial" panose="020B0604020202020204" pitchFamily="34" charset="0"/>
-              </a:defRPr>
-            </a:lvl3pPr>
-            <a:lvl4pPr marL="1754505" indent="-311468" algn="l" defTabSz="4388166" rtl="0" eaLnBrk="1" latinLnBrk="0" hangingPunct="1">
-              <a:spcBef>
-                <a:spcPct val="20000"/>
-              </a:spcBef>
-              <a:buFont typeface="Arial" panose="020B0604020202020204" pitchFamily="34" charset="0"/>
-              <a:buChar char="•"/>
-              <a:defRPr sz="2400" b="0" kern="1200" spc="198" baseline="0">
-                <a:solidFill>
-                  <a:schemeClr val="tx1"/>
-                </a:solidFill>
-                <a:latin typeface="Avenir Next LT Pro" panose="020B0504020202020204" pitchFamily="34" charset="0"/>
-                <a:ea typeface="+mn-ea"/>
-                <a:cs typeface="Arial" panose="020B0604020202020204" pitchFamily="34" charset="0"/>
-              </a:defRPr>
-            </a:lvl4pPr>
-            <a:lvl5pPr marL="2313147" indent="-285750" algn="l" defTabSz="4388166" rtl="0" eaLnBrk="1" latinLnBrk="0" hangingPunct="1">
-              <a:spcBef>
-                <a:spcPct val="20000"/>
-              </a:spcBef>
-              <a:buFont typeface="Arial" panose="020B0604020202020204" pitchFamily="34" charset="0"/>
-              <a:buChar char="•"/>
-              <a:defRPr sz="2400" b="0" kern="1200" spc="198" baseline="0">
-                <a:solidFill>
-                  <a:schemeClr val="tx1"/>
-                </a:solidFill>
-                <a:latin typeface="Avenir Next LT Pro" panose="020B0504020202020204" pitchFamily="34" charset="0"/>
-                <a:ea typeface="+mn-ea"/>
-                <a:cs typeface="Arial" panose="020B0604020202020204" pitchFamily="34" charset="0"/>
-              </a:defRPr>
-            </a:lvl5pPr>
-            <a:lvl6pPr marL="12067458" indent="-1097042" algn="l" defTabSz="4388166" rtl="0" eaLnBrk="1" latinLnBrk="0" hangingPunct="1">
-              <a:spcBef>
-                <a:spcPct val="20000"/>
-              </a:spcBef>
-              <a:buFont typeface="Arial" pitchFamily="34" charset="0"/>
-              <a:buChar char="•"/>
-              <a:defRPr sz="9600" kern="1200">
-                <a:solidFill>
-                  <a:schemeClr val="tx1"/>
-                </a:solidFill>
-                <a:latin typeface="+mn-lt"/>
-                <a:ea typeface="+mn-ea"/>
-                <a:cs typeface="+mn-cs"/>
-              </a:defRPr>
-            </a:lvl6pPr>
-            <a:lvl7pPr marL="14261540" indent="-1097042" algn="l" defTabSz="4388166" rtl="0" eaLnBrk="1" latinLnBrk="0" hangingPunct="1">
-              <a:spcBef>
-                <a:spcPct val="20000"/>
-              </a:spcBef>
-              <a:buFont typeface="Arial" pitchFamily="34" charset="0"/>
-              <a:buChar char="•"/>
-              <a:defRPr sz="9600" kern="1200">
-                <a:solidFill>
-                  <a:schemeClr val="tx1"/>
-                </a:solidFill>
-                <a:latin typeface="+mn-lt"/>
-                <a:ea typeface="+mn-ea"/>
-                <a:cs typeface="+mn-cs"/>
-              </a:defRPr>
-            </a:lvl7pPr>
-            <a:lvl8pPr marL="16455624" indent="-1097042" algn="l" defTabSz="4388166" rtl="0" eaLnBrk="1" latinLnBrk="0" hangingPunct="1">
-              <a:spcBef>
-                <a:spcPct val="20000"/>
-              </a:spcBef>
-              <a:buFont typeface="Arial" pitchFamily="34" charset="0"/>
-              <a:buChar char="•"/>
-              <a:defRPr sz="9600" kern="1200">
-                <a:solidFill>
-                  <a:schemeClr val="tx1"/>
-                </a:solidFill>
-                <a:latin typeface="+mn-lt"/>
-                <a:ea typeface="+mn-ea"/>
-                <a:cs typeface="+mn-cs"/>
-              </a:defRPr>
-            </a:lvl8pPr>
-            <a:lvl9pPr marL="18649706" indent="-1097042" algn="l" defTabSz="4388166" rtl="0" eaLnBrk="1" latinLnBrk="0" hangingPunct="1">
-              <a:spcBef>
-                <a:spcPct val="20000"/>
-              </a:spcBef>
-              <a:buFont typeface="Arial" pitchFamily="34" charset="0"/>
-              <a:buChar char="•"/>
-              <a:defRPr sz="9600" kern="1200">
-                <a:solidFill>
-                  <a:schemeClr val="tx1"/>
-                </a:solidFill>
-                <a:latin typeface="+mn-lt"/>
-                <a:ea typeface="+mn-ea"/>
-                <a:cs typeface="+mn-cs"/>
-              </a:defRPr>
-            </a:lvl9pPr>
-          </a:lstStyle>
-          <a:p>
-            <a:r>
-              <a:rPr lang="en-US" sz="3600" dirty="0"/>
-              <a:t>Figure 3: Example temperature Projections that will be used by each EM in each Evaluation Event</a:t>
-            </a:r>
-          </a:p>
-        </p:txBody>
-      </p:sp>
     </p:spTree>
     <p:extLst>
       <p:ext uri="{BB962C8B-B14F-4D97-AF65-F5344CB8AC3E}">
